--- a/hackathon_materials/slides/Connect-Force_submission.pptx
+++ b/hackathon_materials/slides/Connect-Force_submission.pptx
@@ -3763,7 +3763,7 @@
                 </a:solidFill>
                 <a:latin typeface="Noto Sans JP"/>
               </a:rPr>
-              <a:t>リポジトリから、そのまま動かせる（開発モード・テスト 853 件）</a:t>
+              <a:t>リポジトリから、そのまま動かせる（開発モード・テスト 885 件）</a:t>
             </a:r>
           </a:p>
         </p:txBody>
@@ -7121,7 +7121,7 @@
           <a:p>
             <a:pPr algn="l"/>
             <a:r>
-              <a:rPr sz="1450" b="0">
+              <a:rPr sz="1400" b="0">
                 <a:solidFill>
                   <a:srgbClr val="172433"/>
                 </a:solidFill>
@@ -7133,7 +7133,7 @@
           <a:p>
             <a:pPr algn="l"/>
             <a:r>
-              <a:rPr sz="1450" b="0">
+              <a:rPr sz="1400" b="0">
                 <a:solidFill>
                   <a:srgbClr val="172433"/>
                 </a:solidFill>
@@ -7145,7 +7145,7 @@
           <a:p>
             <a:pPr algn="l"/>
             <a:r>
-              <a:rPr sz="1450" b="0">
+              <a:rPr sz="1400" b="0">
                 <a:solidFill>
                   <a:srgbClr val="172433"/>
                 </a:solidFill>
@@ -7157,7 +7157,19 @@
           <a:p>
             <a:pPr algn="l"/>
             <a:r>
-              <a:rPr sz="1450" b="0">
+              <a:rPr sz="1400" b="0">
+                <a:solidFill>
+                  <a:srgbClr val="172433"/>
+                </a:solidFill>
+                <a:latin typeface="Noto Sans JP"/>
+              </a:rPr>
+              <a:t>表の形が壊れたら、AIに2〜3通り作り直させ、Excelの複数シートに分ける</a:t>
+            </a:r>
+          </a:p>
+          <a:p>
+            <a:pPr algn="l"/>
+            <a:r>
+              <a:rPr sz="1400" b="0">
                 <a:solidFill>
                   <a:srgbClr val="172433"/>
                 </a:solidFill>
@@ -7545,7 +7557,7 @@
                 </a:solidFill>
                 <a:latin typeface="Noto Sans JP"/>
               </a:rPr>
-              <a:t>自動テスト 853 件 ／ 門を外すと失敗する変異 35 か所</a:t>
+              <a:t>自動テスト 885 件 ／ 門を外すと失敗する変異 49 か所</a:t>
             </a:r>
           </a:p>
         </p:txBody>
@@ -8801,7 +8813,7 @@
                 </a:solidFill>
                 <a:latin typeface="Noto Sans JP"/>
               </a:rPr>
-              <a:t>853</a:t>
+              <a:t>885</a:t>
             </a:r>
           </a:p>
         </p:txBody>
@@ -8851,7 +8863,7 @@
         </p:nvGraphicFramePr>
         <p:xfrm>
           <a:off x="548640" y="3291840"/>
-          <a:ext cx="11064240" cy="2514600"/>
+          <a:ext cx="11064240" cy="2852928"/>
         </p:xfrm>
         <a:graphic>
           <a:graphicData uri="http://schemas.openxmlformats.org/drawingml/2006/table">
@@ -8863,14 +8875,14 @@
                 <a:gridCol w="2926080"/>
                 <a:gridCol w="8138160"/>
               </a:tblGrid>
-              <a:tr h="502920">
+              <a:tr h="475488">
                 <a:tc>
                   <a:txBody>
                     <a:bodyPr wrap="square"/>
                     <a:lstStyle/>
                     <a:p>
                       <a:r>
-                        <a:rPr sz="1350" b="1">
+                        <a:rPr sz="1300" b="1">
                           <a:solidFill>
                             <a:srgbClr val="FFFFFF"/>
                           </a:solidFill>
@@ -8892,7 +8904,7 @@
                     <a:lstStyle/>
                     <a:p>
                       <a:r>
-                        <a:rPr sz="1350" b="1">
+                        <a:rPr sz="1300" b="1">
                           <a:solidFill>
                             <a:srgbClr val="FFFFFF"/>
                           </a:solidFill>
@@ -8909,14 +8921,14 @@
                   </a:tcPr>
                 </a:tc>
               </a:tr>
-              <a:tr h="502920">
+              <a:tr h="475488">
                 <a:tc>
                   <a:txBody>
                     <a:bodyPr wrap="square"/>
                     <a:lstStyle/>
                     <a:p>
                       <a:r>
-                        <a:rPr sz="1350" b="1">
+                        <a:rPr sz="1300" b="1">
                           <a:solidFill>
                             <a:srgbClr val="172433"/>
                           </a:solidFill>
@@ -8938,7 +8950,7 @@
                     <a:lstStyle/>
                     <a:p>
                       <a:r>
-                        <a:rPr sz="1350" b="0">
+                        <a:rPr sz="1300" b="0">
                           <a:solidFill>
                             <a:srgbClr val="172433"/>
                           </a:solidFill>
@@ -8955,14 +8967,14 @@
                   </a:tcPr>
                 </a:tc>
               </a:tr>
-              <a:tr h="502920">
+              <a:tr h="475488">
                 <a:tc>
                   <a:txBody>
                     <a:bodyPr wrap="square"/>
                     <a:lstStyle/>
                     <a:p>
                       <a:r>
-                        <a:rPr sz="1350" b="1">
+                        <a:rPr sz="1300" b="1">
                           <a:solidFill>
                             <a:srgbClr val="172433"/>
                           </a:solidFill>
@@ -8984,7 +8996,7 @@
                     <a:lstStyle/>
                     <a:p>
                       <a:r>
-                        <a:rPr sz="1350" b="0">
+                        <a:rPr sz="1300" b="0">
                           <a:solidFill>
                             <a:srgbClr val="172433"/>
                           </a:solidFill>
@@ -9001,14 +9013,14 @@
                   </a:tcPr>
                 </a:tc>
               </a:tr>
-              <a:tr h="502920">
+              <a:tr h="475488">
                 <a:tc>
                   <a:txBody>
                     <a:bodyPr wrap="square"/>
                     <a:lstStyle/>
                     <a:p>
                       <a:r>
-                        <a:rPr sz="1350" b="1">
+                        <a:rPr sz="1300" b="1">
                           <a:solidFill>
                             <a:srgbClr val="172433"/>
                           </a:solidFill>
@@ -9030,7 +9042,7 @@
                     <a:lstStyle/>
                     <a:p>
                       <a:r>
-                        <a:rPr sz="1350" b="0">
+                        <a:rPr sz="1300" b="0">
                           <a:solidFill>
                             <a:srgbClr val="172433"/>
                           </a:solidFill>
@@ -9047,14 +9059,14 @@
                   </a:tcPr>
                 </a:tc>
               </a:tr>
-              <a:tr h="502920">
+              <a:tr h="475488">
                 <a:tc>
                   <a:txBody>
                     <a:bodyPr wrap="square"/>
                     <a:lstStyle/>
                     <a:p>
                       <a:r>
-                        <a:rPr sz="1350" b="1">
+                        <a:rPr sz="1300" b="1">
                           <a:solidFill>
                             <a:srgbClr val="172433"/>
                           </a:solidFill>
@@ -9076,7 +9088,7 @@
                     <a:lstStyle/>
                     <a:p>
                       <a:r>
-                        <a:rPr sz="1350" b="0">
+                        <a:rPr sz="1300" b="0">
                           <a:solidFill>
                             <a:srgbClr val="172433"/>
                           </a:solidFill>
@@ -9089,6 +9101,52 @@
                   <a:tcPr marL="73152" marR="73152" marT="36576" marB="36576" anchor="ctr">
                     <a:solidFill>
                       <a:srgbClr val="FFFFFF"/>
+                    </a:solidFill>
+                  </a:tcPr>
+                </a:tc>
+              </a:tr>
+              <a:tr h="475488">
+                <a:tc>
+                  <a:txBody>
+                    <a:bodyPr wrap="square"/>
+                    <a:lstStyle/>
+                    <a:p>
+                      <a:r>
+                        <a:rPr sz="1300" b="1">
+                          <a:solidFill>
+                            <a:srgbClr val="172433"/>
+                          </a:solidFill>
+                          <a:latin typeface="Noto Sans JP"/>
+                        </a:rPr>
+                        <a:t>表の形が壊れたとき</a:t>
+                      </a:r>
+                    </a:p>
+                  </a:txBody>
+                  <a:tcPr marL="73152" marR="73152" marT="36576" marB="36576" anchor="ctr">
+                    <a:solidFill>
+                      <a:srgbClr val="F4F8FC"/>
+                    </a:solidFill>
+                  </a:tcPr>
+                </a:tc>
+                <a:tc>
+                  <a:txBody>
+                    <a:bodyPr wrap="square"/>
+                    <a:lstStyle/>
+                    <a:p>
+                      <a:r>
+                        <a:rPr sz="1300" b="0">
+                          <a:solidFill>
+                            <a:srgbClr val="172433"/>
+                          </a:solidFill>
+                          <a:latin typeface="Noto Sans JP"/>
+                        </a:rPr>
+                        <a:t>AI に 2〜3 通り作り直させ、Excel の複数シートに。作り直しは 13〜15 秒・約 $0.02</a:t>
+                      </a:r>
+                    </a:p>
+                  </a:txBody>
+                  <a:tcPr marL="73152" marR="73152" marT="36576" marB="36576" anchor="ctr">
+                    <a:solidFill>
+                      <a:srgbClr val="F4F8FC"/>
                     </a:solidFill>
                   </a:tcPr>
                 </a:tc>

--- a/hackathon_materials/slides/Connect-Force_submission.pptx
+++ b/hackathon_materials/slides/Connect-Force_submission.pptx
@@ -19,6 +19,7 @@
     <p:sldId xmlns:ns0="http://schemas.openxmlformats.org/officeDocument/2006/relationships" id="264" ns0:id="rId15"/>
     <p:sldId xmlns:ns0="http://schemas.openxmlformats.org/officeDocument/2006/relationships" id="265" ns0:id="rId16"/>
     <p:sldId xmlns:ns0="http://schemas.openxmlformats.org/officeDocument/2006/relationships" id="266" ns0:id="rId17"/>
+    <p:sldId xmlns:ns0="http://schemas.openxmlformats.org/officeDocument/2006/relationships" id="267" ns0:id="rId18"/>
   </p:sldIdLst>
   <p:sldSz cx="12192000" cy="6858000"/>
   <p:notesSz cx="6858000" cy="9144000"/>
@@ -404,6 +405,76 @@
           <a:p>
             <a:r>
               <a:t>一言で：物にかざすと経緯が開く。会話を聞いて、次の業務の資料とメールを、下書きまで作る。送るのは人。</a:t>
+            </a:r>
+          </a:p>
+        </p:txBody>
+      </p:sp>
+      <p:sp>
+        <p:nvSpPr>
+          <p:cNvPr id="4" name="Slide Number Placeholder 3"/>
+          <p:cNvSpPr>
+            <a:spLocks noGrp="1"/>
+          </p:cNvSpPr>
+          <p:nvPr>
+            <p:ph type="sldNum" idx="5" sz="quarter"/>
+          </p:nvPr>
+        </p:nvSpPr>
+        <p:spPr/>
+      </p:sp>
+    </p:spTree>
+  </p:cSld>
+  <p:clrMapOvr>
+    <a:masterClrMapping/>
+  </p:clrMapOvr>
+</p:notes>
+</file>
+
+<file path=ppt/notesSlides/notesSlide2.xml><?xml version="1.0" encoding="utf-8"?>
+<p:notes xmlns:a="http://schemas.openxmlformats.org/drawingml/2006/main" xmlns:p="http://schemas.openxmlformats.org/presentationml/2006/main" xmlns:r="http://schemas.openxmlformats.org/officeDocument/2006/relationships">
+  <p:cSld>
+    <p:spTree>
+      <p:nvGrpSpPr>
+        <p:cNvPr id="1" name=""/>
+        <p:cNvGrpSpPr/>
+        <p:nvPr/>
+      </p:nvGrpSpPr>
+      <p:grpSpPr>
+        <a:xfrm>
+          <a:off x="0" y="0"/>
+          <a:ext cx="0" cy="0"/>
+          <a:chOff x="0" y="0"/>
+          <a:chExt cx="0" cy="0"/>
+        </a:xfrm>
+      </p:grpSpPr>
+      <p:sp>
+        <p:nvSpPr>
+          <p:cNvPr id="2" name="Slide Image Placeholder 1"/>
+          <p:cNvSpPr>
+            <a:spLocks noGrp="1"/>
+          </p:cNvSpPr>
+          <p:nvPr>
+            <p:ph type="sldImg" idx="2"/>
+          </p:nvPr>
+        </p:nvSpPr>
+        <p:spPr/>
+      </p:sp>
+      <p:sp>
+        <p:nvSpPr>
+          <p:cNvPr id="3" name="Notes Placeholder 2"/>
+          <p:cNvSpPr>
+            <a:spLocks noGrp="1"/>
+          </p:cNvSpPr>
+          <p:nvPr>
+            <p:ph type="body" idx="3" sz="quarter"/>
+          </p:nvPr>
+        </p:nvSpPr>
+        <p:spPr/>
+        <p:txBody>
+          <a:bodyPr/>
+          <a:lstStyle/>
+          <a:p>
+            <a:r>
+              <a:t>一言で：この 4 番目（資料づくりと連絡）を、その場で引き受ける。</a:t>
             </a:r>
           </a:p>
         </p:txBody>
@@ -3197,7 +3268,7 @@
                 </a:solidFill>
                 <a:latin typeface="Noto Sans JP"/>
               </a:rPr>
-              <a:t>5つの評価軸との対応</a:t>
+              <a:t>費用と速さ</a:t>
             </a:r>
           </a:p>
         </p:txBody>
@@ -3232,7 +3303,7 @@
                 </a:solidFill>
                 <a:latin typeface="Noto Sans JP"/>
               </a:rPr>
-              <a:t>自律性・セキュリティ・コスト・信頼性・独創性</a:t>
+              <a:t>役割ごとに、安いモデルから順に試す。1件あたりの原価を記録する</a:t>
             </a:r>
           </a:p>
         </p:txBody>
@@ -3268,6 +3339,711 @@
                 <a:latin typeface="Noto Sans JP"/>
               </a:rPr>
               <a:t>10</a:t>
+            </a:r>
+          </a:p>
+        </p:txBody>
+      </p:sp>
+      <p:sp>
+        <p:nvSpPr>
+          <p:cNvPr id="5" name="TextBox 4"/>
+          <p:cNvSpPr txBox="1"/>
+          <p:nvPr/>
+        </p:nvSpPr>
+        <p:spPr>
+          <a:xfrm>
+            <a:off x="566928" y="1691640"/>
+            <a:ext cx="2478024" cy="685800"/>
+          </a:xfrm>
+          <a:prstGeom prst="rect">
+            <a:avLst/>
+          </a:prstGeom>
+          <a:noFill/>
+        </p:spPr>
+        <p:txBody>
+          <a:bodyPr wrap="square" lIns="45720" rIns="45720" tIns="27432" bIns="27432" anchor="t">
+            <a:spAutoFit/>
+          </a:bodyPr>
+          <a:lstStyle/>
+          <a:p>
+            <a:pPr algn="ctr"/>
+            <a:r>
+              <a:rPr sz="3400" b="1">
+                <a:solidFill>
+                  <a:srgbClr val="16805B"/>
+                </a:solidFill>
+                <a:latin typeface="Noto Sans JP"/>
+              </a:rPr>
+              <a:t>$0.055</a:t>
+            </a:r>
+          </a:p>
+        </p:txBody>
+      </p:sp>
+      <p:sp>
+        <p:nvSpPr>
+          <p:cNvPr id="6" name="TextBox 5"/>
+          <p:cNvSpPr txBox="1"/>
+          <p:nvPr/>
+        </p:nvSpPr>
+        <p:spPr>
+          <a:xfrm>
+            <a:off x="566928" y="2423160"/>
+            <a:ext cx="2478024" cy="457200"/>
+          </a:xfrm>
+          <a:prstGeom prst="rect">
+            <a:avLst/>
+          </a:prstGeom>
+          <a:noFill/>
+        </p:spPr>
+        <p:txBody>
+          <a:bodyPr wrap="square" lIns="45720" rIns="45720" tIns="27432" bIns="27432" anchor="t">
+            <a:spAutoFit/>
+          </a:bodyPr>
+          <a:lstStyle/>
+          <a:p>
+            <a:pPr algn="ctr"/>
+            <a:r>
+              <a:rPr sz="1350" b="0">
+                <a:solidFill>
+                  <a:srgbClr val="5B6B7D"/>
+                </a:solidFill>
+                <a:latin typeface="Noto Sans JP"/>
+              </a:rPr>
+              <a:t>資料とメールの下書き 1 回</a:t>
+            </a:r>
+          </a:p>
+        </p:txBody>
+      </p:sp>
+      <p:sp>
+        <p:nvSpPr>
+          <p:cNvPr id="7" name="TextBox 6"/>
+          <p:cNvSpPr txBox="1"/>
+          <p:nvPr/>
+        </p:nvSpPr>
+        <p:spPr>
+          <a:xfrm>
+            <a:off x="3374136" y="1691640"/>
+            <a:ext cx="2478024" cy="685800"/>
+          </a:xfrm>
+          <a:prstGeom prst="rect">
+            <a:avLst/>
+          </a:prstGeom>
+          <a:noFill/>
+        </p:spPr>
+        <p:txBody>
+          <a:bodyPr wrap="square" lIns="45720" rIns="45720" tIns="27432" bIns="27432" anchor="t">
+            <a:spAutoFit/>
+          </a:bodyPr>
+          <a:lstStyle/>
+          <a:p>
+            <a:pPr algn="ctr"/>
+            <a:r>
+              <a:rPr sz="3400" b="1">
+                <a:solidFill>
+                  <a:srgbClr val="16805B"/>
+                </a:solidFill>
+                <a:latin typeface="Noto Sans JP"/>
+              </a:rPr>
+              <a:t>$0.0007</a:t>
+            </a:r>
+          </a:p>
+        </p:txBody>
+      </p:sp>
+      <p:sp>
+        <p:nvSpPr>
+          <p:cNvPr id="8" name="TextBox 7"/>
+          <p:cNvSpPr txBox="1"/>
+          <p:nvPr/>
+        </p:nvSpPr>
+        <p:spPr>
+          <a:xfrm>
+            <a:off x="3374136" y="2423160"/>
+            <a:ext cx="2478024" cy="457200"/>
+          </a:xfrm>
+          <a:prstGeom prst="rect">
+            <a:avLst/>
+          </a:prstGeom>
+          <a:noFill/>
+        </p:spPr>
+        <p:txBody>
+          <a:bodyPr wrap="square" lIns="45720" rIns="45720" tIns="27432" bIns="27432" anchor="t">
+            <a:spAutoFit/>
+          </a:bodyPr>
+          <a:lstStyle/>
+          <a:p>
+            <a:pPr algn="ctr"/>
+            <a:r>
+              <a:rPr sz="1350" b="0">
+                <a:solidFill>
+                  <a:srgbClr val="5B6B7D"/>
+                </a:solidFill>
+                <a:latin typeface="Noto Sans JP"/>
+              </a:rPr>
+              <a:t>電話の声を文字にする 1 回</a:t>
+            </a:r>
+          </a:p>
+        </p:txBody>
+      </p:sp>
+      <p:sp>
+        <p:nvSpPr>
+          <p:cNvPr id="9" name="TextBox 8"/>
+          <p:cNvSpPr txBox="1"/>
+          <p:nvPr/>
+        </p:nvSpPr>
+        <p:spPr>
+          <a:xfrm>
+            <a:off x="6181344" y="1691640"/>
+            <a:ext cx="2478024" cy="685800"/>
+          </a:xfrm>
+          <a:prstGeom prst="rect">
+            <a:avLst/>
+          </a:prstGeom>
+          <a:noFill/>
+        </p:spPr>
+        <p:txBody>
+          <a:bodyPr wrap="square" lIns="45720" rIns="45720" tIns="27432" bIns="27432" anchor="t">
+            <a:spAutoFit/>
+          </a:bodyPr>
+          <a:lstStyle/>
+          <a:p>
+            <a:pPr algn="ctr"/>
+            <a:r>
+              <a:rPr sz="3400" b="1">
+                <a:solidFill>
+                  <a:srgbClr val="16805B"/>
+                </a:solidFill>
+                <a:latin typeface="Noto Sans JP"/>
+              </a:rPr>
+              <a:t>約 $0.02</a:t>
+            </a:r>
+          </a:p>
+        </p:txBody>
+      </p:sp>
+      <p:sp>
+        <p:nvSpPr>
+          <p:cNvPr id="10" name="TextBox 9"/>
+          <p:cNvSpPr txBox="1"/>
+          <p:nvPr/>
+        </p:nvSpPr>
+        <p:spPr>
+          <a:xfrm>
+            <a:off x="6181344" y="2423160"/>
+            <a:ext cx="2478024" cy="457200"/>
+          </a:xfrm>
+          <a:prstGeom prst="rect">
+            <a:avLst/>
+          </a:prstGeom>
+          <a:noFill/>
+        </p:spPr>
+        <p:txBody>
+          <a:bodyPr wrap="square" lIns="45720" rIns="45720" tIns="27432" bIns="27432" anchor="t">
+            <a:spAutoFit/>
+          </a:bodyPr>
+          <a:lstStyle/>
+          <a:p>
+            <a:pPr algn="ctr"/>
+            <a:r>
+              <a:rPr sz="1350" b="0">
+                <a:solidFill>
+                  <a:srgbClr val="5B6B7D"/>
+                </a:solidFill>
+                <a:latin typeface="Noto Sans JP"/>
+              </a:rPr>
+              <a:t>表を作り直すとき</a:t>
+            </a:r>
+          </a:p>
+        </p:txBody>
+      </p:sp>
+      <p:sp>
+        <p:nvSpPr>
+          <p:cNvPr id="11" name="TextBox 10"/>
+          <p:cNvSpPr txBox="1"/>
+          <p:nvPr/>
+        </p:nvSpPr>
+        <p:spPr>
+          <a:xfrm>
+            <a:off x="8988551" y="1691640"/>
+            <a:ext cx="2478024" cy="685800"/>
+          </a:xfrm>
+          <a:prstGeom prst="rect">
+            <a:avLst/>
+          </a:prstGeom>
+          <a:noFill/>
+        </p:spPr>
+        <p:txBody>
+          <a:bodyPr wrap="square" lIns="45720" rIns="45720" tIns="27432" bIns="27432" anchor="t">
+            <a:spAutoFit/>
+          </a:bodyPr>
+          <a:lstStyle/>
+          <a:p>
+            <a:pPr algn="ctr"/>
+            <a:r>
+              <a:rPr sz="3400" b="1">
+                <a:solidFill>
+                  <a:srgbClr val="16805B"/>
+                </a:solidFill>
+                <a:latin typeface="Noto Sans JP"/>
+              </a:rPr>
+              <a:t>885</a:t>
+            </a:r>
+          </a:p>
+        </p:txBody>
+      </p:sp>
+      <p:sp>
+        <p:nvSpPr>
+          <p:cNvPr id="12" name="TextBox 11"/>
+          <p:cNvSpPr txBox="1"/>
+          <p:nvPr/>
+        </p:nvSpPr>
+        <p:spPr>
+          <a:xfrm>
+            <a:off x="8988551" y="2423160"/>
+            <a:ext cx="2478024" cy="457200"/>
+          </a:xfrm>
+          <a:prstGeom prst="rect">
+            <a:avLst/>
+          </a:prstGeom>
+          <a:noFill/>
+        </p:spPr>
+        <p:txBody>
+          <a:bodyPr wrap="square" lIns="45720" rIns="45720" tIns="27432" bIns="27432" anchor="t">
+            <a:spAutoFit/>
+          </a:bodyPr>
+          <a:lstStyle/>
+          <a:p>
+            <a:pPr algn="ctr"/>
+            <a:r>
+              <a:rPr sz="1350" b="0">
+                <a:solidFill>
+                  <a:srgbClr val="5B6B7D"/>
+                </a:solidFill>
+                <a:latin typeface="Noto Sans JP"/>
+              </a:rPr>
+              <a:t>自動テスト（全通過）</a:t>
+            </a:r>
+          </a:p>
+        </p:txBody>
+      </p:sp>
+      <p:graphicFrame>
+        <p:nvGraphicFramePr>
+          <p:cNvPr id="13" name="Table 12"/>
+          <p:cNvGraphicFramePr>
+            <a:graphicFrameLocks noGrp="1"/>
+          </p:cNvGraphicFramePr>
+          <p:nvPr/>
+        </p:nvGraphicFramePr>
+        <p:xfrm>
+          <a:off x="548640" y="3291840"/>
+          <a:ext cx="11064240" cy="2852928"/>
+        </p:xfrm>
+        <a:graphic>
+          <a:graphicData uri="http://schemas.openxmlformats.org/drawingml/2006/table">
+            <a:tbl>
+              <a:tblPr firstRow="1" bandRow="1">
+                <a:tableStyleId>{5C22544A-7EE6-4342-B048-85BDC9FD1C3A}</a:tableStyleId>
+              </a:tblPr>
+              <a:tblGrid>
+                <a:gridCol w="2926080"/>
+                <a:gridCol w="8138160"/>
+              </a:tblGrid>
+              <a:tr h="475488">
+                <a:tc>
+                  <a:txBody>
+                    <a:bodyPr wrap="square"/>
+                    <a:lstStyle/>
+                    <a:p>
+                      <a:r>
+                        <a:rPr sz="1300" b="1">
+                          <a:solidFill>
+                            <a:srgbClr val="FFFFFF"/>
+                          </a:solidFill>
+                          <a:latin typeface="Noto Sans JP"/>
+                        </a:rPr>
+                        <a:t>役割</a:t>
+                      </a:r>
+                    </a:p>
+                  </a:txBody>
+                  <a:tcPr marL="73152" marR="73152" marT="36576" marB="36576" anchor="ctr">
+                    <a:solidFill>
+                      <a:srgbClr val="0B315B"/>
+                    </a:solidFill>
+                  </a:tcPr>
+                </a:tc>
+                <a:tc>
+                  <a:txBody>
+                    <a:bodyPr wrap="square"/>
+                    <a:lstStyle/>
+                    <a:p>
+                      <a:r>
+                        <a:rPr sz="1300" b="1">
+                          <a:solidFill>
+                            <a:srgbClr val="FFFFFF"/>
+                          </a:solidFill>
+                          <a:latin typeface="Noto Sans JP"/>
+                        </a:rPr>
+                        <a:t>選び方と原価</a:t>
+                      </a:r>
+                    </a:p>
+                  </a:txBody>
+                  <a:tcPr marL="73152" marR="73152" marT="36576" marB="36576" anchor="ctr">
+                    <a:solidFill>
+                      <a:srgbClr val="0B315B"/>
+                    </a:solidFill>
+                  </a:tcPr>
+                </a:tc>
+              </a:tr>
+              <a:tr h="475488">
+                <a:tc>
+                  <a:txBody>
+                    <a:bodyPr wrap="square"/>
+                    <a:lstStyle/>
+                    <a:p>
+                      <a:r>
+                        <a:rPr sz="1300" b="1">
+                          <a:solidFill>
+                            <a:srgbClr val="172433"/>
+                          </a:solidFill>
+                          <a:latin typeface="Noto Sans JP"/>
+                        </a:rPr>
+                        <a:t>会話から次の業務を考える</a:t>
+                      </a:r>
+                    </a:p>
+                  </a:txBody>
+                  <a:tcPr marL="73152" marR="73152" marT="36576" marB="36576" anchor="ctr">
+                    <a:solidFill>
+                      <a:srgbClr val="F4F8FC"/>
+                    </a:solidFill>
+                  </a:tcPr>
+                </a:tc>
+                <a:tc>
+                  <a:txBody>
+                    <a:bodyPr wrap="square"/>
+                    <a:lstStyle/>
+                    <a:p>
+                      <a:r>
+                        <a:rPr sz="1300" b="0">
+                          <a:solidFill>
+                            <a:srgbClr val="172433"/>
+                          </a:solidFill>
+                          <a:latin typeface="Noto Sans JP"/>
+                        </a:rPr>
+                        <a:t>6モデルを比べ、1件 $0.0005〜$0.0123。会話は個人情報を含みやすいので Claude を先に</a:t>
+                      </a:r>
+                    </a:p>
+                  </a:txBody>
+                  <a:tcPr marL="73152" marR="73152" marT="36576" marB="36576" anchor="ctr">
+                    <a:solidFill>
+                      <a:srgbClr val="F4F8FC"/>
+                    </a:solidFill>
+                  </a:tcPr>
+                </a:tc>
+              </a:tr>
+              <a:tr h="475488">
+                <a:tc>
+                  <a:txBody>
+                    <a:bodyPr wrap="square"/>
+                    <a:lstStyle/>
+                    <a:p>
+                      <a:r>
+                        <a:rPr sz="1300" b="1">
+                          <a:solidFill>
+                            <a:srgbClr val="172433"/>
+                          </a:solidFill>
+                          <a:latin typeface="Noto Sans JP"/>
+                        </a:rPr>
+                        <a:t>開けた面積の判定</a:t>
+                      </a:r>
+                    </a:p>
+                  </a:txBody>
+                  <a:tcPr marL="73152" marR="73152" marT="36576" marB="36576" anchor="ctr">
+                    <a:solidFill>
+                      <a:srgbClr val="FFFFFF"/>
+                    </a:solidFill>
+                  </a:tcPr>
+                </a:tc>
+                <a:tc>
+                  <a:txBody>
+                    <a:bodyPr wrap="square"/>
+                    <a:lstStyle/>
+                    <a:p>
+                      <a:r>
+                        <a:rPr sz="1300" b="0">
+                          <a:solidFill>
+                            <a:srgbClr val="172433"/>
+                          </a:solidFill>
+                          <a:latin typeface="Noto Sans JP"/>
+                        </a:rPr>
+                        <a:t>端末が形から測り、サーバーが画素の見積もりと二重に照らす（圧縮の影響を受けない）</a:t>
+                      </a:r>
+                    </a:p>
+                  </a:txBody>
+                  <a:tcPr marL="73152" marR="73152" marT="36576" marB="36576" anchor="ctr">
+                    <a:solidFill>
+                      <a:srgbClr val="FFFFFF"/>
+                    </a:solidFill>
+                  </a:tcPr>
+                </a:tc>
+              </a:tr>
+              <a:tr h="475488">
+                <a:tc>
+                  <a:txBody>
+                    <a:bodyPr wrap="square"/>
+                    <a:lstStyle/>
+                    <a:p>
+                      <a:r>
+                        <a:rPr sz="1300" b="1">
+                          <a:solidFill>
+                            <a:srgbClr val="172433"/>
+                          </a:solidFill>
+                          <a:latin typeface="Noto Sans JP"/>
+                        </a:rPr>
+                        <a:t>承認だけで下書きになる行動</a:t>
+                      </a:r>
+                    </a:p>
+                  </a:txBody>
+                  <a:tcPr marL="73152" marR="73152" marT="36576" marB="36576" anchor="ctr">
+                    <a:solidFill>
+                      <a:srgbClr val="F4F8FC"/>
+                    </a:solidFill>
+                  </a:tcPr>
+                </a:tc>
+                <a:tc>
+                  <a:txBody>
+                    <a:bodyPr wrap="square"/>
+                    <a:lstStyle/>
+                    <a:p>
+                      <a:r>
+                        <a:rPr sz="1300" b="0">
+                          <a:solidFill>
+                            <a:srgbClr val="172433"/>
+                          </a:solidFill>
+                          <a:latin typeface="Noto Sans JP"/>
+                        </a:rPr>
+                        <a:t>33%（残りは日付入力。候補はコードが作る）</a:t>
+                      </a:r>
+                    </a:p>
+                  </a:txBody>
+                  <a:tcPr marL="73152" marR="73152" marT="36576" marB="36576" anchor="ctr">
+                    <a:solidFill>
+                      <a:srgbClr val="F4F8FC"/>
+                    </a:solidFill>
+                  </a:tcPr>
+                </a:tc>
+              </a:tr>
+              <a:tr h="475488">
+                <a:tc>
+                  <a:txBody>
+                    <a:bodyPr wrap="square"/>
+                    <a:lstStyle/>
+                    <a:p>
+                      <a:r>
+                        <a:rPr sz="1300" b="1">
+                          <a:solidFill>
+                            <a:srgbClr val="172433"/>
+                          </a:solidFill>
+                          <a:latin typeface="Noto Sans JP"/>
+                        </a:rPr>
+                        <a:t>経路</a:t>
+                      </a:r>
+                    </a:p>
+                  </a:txBody>
+                  <a:tcPr marL="73152" marR="73152" marT="36576" marB="36576" anchor="ctr">
+                    <a:solidFill>
+                      <a:srgbClr val="FFFFFF"/>
+                    </a:solidFill>
+                  </a:tcPr>
+                </a:tc>
+                <a:tc>
+                  <a:txBody>
+                    <a:bodyPr wrap="square"/>
+                    <a:lstStyle/>
+                    <a:p>
+                      <a:r>
+                        <a:rPr sz="1300" b="0">
+                          <a:solidFill>
+                            <a:srgbClr val="172433"/>
+                          </a:solidFill>
+                          <a:latin typeface="Noto Sans JP"/>
+                        </a:rPr>
+                        <a:t>Orca Router を主に、Claude 直を予備。判断1件の費用 −32%</a:t>
+                      </a:r>
+                    </a:p>
+                  </a:txBody>
+                  <a:tcPr marL="73152" marR="73152" marT="36576" marB="36576" anchor="ctr">
+                    <a:solidFill>
+                      <a:srgbClr val="FFFFFF"/>
+                    </a:solidFill>
+                  </a:tcPr>
+                </a:tc>
+              </a:tr>
+              <a:tr h="475488">
+                <a:tc>
+                  <a:txBody>
+                    <a:bodyPr wrap="square"/>
+                    <a:lstStyle/>
+                    <a:p>
+                      <a:r>
+                        <a:rPr sz="1300" b="1">
+                          <a:solidFill>
+                            <a:srgbClr val="172433"/>
+                          </a:solidFill>
+                          <a:latin typeface="Noto Sans JP"/>
+                        </a:rPr>
+                        <a:t>表の形が決まらないとき</a:t>
+                      </a:r>
+                    </a:p>
+                  </a:txBody>
+                  <a:tcPr marL="73152" marR="73152" marT="36576" marB="36576" anchor="ctr">
+                    <a:solidFill>
+                      <a:srgbClr val="F4F8FC"/>
+                    </a:solidFill>
+                  </a:tcPr>
+                </a:tc>
+                <a:tc>
+                  <a:txBody>
+                    <a:bodyPr wrap="square"/>
+                    <a:lstStyle/>
+                    <a:p>
+                      <a:r>
+                        <a:rPr sz="1300" b="0">
+                          <a:solidFill>
+                            <a:srgbClr val="172433"/>
+                          </a:solidFill>
+                          <a:latin typeface="Noto Sans JP"/>
+                        </a:rPr>
+                        <a:t>2〜3 通りの候補を作り、Excel の複数シートに分ける（約 $0.02）</a:t>
+                      </a:r>
+                    </a:p>
+                  </a:txBody>
+                  <a:tcPr marL="73152" marR="73152" marT="36576" marB="36576" anchor="ctr">
+                    <a:solidFill>
+                      <a:srgbClr val="F4F8FC"/>
+                    </a:solidFill>
+                  </a:tcPr>
+                </a:tc>
+              </a:tr>
+            </a:tbl>
+          </a:graphicData>
+        </a:graphic>
+      </p:graphicFrame>
+    </p:spTree>
+  </p:cSld>
+  <p:clrMapOvr>
+    <a:masterClrMapping/>
+  </p:clrMapOvr>
+</p:sld>
+</file>
+
+<file path=ppt/slides/slide11.xml><?xml version="1.0" encoding="utf-8"?>
+<p:sld xmlns:a="http://schemas.openxmlformats.org/drawingml/2006/main" xmlns:p="http://schemas.openxmlformats.org/presentationml/2006/main" xmlns:r="http://schemas.openxmlformats.org/officeDocument/2006/relationships">
+  <p:cSld>
+    <p:spTree>
+      <p:nvGrpSpPr>
+        <p:cNvPr id="1" name=""/>
+        <p:cNvGrpSpPr/>
+        <p:nvPr/>
+      </p:nvGrpSpPr>
+      <p:grpSpPr/>
+      <p:sp>
+        <p:nvSpPr>
+          <p:cNvPr id="2" name="TextBox 1"/>
+          <p:cNvSpPr txBox="1"/>
+          <p:nvPr/>
+        </p:nvSpPr>
+        <p:spPr>
+          <a:xfrm>
+            <a:off x="402336" y="320040"/>
+            <a:ext cx="10671048" cy="566928"/>
+          </a:xfrm>
+          <a:prstGeom prst="rect">
+            <a:avLst/>
+          </a:prstGeom>
+          <a:noFill/>
+        </p:spPr>
+        <p:txBody>
+          <a:bodyPr wrap="square" lIns="45720" rIns="45720" tIns="27432" bIns="27432" anchor="t">
+            <a:spAutoFit/>
+          </a:bodyPr>
+          <a:lstStyle/>
+          <a:p>
+            <a:pPr algn="l"/>
+            <a:r>
+              <a:rPr sz="3000" b="1">
+                <a:solidFill>
+                  <a:srgbClr val="172433"/>
+                </a:solidFill>
+                <a:latin typeface="Noto Sans JP"/>
+              </a:rPr>
+              <a:t>5つの評価軸との対応</a:t>
+            </a:r>
+          </a:p>
+        </p:txBody>
+      </p:sp>
+      <p:sp>
+        <p:nvSpPr>
+          <p:cNvPr id="3" name="TextBox 2"/>
+          <p:cNvSpPr txBox="1"/>
+          <p:nvPr/>
+        </p:nvSpPr>
+        <p:spPr>
+          <a:xfrm>
+            <a:off x="420624" y="914400"/>
+            <a:ext cx="11247120" cy="402336"/>
+          </a:xfrm>
+          <a:prstGeom prst="rect">
+            <a:avLst/>
+          </a:prstGeom>
+          <a:noFill/>
+        </p:spPr>
+        <p:txBody>
+          <a:bodyPr wrap="square" lIns="45720" rIns="45720" tIns="27432" bIns="27432" anchor="t">
+            <a:spAutoFit/>
+          </a:bodyPr>
+          <a:lstStyle/>
+          <a:p>
+            <a:pPr algn="l"/>
+            <a:r>
+              <a:rPr sz="1425" b="1">
+                <a:solidFill>
+                  <a:srgbClr val="2F80C9"/>
+                </a:solidFill>
+                <a:latin typeface="Noto Sans JP"/>
+              </a:rPr>
+              <a:t>自律性・セキュリティ・コスト・信頼性・独創性</a:t>
+            </a:r>
+          </a:p>
+        </p:txBody>
+      </p:sp>
+      <p:sp>
+        <p:nvSpPr>
+          <p:cNvPr id="4" name="TextBox 3"/>
+          <p:cNvSpPr txBox="1"/>
+          <p:nvPr/>
+        </p:nvSpPr>
+        <p:spPr>
+          <a:xfrm>
+            <a:off x="11393424" y="6400800"/>
+            <a:ext cx="329184" cy="210312"/>
+          </a:xfrm>
+          <a:prstGeom prst="rect">
+            <a:avLst/>
+          </a:prstGeom>
+          <a:noFill/>
+        </p:spPr>
+        <p:txBody>
+          <a:bodyPr wrap="square" lIns="45720" rIns="45720" tIns="27432" bIns="27432" anchor="t">
+            <a:spAutoFit/>
+          </a:bodyPr>
+          <a:lstStyle/>
+          <a:p>
+            <a:pPr algn="r"/>
+            <a:r>
+              <a:rPr sz="1050" b="0">
+                <a:solidFill>
+                  <a:srgbClr val="5B6B7D"/>
+                </a:solidFill>
+                <a:latin typeface="Noto Sans JP"/>
+              </a:rPr>
+              <a:t>11</a:t>
             </a:r>
           </a:p>
         </p:txBody>
@@ -3582,7 +4358,7 @@
 </p:sld>
 </file>
 
-<file path=ppt/slides/slide11.xml><?xml version="1.0" encoding="utf-8"?>
+<file path=ppt/slides/slide12.xml><?xml version="1.0" encoding="utf-8"?>
 <p:sld xmlns:a="http://schemas.openxmlformats.org/drawingml/2006/main" xmlns:p="http://schemas.openxmlformats.org/presentationml/2006/main" xmlns:r="http://schemas.openxmlformats.org/officeDocument/2006/relationships">
   <p:cSld>
     <p:spTree>
@@ -3692,7 +4468,7 @@
                 </a:solidFill>
                 <a:latin typeface="Noto Sans JP"/>
               </a:rPr>
-              <a:t>11</a:t>
+              <a:t>12</a:t>
             </a:r>
           </a:p>
         </p:txBody>
@@ -3763,7 +4539,7 @@
                 </a:solidFill>
                 <a:latin typeface="Noto Sans JP"/>
               </a:rPr>
-              <a:t>リポジトリから、そのまま動かせる（開発モード・テスト 885 件）</a:t>
+              <a:t>リポジトリから、そのまま動かせる（開発モード・自動テスト 885 件）</a:t>
             </a:r>
           </a:p>
         </p:txBody>
@@ -3851,7 +4627,7 @@
                 </a:solidFill>
                 <a:latin typeface="Noto Sans JP"/>
               </a:rPr>
-              <a:t>何ができるか</a:t>
+              <a:t>こんな場面</a:t>
             </a:r>
           </a:p>
         </p:txBody>
@@ -3886,7 +4662,7 @@
                 </a:solidFill>
                 <a:latin typeface="Noto Sans JP"/>
               </a:rPr>
-              <a:t>物や場所に貼ったQR・NFCから、担当・記録・経緯が開き、作業の成果は「動くカード」で渡せる</a:t>
+              <a:t>現場から連絡が入る。対応を頼まれる。でも、受けた側も手が離せない</a:t>
             </a:r>
           </a:p>
         </p:txBody>
@@ -3934,8 +4710,8 @@
         </p:nvSpPr>
         <p:spPr>
           <a:xfrm>
-            <a:off x="548640" y="1691640"/>
-            <a:ext cx="3520440" cy="1874519"/>
+            <a:off x="548640" y="1737360"/>
+            <a:ext cx="5394960" cy="1874519"/>
           </a:xfrm>
           <a:prstGeom prst="roundRect">
             <a:avLst>
@@ -3982,8 +4758,8 @@
         </p:nvSpPr>
         <p:spPr>
           <a:xfrm>
-            <a:off x="685800" y="1783080"/>
-            <a:ext cx="3246120" cy="384048"/>
+            <a:off x="685800" y="1828800"/>
+            <a:ext cx="5120640" cy="384048"/>
           </a:xfrm>
           <a:prstGeom prst="rect">
             <a:avLst/>
@@ -4004,7 +4780,7 @@
                 </a:solidFill>
                 <a:latin typeface="Noto Sans JP"/>
               </a:rPr>
-              <a:t>物のページ</a:t>
+              <a:t>1 遠隔連絡</a:t>
             </a:r>
           </a:p>
         </p:txBody>
@@ -4017,8 +4793,8 @@
         </p:nvSpPr>
         <p:spPr>
           <a:xfrm>
-            <a:off x="685800" y="2194560"/>
-            <a:ext cx="3246120" cy="1280160"/>
+            <a:off x="685800" y="2240280"/>
+            <a:ext cx="5120640" cy="1280160"/>
           </a:xfrm>
           <a:prstGeom prst="rect">
             <a:avLst/>
@@ -4039,7 +4815,7 @@
                 </a:solidFill>
                 <a:latin typeface="Noto Sans JP"/>
               </a:rPr>
-              <a:t>タグを読むと、担当・資料・これまでのカード・経緯の要約が開く</a:t>
+              <a:t>現場から「緊急トラブル発生」の連絡が入る</a:t>
             </a:r>
           </a:p>
         </p:txBody>
@@ -4052,8 +4828,8 @@
         </p:nvSpPr>
         <p:spPr>
           <a:xfrm>
-            <a:off x="4343400" y="1691640"/>
-            <a:ext cx="3520440" cy="1874519"/>
+            <a:off x="6217920" y="1737360"/>
+            <a:ext cx="5394960" cy="1874519"/>
           </a:xfrm>
           <a:prstGeom prst="roundRect">
             <a:avLst>
@@ -4100,8 +4876,8 @@
         </p:nvSpPr>
         <p:spPr>
           <a:xfrm>
-            <a:off x="4480560" y="1783080"/>
-            <a:ext cx="3246120" cy="384048"/>
+            <a:off x="6355080" y="1828800"/>
+            <a:ext cx="5120640" cy="384048"/>
           </a:xfrm>
           <a:prstGeom prst="rect">
             <a:avLst/>
@@ -4122,7 +4898,7 @@
                 </a:solidFill>
                 <a:latin typeface="Noto Sans JP"/>
               </a:rPr>
-              <a:t>動くカード</a:t>
+              <a:t>2 対応依頼</a:t>
             </a:r>
           </a:p>
         </p:txBody>
@@ -4135,8 +4911,8 @@
         </p:nvSpPr>
         <p:spPr>
           <a:xfrm>
-            <a:off x="4480560" y="2194560"/>
-            <a:ext cx="3246120" cy="1280160"/>
+            <a:off x="6355080" y="2240280"/>
+            <a:ext cx="5120640" cy="1280160"/>
           </a:xfrm>
           <a:prstGeom prst="rect">
             <a:avLst/>
@@ -4157,7 +4933,7 @@
                 </a:solidFill>
                 <a:latin typeface="Noto Sans JP"/>
               </a:rPr>
-              <a:t>写真と声から説明文を作り、作業前後を見比べられる。リンクで渡す</a:t>
+              <a:t>即時の対応が要請される</a:t>
             </a:r>
           </a:p>
         </p:txBody>
@@ -4170,8 +4946,8 @@
         </p:nvSpPr>
         <p:spPr>
           <a:xfrm>
-            <a:off x="8138160" y="1691640"/>
-            <a:ext cx="3520440" cy="1874519"/>
+            <a:off x="548640" y="3840479"/>
+            <a:ext cx="5394960" cy="1874519"/>
           </a:xfrm>
           <a:prstGeom prst="roundRect">
             <a:avLst>
@@ -4218,8 +4994,8 @@
         </p:nvSpPr>
         <p:spPr>
           <a:xfrm>
-            <a:off x="8275320" y="1783080"/>
-            <a:ext cx="3246120" cy="384048"/>
+            <a:off x="685800" y="3931919"/>
+            <a:ext cx="5120640" cy="384048"/>
           </a:xfrm>
           <a:prstGeom prst="rect">
             <a:avLst/>
@@ -4240,7 +5016,7 @@
                 </a:solidFill>
                 <a:latin typeface="Noto Sans JP"/>
               </a:rPr>
-              <a:t>写真の保護</a:t>
+              <a:t>3 対応困難</a:t>
             </a:r>
           </a:p>
         </p:txBody>
@@ -4253,8 +5029,8 @@
         </p:nvSpPr>
         <p:spPr>
           <a:xfrm>
-            <a:off x="8275320" y="2194560"/>
-            <a:ext cx="3246120" cy="1280160"/>
+            <a:off x="685800" y="4343399"/>
+            <a:ext cx="5120640" cy="1280160"/>
           </a:xfrm>
           <a:prstGeom prst="rect">
             <a:avLst/>
@@ -4275,7 +5051,7 @@
                 </a:solidFill>
                 <a:latin typeface="Noto Sans JP"/>
               </a:rPr>
-              <a:t>顔・ナンバー・書類は、送る前に端末で隠す。共有範囲は作り手が決める</a:t>
+              <a:t>受けた側も多忙で手が離せず、「誰か代わりに対応してほしい」</a:t>
             </a:r>
           </a:p>
         </p:txBody>
@@ -4288,8 +5064,8 @@
         </p:nvSpPr>
         <p:spPr>
           <a:xfrm>
-            <a:off x="548640" y="3794760"/>
-            <a:ext cx="3520440" cy="1874519"/>
+            <a:off x="6217920" y="3840479"/>
+            <a:ext cx="5394960" cy="1874519"/>
           </a:xfrm>
           <a:prstGeom prst="roundRect">
             <a:avLst>
@@ -4297,11 +5073,11 @@
             </a:avLst>
           </a:prstGeom>
           <a:solidFill>
-            <a:srgbClr val="F4F8FC"/>
+            <a:srgbClr val="EAF5FC"/>
           </a:solidFill>
           <a:ln w="12700">
             <a:solidFill>
-              <a:srgbClr val="D8E4EF"/>
+              <a:srgbClr val="36A9E1"/>
             </a:solidFill>
           </a:ln>
           <a:effectLst/>
@@ -4336,8 +5112,8 @@
         </p:nvSpPr>
         <p:spPr>
           <a:xfrm>
-            <a:off x="685800" y="3886200"/>
-            <a:ext cx="3246120" cy="384048"/>
+            <a:off x="6355080" y="3931919"/>
+            <a:ext cx="5120640" cy="384048"/>
           </a:xfrm>
           <a:prstGeom prst="rect">
             <a:avLst/>
@@ -4358,7 +5134,7 @@
                 </a:solidFill>
                 <a:latin typeface="Noto Sans JP"/>
               </a:rPr>
-              <a:t>会話から次の業務</a:t>
+              <a:t>4 必要なアクション</a:t>
             </a:r>
           </a:p>
         </p:txBody>
@@ -4371,8 +5147,8 @@
         </p:nvSpPr>
         <p:spPr>
           <a:xfrm>
-            <a:off x="685800" y="4297680"/>
-            <a:ext cx="3246120" cy="1280160"/>
+            <a:off x="6355080" y="4343399"/>
+            <a:ext cx="5120640" cy="1280160"/>
           </a:xfrm>
           <a:prstGeom prst="rect">
             <a:avLst/>
@@ -4393,278 +5169,42 @@
                 </a:solidFill>
                 <a:latin typeface="Noto Sans JP"/>
               </a:rPr>
-              <a:t>会話を文字にして確認し、「私はこう理解しました」で提案。合っていれば下書きに</a:t>
-            </a:r>
-          </a:p>
-        </p:txBody>
-      </p:sp>
-      <p:sp>
-        <p:nvSpPr>
-          <p:cNvPr id="17" name="Rounded Rectangle 16"/>
-          <p:cNvSpPr/>
-          <p:nvPr/>
-        </p:nvSpPr>
-        <p:spPr>
-          <a:xfrm>
-            <a:off x="4343400" y="3794760"/>
-            <a:ext cx="3520440" cy="1874519"/>
-          </a:xfrm>
-          <a:prstGeom prst="roundRect">
-            <a:avLst>
-              <a:gd name="adj" fmla="val 6000"/>
-            </a:avLst>
-          </a:prstGeom>
-          <a:solidFill>
-            <a:srgbClr val="F4F8FC"/>
-          </a:solidFill>
-          <a:ln w="12700">
-            <a:solidFill>
-              <a:srgbClr val="D8E4EF"/>
-            </a:solidFill>
-          </a:ln>
-          <a:effectLst/>
-        </p:spPr>
-        <p:style>
-          <a:lnRef idx="1">
-            <a:schemeClr val="accent1"/>
-          </a:lnRef>
-          <a:fillRef idx="3">
-            <a:schemeClr val="accent1"/>
-          </a:fillRef>
-          <a:effectRef idx="2">
-            <a:schemeClr val="accent1"/>
-          </a:effectRef>
-          <a:fontRef idx="minor">
-            <a:schemeClr val="lt1"/>
-          </a:fontRef>
-        </p:style>
-        <p:txBody>
-          <a:bodyPr rtlCol="0" anchor="ctr"/>
-          <a:lstStyle/>
-          <a:p>
-            <a:pPr algn="ctr"/>
-          </a:p>
-        </p:txBody>
-      </p:sp>
-      <p:sp>
-        <p:nvSpPr>
-          <p:cNvPr id="18" name="TextBox 17"/>
-          <p:cNvSpPr txBox="1"/>
-          <p:nvPr/>
-        </p:nvSpPr>
-        <p:spPr>
-          <a:xfrm>
-            <a:off x="4480560" y="3886200"/>
-            <a:ext cx="3246120" cy="384048"/>
-          </a:xfrm>
-          <a:prstGeom prst="rect">
-            <a:avLst/>
-          </a:prstGeom>
-          <a:noFill/>
-        </p:spPr>
-        <p:txBody>
-          <a:bodyPr wrap="square" lIns="45720" rIns="45720" tIns="27432" bIns="27432" anchor="t">
-            <a:spAutoFit/>
-          </a:bodyPr>
-          <a:lstStyle/>
-          <a:p>
-            <a:pPr algn="ctr"/>
-            <a:r>
-              <a:rPr sz="1600" b="1">
+              <a:t>状況を伝える資料づくり・共有、急ぎの発注メールに追われる</a:t>
+            </a:r>
+          </a:p>
+        </p:txBody>
+      </p:sp>
+      <p:sp>
+        <p:nvSpPr>
+          <p:cNvPr id="17" name="TextBox 16"/>
+          <p:cNvSpPr txBox="1"/>
+          <p:nvPr/>
+        </p:nvSpPr>
+        <p:spPr>
+          <a:xfrm>
+            <a:off x="640080" y="5943600"/>
+            <a:ext cx="10972800" cy="457200"/>
+          </a:xfrm>
+          <a:prstGeom prst="rect">
+            <a:avLst/>
+          </a:prstGeom>
+          <a:noFill/>
+        </p:spPr>
+        <p:txBody>
+          <a:bodyPr wrap="square" lIns="45720" rIns="45720" tIns="27432" bIns="27432" anchor="t">
+            <a:spAutoFit/>
+          </a:bodyPr>
+          <a:lstStyle/>
+          <a:p>
+            <a:pPr algn="ctr"/>
+            <a:r>
+              <a:rPr sz="1900" b="1">
                 <a:solidFill>
                   <a:srgbClr val="0B315B"/>
                 </a:solidFill>
                 <a:latin typeface="Noto Sans JP"/>
               </a:rPr>
-              <a:t>画面の分析</a:t>
-            </a:r>
-          </a:p>
-        </p:txBody>
-      </p:sp>
-      <p:sp>
-        <p:nvSpPr>
-          <p:cNvPr id="19" name="TextBox 18"/>
-          <p:cNvSpPr txBox="1"/>
-          <p:nvPr/>
-        </p:nvSpPr>
-        <p:spPr>
-          <a:xfrm>
-            <a:off x="4480560" y="4297680"/>
-            <a:ext cx="3246120" cy="1280160"/>
-          </a:xfrm>
-          <a:prstGeom prst="rect">
-            <a:avLst/>
-          </a:prstGeom>
-          <a:noFill/>
-        </p:spPr>
-        <p:txBody>
-          <a:bodyPr wrap="square" lIns="45720" rIns="45720" tIns="27432" bIns="27432" anchor="t">
-            <a:spAutoFit/>
-          </a:bodyPr>
-          <a:lstStyle/>
-          <a:p>
-            <a:pPr algn="ctr"/>
-            <a:r>
-              <a:rPr sz="1350" b="0">
-                <a:solidFill>
-                  <a:srgbClr val="172433"/>
-                </a:solidFill>
-                <a:latin typeface="Noto Sans JP"/>
-              </a:rPr>
-              <a:t>通話の画面は、開けた所だけをAIが見る。残る顔・文字は指摘する</a:t>
-            </a:r>
-          </a:p>
-        </p:txBody>
-      </p:sp>
-      <p:sp>
-        <p:nvSpPr>
-          <p:cNvPr id="20" name="Rounded Rectangle 19"/>
-          <p:cNvSpPr/>
-          <p:nvPr/>
-        </p:nvSpPr>
-        <p:spPr>
-          <a:xfrm>
-            <a:off x="8138160" y="3794760"/>
-            <a:ext cx="3520440" cy="1874519"/>
-          </a:xfrm>
-          <a:prstGeom prst="roundRect">
-            <a:avLst>
-              <a:gd name="adj" fmla="val 6000"/>
-            </a:avLst>
-          </a:prstGeom>
-          <a:solidFill>
-            <a:srgbClr val="F4F8FC"/>
-          </a:solidFill>
-          <a:ln w="12700">
-            <a:solidFill>
-              <a:srgbClr val="D8E4EF"/>
-            </a:solidFill>
-          </a:ln>
-          <a:effectLst/>
-        </p:spPr>
-        <p:style>
-          <a:lnRef idx="1">
-            <a:schemeClr val="accent1"/>
-          </a:lnRef>
-          <a:fillRef idx="3">
-            <a:schemeClr val="accent1"/>
-          </a:fillRef>
-          <a:effectRef idx="2">
-            <a:schemeClr val="accent1"/>
-          </a:effectRef>
-          <a:fontRef idx="minor">
-            <a:schemeClr val="lt1"/>
-          </a:fontRef>
-        </p:style>
-        <p:txBody>
-          <a:bodyPr rtlCol="0" anchor="ctr"/>
-          <a:lstStyle/>
-          <a:p>
-            <a:pPr algn="ctr"/>
-          </a:p>
-        </p:txBody>
-      </p:sp>
-      <p:sp>
-        <p:nvSpPr>
-          <p:cNvPr id="21" name="TextBox 20"/>
-          <p:cNvSpPr txBox="1"/>
-          <p:nvPr/>
-        </p:nvSpPr>
-        <p:spPr>
-          <a:xfrm>
-            <a:off x="8275320" y="3886200"/>
-            <a:ext cx="3246120" cy="384048"/>
-          </a:xfrm>
-          <a:prstGeom prst="rect">
-            <a:avLst/>
-          </a:prstGeom>
-          <a:noFill/>
-        </p:spPr>
-        <p:txBody>
-          <a:bodyPr wrap="square" lIns="45720" rIns="45720" tIns="27432" bIns="27432" anchor="t">
-            <a:spAutoFit/>
-          </a:bodyPr>
-          <a:lstStyle/>
-          <a:p>
-            <a:pPr algn="ctr"/>
-            <a:r>
-              <a:rPr sz="1600" b="1">
-                <a:solidFill>
-                  <a:srgbClr val="0B315B"/>
-                </a:solidFill>
-                <a:latin typeface="Noto Sans JP"/>
-              </a:rPr>
-              <a:t>資料の自動作成</a:t>
-            </a:r>
-          </a:p>
-        </p:txBody>
-      </p:sp>
-      <p:sp>
-        <p:nvSpPr>
-          <p:cNvPr id="22" name="TextBox 21"/>
-          <p:cNvSpPr txBox="1"/>
-          <p:nvPr/>
-        </p:nvSpPr>
-        <p:spPr>
-          <a:xfrm>
-            <a:off x="8275320" y="4297680"/>
-            <a:ext cx="3246120" cy="1280160"/>
-          </a:xfrm>
-          <a:prstGeom prst="rect">
-            <a:avLst/>
-          </a:prstGeom>
-          <a:noFill/>
-        </p:spPr>
-        <p:txBody>
-          <a:bodyPr wrap="square" lIns="45720" rIns="45720" tIns="27432" bIns="27432" anchor="t">
-            <a:spAutoFit/>
-          </a:bodyPr>
-          <a:lstStyle/>
-          <a:p>
-            <a:pPr algn="ctr"/>
-            <a:r>
-              <a:rPr sz="1350" b="0">
-                <a:solidFill>
-                  <a:srgbClr val="172433"/>
-                </a:solidFill>
-                <a:latin typeface="Noto Sans JP"/>
-              </a:rPr>
-              <a:t>会話×画面から、Excelの表・Wordの説明・メールの下書きを作る</a:t>
-            </a:r>
-          </a:p>
-        </p:txBody>
-      </p:sp>
-      <p:sp>
-        <p:nvSpPr>
-          <p:cNvPr id="23" name="TextBox 22"/>
-          <p:cNvSpPr txBox="1"/>
-          <p:nvPr/>
-        </p:nvSpPr>
-        <p:spPr>
-          <a:xfrm>
-            <a:off x="640080" y="5989320"/>
-            <a:ext cx="10972800" cy="365760"/>
-          </a:xfrm>
-          <a:prstGeom prst="rect">
-            <a:avLst/>
-          </a:prstGeom>
-          <a:noFill/>
-        </p:spPr>
-        <p:txBody>
-          <a:bodyPr wrap="square" lIns="45720" rIns="45720" tIns="27432" bIns="27432" anchor="t">
-            <a:spAutoFit/>
-          </a:bodyPr>
-          <a:lstStyle/>
-          <a:p>
-            <a:pPr algn="ctr"/>
-            <a:r>
-              <a:rPr sz="1500" b="1">
-                <a:solidFill>
-                  <a:srgbClr val="0B315B"/>
-                </a:solidFill>
-                <a:latin typeface="Noto Sans JP"/>
-              </a:rPr>
-              <a:t>受け手はアプリ不要。リンクで見られ、受け手が次の作り手になる</a:t>
+              <a:t>この 4 番目を、Connect-Force が引き受ける</a:t>
             </a:r>
           </a:p>
         </p:txBody>
@@ -4717,7 +5257,7 @@
                 </a:solidFill>
                 <a:latin typeface="Noto Sans JP"/>
               </a:rPr>
-              <a:t>物エージェントの構成</a:t>
+              <a:t>何ができるか</a:t>
             </a:r>
           </a:p>
         </p:txBody>
@@ -4752,7 +5292,7 @@
                 </a:solidFill>
                 <a:latin typeface="Noto Sans JP"/>
               </a:rPr>
-              <a:t>元に戻せる判断はAI、元に戻せない操作と安全の境界はコード、確定は人</a:t>
+              <a:t>物や場所に貼ったQR・NFCから、担当・記録・経緯が開き、作業の成果は「動くカード」で渡せる</a:t>
             </a:r>
           </a:p>
         </p:txBody>
@@ -4800,8 +5340,8 @@
         </p:nvSpPr>
         <p:spPr>
           <a:xfrm>
-            <a:off x="548640" y="2468880"/>
-            <a:ext cx="2103120" cy="1737360"/>
+            <a:off x="548640" y="1691640"/>
+            <a:ext cx="3520440" cy="1874519"/>
           </a:xfrm>
           <a:prstGeom prst="roundRect">
             <a:avLst>
@@ -4848,29 +5388,29 @@
         </p:nvSpPr>
         <p:spPr>
           <a:xfrm>
-            <a:off x="640080" y="2606040"/>
-            <a:ext cx="1920240" cy="365760"/>
-          </a:xfrm>
-          <a:prstGeom prst="rect">
-            <a:avLst/>
-          </a:prstGeom>
-          <a:noFill/>
-        </p:spPr>
-        <p:txBody>
-          <a:bodyPr wrap="square" lIns="45720" rIns="45720" tIns="27432" bIns="27432" anchor="t">
-            <a:spAutoFit/>
-          </a:bodyPr>
-          <a:lstStyle/>
-          <a:p>
-            <a:pPr algn="ctr"/>
-            <a:r>
-              <a:rPr sz="1650" b="1">
+            <a:off x="685800" y="1783080"/>
+            <a:ext cx="3246120" cy="384048"/>
+          </a:xfrm>
+          <a:prstGeom prst="rect">
+            <a:avLst/>
+          </a:prstGeom>
+          <a:noFill/>
+        </p:spPr>
+        <p:txBody>
+          <a:bodyPr wrap="square" lIns="45720" rIns="45720" tIns="27432" bIns="27432" anchor="t">
+            <a:spAutoFit/>
+          </a:bodyPr>
+          <a:lstStyle/>
+          <a:p>
+            <a:pPr algn="ctr"/>
+            <a:r>
+              <a:rPr sz="1600" b="1">
                 <a:solidFill>
                   <a:srgbClr val="0B315B"/>
                 </a:solidFill>
                 <a:latin typeface="Noto Sans JP"/>
               </a:rPr>
-              <a:t>入力</a:t>
+              <a:t>物のページ</a:t>
             </a:r>
           </a:p>
         </p:txBody>
@@ -4883,8 +5423,8 @@
         </p:nvSpPr>
         <p:spPr>
           <a:xfrm>
-            <a:off x="640080" y="3017520"/>
-            <a:ext cx="1920240" cy="1097280"/>
+            <a:off x="685800" y="2194560"/>
+            <a:ext cx="3246120" cy="1280160"/>
           </a:xfrm>
           <a:prstGeom prst="rect">
             <a:avLst/>
@@ -4905,19 +5445,7 @@
                 </a:solidFill>
                 <a:latin typeface="Noto Sans JP"/>
               </a:rPr>
-              <a:t>カード・履歴・期限</a:t>
-            </a:r>
-          </a:p>
-          <a:p>
-            <a:pPr algn="ctr"/>
-            <a:r>
-              <a:rPr sz="1350" b="0">
-                <a:solidFill>
-                  <a:srgbClr val="172433"/>
-                </a:solidFill>
-                <a:latin typeface="Noto Sans JP"/>
-              </a:rPr>
-              <a:t>会話の文字・画面</a:t>
+              <a:t>タグを読むと、担当・資料・これまでのカード・経緯の要約が開く</a:t>
             </a:r>
           </a:p>
         </p:txBody>
@@ -4930,162 +5458,8 @@
         </p:nvSpPr>
         <p:spPr>
           <a:xfrm>
-            <a:off x="3429000" y="2011680"/>
-            <a:ext cx="2743200" cy="2743200"/>
-          </a:xfrm>
-          <a:prstGeom prst="roundRect">
-            <a:avLst>
-              <a:gd name="adj" fmla="val 6000"/>
-            </a:avLst>
-          </a:prstGeom>
-          <a:solidFill>
-            <a:srgbClr val="EAF5FC"/>
-          </a:solidFill>
-          <a:ln w="12700">
-            <a:solidFill>
-              <a:srgbClr val="36A9E1"/>
-            </a:solidFill>
-          </a:ln>
-          <a:effectLst/>
-        </p:spPr>
-        <p:style>
-          <a:lnRef idx="1">
-            <a:schemeClr val="accent1"/>
-          </a:lnRef>
-          <a:fillRef idx="3">
-            <a:schemeClr val="accent1"/>
-          </a:fillRef>
-          <a:effectRef idx="2">
-            <a:schemeClr val="accent1"/>
-          </a:effectRef>
-          <a:fontRef idx="minor">
-            <a:schemeClr val="lt1"/>
-          </a:fontRef>
-        </p:style>
-        <p:txBody>
-          <a:bodyPr rtlCol="0" anchor="ctr"/>
-          <a:lstStyle/>
-          <a:p>
-            <a:pPr algn="ctr"/>
-          </a:p>
-        </p:txBody>
-      </p:sp>
-      <p:sp>
-        <p:nvSpPr>
-          <p:cNvPr id="9" name="TextBox 8"/>
-          <p:cNvSpPr txBox="1"/>
-          <p:nvPr/>
-        </p:nvSpPr>
-        <p:spPr>
-          <a:xfrm>
-            <a:off x="3520440" y="2148840"/>
-            <a:ext cx="2560320" cy="365760"/>
-          </a:xfrm>
-          <a:prstGeom prst="rect">
-            <a:avLst/>
-          </a:prstGeom>
-          <a:noFill/>
-        </p:spPr>
-        <p:txBody>
-          <a:bodyPr wrap="square" lIns="45720" rIns="45720" tIns="27432" bIns="27432" anchor="t">
-            <a:spAutoFit/>
-          </a:bodyPr>
-          <a:lstStyle/>
-          <a:p>
-            <a:pPr algn="ctr"/>
-            <a:r>
-              <a:rPr sz="1650" b="1">
-                <a:solidFill>
-                  <a:srgbClr val="0B315B"/>
-                </a:solidFill>
-                <a:latin typeface="Noto Sans JP"/>
-              </a:rPr>
-              <a:t>AIが選ぶ</a:t>
-            </a:r>
-          </a:p>
-        </p:txBody>
-      </p:sp>
-      <p:sp>
-        <p:nvSpPr>
-          <p:cNvPr id="10" name="TextBox 9"/>
-          <p:cNvSpPr txBox="1"/>
-          <p:nvPr/>
-        </p:nvSpPr>
-        <p:spPr>
-          <a:xfrm>
-            <a:off x="3520440" y="2560320"/>
-            <a:ext cx="2560320" cy="2103120"/>
-          </a:xfrm>
-          <a:prstGeom prst="rect">
-            <a:avLst/>
-          </a:prstGeom>
-          <a:noFill/>
-        </p:spPr>
-        <p:txBody>
-          <a:bodyPr wrap="square" lIns="45720" rIns="45720" tIns="27432" bIns="27432" anchor="t">
-            <a:spAutoFit/>
-          </a:bodyPr>
-          <a:lstStyle/>
-          <a:p>
-            <a:pPr algn="ctr"/>
-            <a:r>
-              <a:rPr sz="1350" b="0">
-                <a:solidFill>
-                  <a:srgbClr val="172433"/>
-                </a:solidFill>
-                <a:latin typeface="Noto Sans JP"/>
-              </a:rPr>
-              <a:t>カードの種類・情報不足</a:t>
-            </a:r>
-          </a:p>
-          <a:p>
-            <a:pPr algn="ctr"/>
-            <a:r>
-              <a:rPr sz="1350" b="0">
-                <a:solidFill>
-                  <a:srgbClr val="172433"/>
-                </a:solidFill>
-                <a:latin typeface="Noto Sans JP"/>
-              </a:rPr>
-              <a:t>共有範囲を狭める提案</a:t>
-            </a:r>
-          </a:p>
-          <a:p>
-            <a:pPr algn="ctr"/>
-            <a:r>
-              <a:rPr sz="1350" b="0">
-                <a:solidFill>
-                  <a:srgbClr val="172433"/>
-                </a:solidFill>
-                <a:latin typeface="Noto Sans JP"/>
-              </a:rPr>
-              <a:t>次の業務の提案</a:t>
-            </a:r>
-          </a:p>
-          <a:p>
-            <a:pPr algn="ctr"/>
-            <a:r>
-              <a:rPr sz="1350" b="0">
-                <a:solidFill>
-                  <a:srgbClr val="172433"/>
-                </a:solidFill>
-                <a:latin typeface="Noto Sans JP"/>
-              </a:rPr>
-              <a:t>資料・メールの下書き</a:t>
-            </a:r>
-          </a:p>
-        </p:txBody>
-      </p:sp>
-      <p:sp>
-        <p:nvSpPr>
-          <p:cNvPr id="11" name="Rounded Rectangle 10"/>
-          <p:cNvSpPr/>
-          <p:nvPr/>
-        </p:nvSpPr>
-        <p:spPr>
-          <a:xfrm>
-            <a:off x="6949440" y="1691640"/>
-            <a:ext cx="2377440" cy="1554480"/>
+            <a:off x="4343400" y="1691640"/>
+            <a:ext cx="3520440" cy="1874519"/>
           </a:xfrm>
           <a:prstGeom prst="roundRect">
             <a:avLst>
@@ -5126,49 +5500,49 @@
       </p:sp>
       <p:sp>
         <p:nvSpPr>
-          <p:cNvPr id="12" name="TextBox 11"/>
-          <p:cNvSpPr txBox="1"/>
-          <p:nvPr/>
-        </p:nvSpPr>
-        <p:spPr>
-          <a:xfrm>
-            <a:off x="7040880" y="1810512"/>
-            <a:ext cx="2194560" cy="365760"/>
-          </a:xfrm>
-          <a:prstGeom prst="rect">
-            <a:avLst/>
-          </a:prstGeom>
-          <a:noFill/>
-        </p:spPr>
-        <p:txBody>
-          <a:bodyPr wrap="square" lIns="45720" rIns="45720" tIns="27432" bIns="27432" anchor="t">
-            <a:spAutoFit/>
-          </a:bodyPr>
-          <a:lstStyle/>
-          <a:p>
-            <a:pPr algn="ctr"/>
-            <a:r>
-              <a:rPr sz="1650" b="1">
+          <p:cNvPr id="9" name="TextBox 8"/>
+          <p:cNvSpPr txBox="1"/>
+          <p:nvPr/>
+        </p:nvSpPr>
+        <p:spPr>
+          <a:xfrm>
+            <a:off x="4480560" y="1783080"/>
+            <a:ext cx="3246120" cy="384048"/>
+          </a:xfrm>
+          <a:prstGeom prst="rect">
+            <a:avLst/>
+          </a:prstGeom>
+          <a:noFill/>
+        </p:spPr>
+        <p:txBody>
+          <a:bodyPr wrap="square" lIns="45720" rIns="45720" tIns="27432" bIns="27432" anchor="t">
+            <a:spAutoFit/>
+          </a:bodyPr>
+          <a:lstStyle/>
+          <a:p>
+            <a:pPr algn="ctr"/>
+            <a:r>
+              <a:rPr sz="1600" b="1">
                 <a:solidFill>
                   <a:srgbClr val="0B315B"/>
                 </a:solidFill>
                 <a:latin typeface="Noto Sans JP"/>
               </a:rPr>
-              <a:t>コードが検証</a:t>
-            </a:r>
-          </a:p>
-        </p:txBody>
-      </p:sp>
-      <p:sp>
-        <p:nvSpPr>
-          <p:cNvPr id="13" name="TextBox 12"/>
-          <p:cNvSpPr txBox="1"/>
-          <p:nvPr/>
-        </p:nvSpPr>
-        <p:spPr>
-          <a:xfrm>
-            <a:off x="7040880" y="2194560"/>
-            <a:ext cx="2194560" cy="1005840"/>
+              <a:t>動くカード</a:t>
+            </a:r>
+          </a:p>
+        </p:txBody>
+      </p:sp>
+      <p:sp>
+        <p:nvSpPr>
+          <p:cNvPr id="10" name="TextBox 9"/>
+          <p:cNvSpPr txBox="1"/>
+          <p:nvPr/>
+        </p:nvSpPr>
+        <p:spPr>
+          <a:xfrm>
+            <a:off x="4480560" y="2194560"/>
+            <a:ext cx="3246120" cy="1280160"/>
           </a:xfrm>
           <a:prstGeom prst="rect">
             <a:avLst/>
@@ -5189,33 +5563,21 @@
                 </a:solidFill>
                 <a:latin typeface="Noto Sans JP"/>
               </a:rPr>
-              <a:t>引用の実在</a:t>
-            </a:r>
-          </a:p>
-          <a:p>
-            <a:pPr algn="ctr"/>
-            <a:r>
-              <a:rPr sz="1350" b="0">
-                <a:solidFill>
-                  <a:srgbClr val="172433"/>
-                </a:solidFill>
-                <a:latin typeface="Noto Sans JP"/>
-              </a:rPr>
-              <a:t>個人情報・人名の検査</a:t>
-            </a:r>
-          </a:p>
-        </p:txBody>
-      </p:sp>
-      <p:sp>
-        <p:nvSpPr>
-          <p:cNvPr id="14" name="Rounded Rectangle 13"/>
+              <a:t>写真と声から説明文を作り、作業前後を見比べられる。リンクで渡す</a:t>
+            </a:r>
+          </a:p>
+        </p:txBody>
+      </p:sp>
+      <p:sp>
+        <p:nvSpPr>
+          <p:cNvPr id="11" name="Rounded Rectangle 10"/>
           <p:cNvSpPr/>
           <p:nvPr/>
         </p:nvSpPr>
         <p:spPr>
           <a:xfrm>
-            <a:off x="6949440" y="3520440"/>
-            <a:ext cx="2377440" cy="1554480"/>
+            <a:off x="8138160" y="1691640"/>
+            <a:ext cx="3520440" cy="1874519"/>
           </a:xfrm>
           <a:prstGeom prst="roundRect">
             <a:avLst>
@@ -5256,49 +5618,49 @@
       </p:sp>
       <p:sp>
         <p:nvSpPr>
-          <p:cNvPr id="15" name="TextBox 14"/>
-          <p:cNvSpPr txBox="1"/>
-          <p:nvPr/>
-        </p:nvSpPr>
-        <p:spPr>
-          <a:xfrm>
-            <a:off x="7040880" y="3639312"/>
-            <a:ext cx="2194560" cy="365760"/>
-          </a:xfrm>
-          <a:prstGeom prst="rect">
-            <a:avLst/>
-          </a:prstGeom>
-          <a:noFill/>
-        </p:spPr>
-        <p:txBody>
-          <a:bodyPr wrap="square" lIns="45720" rIns="45720" tIns="27432" bIns="27432" anchor="t">
-            <a:spAutoFit/>
-          </a:bodyPr>
-          <a:lstStyle/>
-          <a:p>
-            <a:pPr algn="ctr"/>
-            <a:r>
-              <a:rPr sz="1650" b="1">
+          <p:cNvPr id="12" name="TextBox 11"/>
+          <p:cNvSpPr txBox="1"/>
+          <p:nvPr/>
+        </p:nvSpPr>
+        <p:spPr>
+          <a:xfrm>
+            <a:off x="8275320" y="1783080"/>
+            <a:ext cx="3246120" cy="384048"/>
+          </a:xfrm>
+          <a:prstGeom prst="rect">
+            <a:avLst/>
+          </a:prstGeom>
+          <a:noFill/>
+        </p:spPr>
+        <p:txBody>
+          <a:bodyPr wrap="square" lIns="45720" rIns="45720" tIns="27432" bIns="27432" anchor="t">
+            <a:spAutoFit/>
+          </a:bodyPr>
+          <a:lstStyle/>
+          <a:p>
+            <a:pPr algn="ctr"/>
+            <a:r>
+              <a:rPr sz="1600" b="1">
                 <a:solidFill>
                   <a:srgbClr val="0B315B"/>
                 </a:solidFill>
                 <a:latin typeface="Noto Sans JP"/>
               </a:rPr>
-              <a:t>AIに渡さない</a:t>
-            </a:r>
-          </a:p>
-        </p:txBody>
-      </p:sp>
-      <p:sp>
-        <p:nvSpPr>
-          <p:cNvPr id="16" name="TextBox 15"/>
-          <p:cNvSpPr txBox="1"/>
-          <p:nvPr/>
-        </p:nvSpPr>
-        <p:spPr>
-          <a:xfrm>
-            <a:off x="7040880" y="4023360"/>
-            <a:ext cx="2194560" cy="1005840"/>
+              <a:t>写真の保護</a:t>
+            </a:r>
+          </a:p>
+        </p:txBody>
+      </p:sp>
+      <p:sp>
+        <p:nvSpPr>
+          <p:cNvPr id="13" name="TextBox 12"/>
+          <p:cNvSpPr txBox="1"/>
+          <p:nvPr/>
+        </p:nvSpPr>
+        <p:spPr>
+          <a:xfrm>
+            <a:off x="8275320" y="2194560"/>
+            <a:ext cx="3246120" cy="1280160"/>
           </a:xfrm>
           <a:prstGeom prst="rect">
             <a:avLst/>
@@ -5319,33 +5681,21 @@
                 </a:solidFill>
                 <a:latin typeface="Noto Sans JP"/>
               </a:rPr>
-              <a:t>リンク発行・共有拡大</a:t>
-            </a:r>
-          </a:p>
-          <a:p>
-            <a:pPr algn="ctr"/>
-            <a:r>
-              <a:rPr sz="1350" b="0">
-                <a:solidFill>
-                  <a:srgbClr val="172433"/>
-                </a:solidFill>
-                <a:latin typeface="Noto Sans JP"/>
-              </a:rPr>
-              <a:t>削除・送信</a:t>
-            </a:r>
-          </a:p>
-        </p:txBody>
-      </p:sp>
-      <p:sp>
-        <p:nvSpPr>
-          <p:cNvPr id="17" name="Rounded Rectangle 16"/>
+              <a:t>顔・ナンバー・書類は、送る前に端末で隠す。共有範囲は作り手が決める</a:t>
+            </a:r>
+          </a:p>
+        </p:txBody>
+      </p:sp>
+      <p:sp>
+        <p:nvSpPr>
+          <p:cNvPr id="14" name="Rounded Rectangle 13"/>
           <p:cNvSpPr/>
           <p:nvPr/>
         </p:nvSpPr>
         <p:spPr>
           <a:xfrm>
-            <a:off x="9784080" y="2011680"/>
-            <a:ext cx="1920240" cy="2743200"/>
+            <a:off x="548640" y="3794760"/>
+            <a:ext cx="3520440" cy="1874519"/>
           </a:xfrm>
           <a:prstGeom prst="roundRect">
             <a:avLst>
@@ -5353,11 +5703,11 @@
             </a:avLst>
           </a:prstGeom>
           <a:solidFill>
-            <a:srgbClr val="EFF8F3"/>
+            <a:srgbClr val="F4F8FC"/>
           </a:solidFill>
           <a:ln w="12700">
             <a:solidFill>
-              <a:srgbClr val="A6D6C3"/>
+              <a:srgbClr val="D8E4EF"/>
             </a:solidFill>
           </a:ln>
           <a:effectLst/>
@@ -5386,49 +5736,49 @@
       </p:sp>
       <p:sp>
         <p:nvSpPr>
-          <p:cNvPr id="18" name="TextBox 17"/>
-          <p:cNvSpPr txBox="1"/>
-          <p:nvPr/>
-        </p:nvSpPr>
-        <p:spPr>
-          <a:xfrm>
-            <a:off x="9875520" y="2148840"/>
-            <a:ext cx="1737360" cy="365760"/>
-          </a:xfrm>
-          <a:prstGeom prst="rect">
-            <a:avLst/>
-          </a:prstGeom>
-          <a:noFill/>
-        </p:spPr>
-        <p:txBody>
-          <a:bodyPr wrap="square" lIns="45720" rIns="45720" tIns="27432" bIns="27432" anchor="t">
-            <a:spAutoFit/>
-          </a:bodyPr>
-          <a:lstStyle/>
-          <a:p>
-            <a:pPr algn="ctr"/>
-            <a:r>
-              <a:rPr sz="1650" b="1">
-                <a:solidFill>
-                  <a:srgbClr val="16805B"/>
-                </a:solidFill>
-                <a:latin typeface="Noto Sans JP"/>
-              </a:rPr>
-              <a:t>人が確定</a:t>
-            </a:r>
-          </a:p>
-        </p:txBody>
-      </p:sp>
-      <p:sp>
-        <p:nvSpPr>
-          <p:cNvPr id="19" name="TextBox 18"/>
-          <p:cNvSpPr txBox="1"/>
-          <p:nvPr/>
-        </p:nvSpPr>
-        <p:spPr>
-          <a:xfrm>
-            <a:off x="9875520" y="2560320"/>
-            <a:ext cx="1737360" cy="2103120"/>
+          <p:cNvPr id="15" name="TextBox 14"/>
+          <p:cNvSpPr txBox="1"/>
+          <p:nvPr/>
+        </p:nvSpPr>
+        <p:spPr>
+          <a:xfrm>
+            <a:off x="685800" y="3886200"/>
+            <a:ext cx="3246120" cy="384048"/>
+          </a:xfrm>
+          <a:prstGeom prst="rect">
+            <a:avLst/>
+          </a:prstGeom>
+          <a:noFill/>
+        </p:spPr>
+        <p:txBody>
+          <a:bodyPr wrap="square" lIns="45720" rIns="45720" tIns="27432" bIns="27432" anchor="t">
+            <a:spAutoFit/>
+          </a:bodyPr>
+          <a:lstStyle/>
+          <a:p>
+            <a:pPr algn="ctr"/>
+            <a:r>
+              <a:rPr sz="1600" b="1">
+                <a:solidFill>
+                  <a:srgbClr val="0B315B"/>
+                </a:solidFill>
+                <a:latin typeface="Noto Sans JP"/>
+              </a:rPr>
+              <a:t>会話から次の業務</a:t>
+            </a:r>
+          </a:p>
+        </p:txBody>
+      </p:sp>
+      <p:sp>
+        <p:nvSpPr>
+          <p:cNvPr id="16" name="TextBox 15"/>
+          <p:cNvSpPr txBox="1"/>
+          <p:nvPr/>
+        </p:nvSpPr>
+        <p:spPr>
+          <a:xfrm>
+            <a:off x="685800" y="4297680"/>
+            <a:ext cx="3246120" cy="1280160"/>
           </a:xfrm>
           <a:prstGeom prst="rect">
             <a:avLst/>
@@ -5449,253 +5799,278 @@
                 </a:solidFill>
                 <a:latin typeface="Noto Sans JP"/>
               </a:rPr>
-              <a:t>確認する</a:t>
-            </a:r>
-          </a:p>
-          <a:p>
-            <a:pPr algn="ctr"/>
-            <a:r>
-              <a:rPr sz="1350" b="0">
-                <a:solidFill>
-                  <a:srgbClr val="172433"/>
-                </a:solidFill>
-                <a:latin typeface="Noto Sans JP"/>
-              </a:rPr>
-              <a:t>同意する</a:t>
-            </a:r>
-          </a:p>
-          <a:p>
-            <a:pPr algn="ctr"/>
-            <a:r>
-              <a:rPr sz="1350" b="0">
-                <a:solidFill>
-                  <a:srgbClr val="172433"/>
-                </a:solidFill>
-                <a:latin typeface="Noto Sans JP"/>
-              </a:rPr>
-              <a:t>承認する</a:t>
-            </a:r>
-          </a:p>
-          <a:p>
-            <a:pPr algn="ctr"/>
-            <a:r>
-              <a:rPr sz="1350" b="0">
-                <a:solidFill>
-                  <a:srgbClr val="172433"/>
-                </a:solidFill>
-                <a:latin typeface="Noto Sans JP"/>
-              </a:rPr>
-              <a:t>共有・送信は人が押す</a:t>
-            </a:r>
-          </a:p>
-        </p:txBody>
-      </p:sp>
-      <p:cxnSp>
-        <p:nvCxnSpPr>
-          <p:cNvPr id="20" name="Connector 19"/>
-          <p:cNvCxnSpPr/>
-          <p:nvPr/>
-        </p:nvCxnSpPr>
-        <p:spPr>
-          <a:xfrm>
-            <a:off x="2670048" y="3337560"/>
-            <a:ext cx="731520" cy="0"/>
-          </a:xfrm>
-          <a:prstGeom prst="line">
-            <a:avLst/>
-          </a:prstGeom>
-          <a:ln w="28575">
+              <a:t>会話を文字にして確認し、「私はこう理解しました」で提案。合っていれば下書きに</a:t>
+            </a:r>
+          </a:p>
+        </p:txBody>
+      </p:sp>
+      <p:sp>
+        <p:nvSpPr>
+          <p:cNvPr id="17" name="Rounded Rectangle 16"/>
+          <p:cNvSpPr/>
+          <p:nvPr/>
+        </p:nvSpPr>
+        <p:spPr>
+          <a:xfrm>
+            <a:off x="4343400" y="3794760"/>
+            <a:ext cx="3520440" cy="1874519"/>
+          </a:xfrm>
+          <a:prstGeom prst="roundRect">
+            <a:avLst>
+              <a:gd name="adj" fmla="val 6000"/>
+            </a:avLst>
+          </a:prstGeom>
+          <a:solidFill>
+            <a:srgbClr val="F4F8FC"/>
+          </a:solidFill>
+          <a:ln w="12700">
             <a:solidFill>
-              <a:srgbClr val="2F80C9"/>
+              <a:srgbClr val="D8E4EF"/>
             </a:solidFill>
           </a:ln>
+          <a:effectLst/>
         </p:spPr>
         <p:style>
-          <a:lnRef idx="2">
+          <a:lnRef idx="1">
             <a:schemeClr val="accent1"/>
           </a:lnRef>
-          <a:fillRef idx="0">
+          <a:fillRef idx="3">
             <a:schemeClr val="accent1"/>
           </a:fillRef>
-          <a:effectRef idx="1">
+          <a:effectRef idx="2">
             <a:schemeClr val="accent1"/>
           </a:effectRef>
           <a:fontRef idx="minor">
-            <a:schemeClr val="tx1"/>
+            <a:schemeClr val="lt1"/>
           </a:fontRef>
         </p:style>
-      </p:cxnSp>
-      <p:cxnSp>
-        <p:nvCxnSpPr>
-          <p:cNvPr id="21" name="Connector 20"/>
-          <p:cNvCxnSpPr/>
-          <p:nvPr/>
-        </p:nvCxnSpPr>
-        <p:spPr>
-          <a:xfrm>
-            <a:off x="6199632" y="2468880"/>
-            <a:ext cx="722376" cy="0"/>
-          </a:xfrm>
-          <a:prstGeom prst="line">
-            <a:avLst/>
-          </a:prstGeom>
-          <a:ln w="28575">
+        <p:txBody>
+          <a:bodyPr rtlCol="0" anchor="ctr"/>
+          <a:lstStyle/>
+          <a:p>
+            <a:pPr algn="ctr"/>
+          </a:p>
+        </p:txBody>
+      </p:sp>
+      <p:sp>
+        <p:nvSpPr>
+          <p:cNvPr id="18" name="TextBox 17"/>
+          <p:cNvSpPr txBox="1"/>
+          <p:nvPr/>
+        </p:nvSpPr>
+        <p:spPr>
+          <a:xfrm>
+            <a:off x="4480560" y="3886200"/>
+            <a:ext cx="3246120" cy="384048"/>
+          </a:xfrm>
+          <a:prstGeom prst="rect">
+            <a:avLst/>
+          </a:prstGeom>
+          <a:noFill/>
+        </p:spPr>
+        <p:txBody>
+          <a:bodyPr wrap="square" lIns="45720" rIns="45720" tIns="27432" bIns="27432" anchor="t">
+            <a:spAutoFit/>
+          </a:bodyPr>
+          <a:lstStyle/>
+          <a:p>
+            <a:pPr algn="ctr"/>
+            <a:r>
+              <a:rPr sz="1600" b="1">
+                <a:solidFill>
+                  <a:srgbClr val="0B315B"/>
+                </a:solidFill>
+                <a:latin typeface="Noto Sans JP"/>
+              </a:rPr>
+              <a:t>画面の分析</a:t>
+            </a:r>
+          </a:p>
+        </p:txBody>
+      </p:sp>
+      <p:sp>
+        <p:nvSpPr>
+          <p:cNvPr id="19" name="TextBox 18"/>
+          <p:cNvSpPr txBox="1"/>
+          <p:nvPr/>
+        </p:nvSpPr>
+        <p:spPr>
+          <a:xfrm>
+            <a:off x="4480560" y="4297680"/>
+            <a:ext cx="3246120" cy="1280160"/>
+          </a:xfrm>
+          <a:prstGeom prst="rect">
+            <a:avLst/>
+          </a:prstGeom>
+          <a:noFill/>
+        </p:spPr>
+        <p:txBody>
+          <a:bodyPr wrap="square" lIns="45720" rIns="45720" tIns="27432" bIns="27432" anchor="t">
+            <a:spAutoFit/>
+          </a:bodyPr>
+          <a:lstStyle/>
+          <a:p>
+            <a:pPr algn="ctr"/>
+            <a:r>
+              <a:rPr sz="1350" b="0">
+                <a:solidFill>
+                  <a:srgbClr val="172433"/>
+                </a:solidFill>
+                <a:latin typeface="Noto Sans JP"/>
+              </a:rPr>
+              <a:t>通話の画面は、開けた所だけをAIが見る。残る顔・文字は指摘する</a:t>
+            </a:r>
+          </a:p>
+        </p:txBody>
+      </p:sp>
+      <p:sp>
+        <p:nvSpPr>
+          <p:cNvPr id="20" name="Rounded Rectangle 19"/>
+          <p:cNvSpPr/>
+          <p:nvPr/>
+        </p:nvSpPr>
+        <p:spPr>
+          <a:xfrm>
+            <a:off x="8138160" y="3794760"/>
+            <a:ext cx="3520440" cy="1874519"/>
+          </a:xfrm>
+          <a:prstGeom prst="roundRect">
+            <a:avLst>
+              <a:gd name="adj" fmla="val 6000"/>
+            </a:avLst>
+          </a:prstGeom>
+          <a:solidFill>
+            <a:srgbClr val="F4F8FC"/>
+          </a:solidFill>
+          <a:ln w="12700">
             <a:solidFill>
-              <a:srgbClr val="2F80C9"/>
+              <a:srgbClr val="D8E4EF"/>
             </a:solidFill>
           </a:ln>
+          <a:effectLst/>
         </p:spPr>
         <p:style>
-          <a:lnRef idx="2">
+          <a:lnRef idx="1">
             <a:schemeClr val="accent1"/>
           </a:lnRef>
-          <a:fillRef idx="0">
+          <a:fillRef idx="3">
             <a:schemeClr val="accent1"/>
           </a:fillRef>
-          <a:effectRef idx="1">
+          <a:effectRef idx="2">
             <a:schemeClr val="accent1"/>
           </a:effectRef>
           <a:fontRef idx="minor">
-            <a:schemeClr val="tx1"/>
+            <a:schemeClr val="lt1"/>
           </a:fontRef>
         </p:style>
-      </p:cxnSp>
-      <p:cxnSp>
-        <p:nvCxnSpPr>
-          <p:cNvPr id="22" name="Connector 21"/>
-          <p:cNvCxnSpPr/>
-          <p:nvPr/>
-        </p:nvCxnSpPr>
-        <p:spPr>
-          <a:xfrm>
-            <a:off x="6199632" y="4297680"/>
-            <a:ext cx="722376" cy="0"/>
-          </a:xfrm>
-          <a:prstGeom prst="line">
-            <a:avLst/>
-          </a:prstGeom>
-          <a:ln w="28575">
-            <a:solidFill>
-              <a:srgbClr val="2F80C9"/>
-            </a:solidFill>
-          </a:ln>
-        </p:spPr>
-        <p:style>
-          <a:lnRef idx="2">
-            <a:schemeClr val="accent1"/>
-          </a:lnRef>
-          <a:fillRef idx="0">
-            <a:schemeClr val="accent1"/>
-          </a:fillRef>
-          <a:effectRef idx="1">
-            <a:schemeClr val="accent1"/>
-          </a:effectRef>
-          <a:fontRef idx="minor">
-            <a:schemeClr val="tx1"/>
-          </a:fontRef>
-        </p:style>
-      </p:cxnSp>
-      <p:cxnSp>
-        <p:nvCxnSpPr>
-          <p:cNvPr id="23" name="Connector 22"/>
-          <p:cNvCxnSpPr/>
-          <p:nvPr/>
-        </p:nvCxnSpPr>
-        <p:spPr>
-          <a:xfrm>
-            <a:off x="9354312" y="2468880"/>
-            <a:ext cx="402336" cy="0"/>
-          </a:xfrm>
-          <a:prstGeom prst="line">
-            <a:avLst/>
-          </a:prstGeom>
-          <a:ln w="28575">
-            <a:solidFill>
-              <a:srgbClr val="2F80C9"/>
-            </a:solidFill>
-          </a:ln>
-        </p:spPr>
-        <p:style>
-          <a:lnRef idx="2">
-            <a:schemeClr val="accent1"/>
-          </a:lnRef>
-          <a:fillRef idx="0">
-            <a:schemeClr val="accent1"/>
-          </a:fillRef>
-          <a:effectRef idx="1">
-            <a:schemeClr val="accent1"/>
-          </a:effectRef>
-          <a:fontRef idx="minor">
-            <a:schemeClr val="tx1"/>
-          </a:fontRef>
-        </p:style>
-      </p:cxnSp>
-      <p:cxnSp>
-        <p:nvCxnSpPr>
-          <p:cNvPr id="24" name="Connector 23"/>
-          <p:cNvCxnSpPr/>
-          <p:nvPr/>
-        </p:nvCxnSpPr>
-        <p:spPr>
-          <a:xfrm>
-            <a:off x="9354312" y="4297680"/>
-            <a:ext cx="402336" cy="0"/>
-          </a:xfrm>
-          <a:prstGeom prst="line">
-            <a:avLst/>
-          </a:prstGeom>
-          <a:ln w="28575">
-            <a:solidFill>
-              <a:srgbClr val="2F80C9"/>
-            </a:solidFill>
-          </a:ln>
-        </p:spPr>
-        <p:style>
-          <a:lnRef idx="2">
-            <a:schemeClr val="accent1"/>
-          </a:lnRef>
-          <a:fillRef idx="0">
-            <a:schemeClr val="accent1"/>
-          </a:fillRef>
-          <a:effectRef idx="1">
-            <a:schemeClr val="accent1"/>
-          </a:effectRef>
-          <a:fontRef idx="minor">
-            <a:schemeClr val="tx1"/>
-          </a:fontRef>
-        </p:style>
-      </p:cxnSp>
-      <p:sp>
-        <p:nvSpPr>
-          <p:cNvPr id="25" name="TextBox 24"/>
-          <p:cNvSpPr txBox="1"/>
-          <p:nvPr/>
-        </p:nvSpPr>
-        <p:spPr>
-          <a:xfrm>
-            <a:off x="1371600" y="5577840"/>
-            <a:ext cx="9418320" cy="548640"/>
-          </a:xfrm>
-          <a:prstGeom prst="rect">
-            <a:avLst/>
-          </a:prstGeom>
-          <a:noFill/>
-        </p:spPr>
-        <p:txBody>
-          <a:bodyPr wrap="square" lIns="45720" rIns="45720" tIns="27432" bIns="27432" anchor="t">
-            <a:spAutoFit/>
-          </a:bodyPr>
-          <a:lstStyle/>
-          <a:p>
-            <a:pPr algn="ctr"/>
-            <a:r>
-              <a:rPr sz="1400" b="0">
-                <a:solidFill>
-                  <a:srgbClr val="5B6B7D"/>
-                </a:solidFill>
-                <a:latin typeface="Noto Sans JP"/>
-              </a:rPr>
-              <a:t>判断のたびに、選択・理由・裏付け・使ったモデル・原価を、判断ログに残す</a:t>
+        <p:txBody>
+          <a:bodyPr rtlCol="0" anchor="ctr"/>
+          <a:lstStyle/>
+          <a:p>
+            <a:pPr algn="ctr"/>
+          </a:p>
+        </p:txBody>
+      </p:sp>
+      <p:sp>
+        <p:nvSpPr>
+          <p:cNvPr id="21" name="TextBox 20"/>
+          <p:cNvSpPr txBox="1"/>
+          <p:nvPr/>
+        </p:nvSpPr>
+        <p:spPr>
+          <a:xfrm>
+            <a:off x="8275320" y="3886200"/>
+            <a:ext cx="3246120" cy="384048"/>
+          </a:xfrm>
+          <a:prstGeom prst="rect">
+            <a:avLst/>
+          </a:prstGeom>
+          <a:noFill/>
+        </p:spPr>
+        <p:txBody>
+          <a:bodyPr wrap="square" lIns="45720" rIns="45720" tIns="27432" bIns="27432" anchor="t">
+            <a:spAutoFit/>
+          </a:bodyPr>
+          <a:lstStyle/>
+          <a:p>
+            <a:pPr algn="ctr"/>
+            <a:r>
+              <a:rPr sz="1600" b="1">
+                <a:solidFill>
+                  <a:srgbClr val="0B315B"/>
+                </a:solidFill>
+                <a:latin typeface="Noto Sans JP"/>
+              </a:rPr>
+              <a:t>資料の自動作成</a:t>
+            </a:r>
+          </a:p>
+        </p:txBody>
+      </p:sp>
+      <p:sp>
+        <p:nvSpPr>
+          <p:cNvPr id="22" name="TextBox 21"/>
+          <p:cNvSpPr txBox="1"/>
+          <p:nvPr/>
+        </p:nvSpPr>
+        <p:spPr>
+          <a:xfrm>
+            <a:off x="8275320" y="4297680"/>
+            <a:ext cx="3246120" cy="1280160"/>
+          </a:xfrm>
+          <a:prstGeom prst="rect">
+            <a:avLst/>
+          </a:prstGeom>
+          <a:noFill/>
+        </p:spPr>
+        <p:txBody>
+          <a:bodyPr wrap="square" lIns="45720" rIns="45720" tIns="27432" bIns="27432" anchor="t">
+            <a:spAutoFit/>
+          </a:bodyPr>
+          <a:lstStyle/>
+          <a:p>
+            <a:pPr algn="ctr"/>
+            <a:r>
+              <a:rPr sz="1350" b="0">
+                <a:solidFill>
+                  <a:srgbClr val="172433"/>
+                </a:solidFill>
+                <a:latin typeface="Noto Sans JP"/>
+              </a:rPr>
+              <a:t>会話×画面から、Excelの表・Wordの説明・メールの下書きを作る</a:t>
+            </a:r>
+          </a:p>
+        </p:txBody>
+      </p:sp>
+      <p:sp>
+        <p:nvSpPr>
+          <p:cNvPr id="23" name="TextBox 22"/>
+          <p:cNvSpPr txBox="1"/>
+          <p:nvPr/>
+        </p:nvSpPr>
+        <p:spPr>
+          <a:xfrm>
+            <a:off x="640080" y="5989320"/>
+            <a:ext cx="10972800" cy="365760"/>
+          </a:xfrm>
+          <a:prstGeom prst="rect">
+            <a:avLst/>
+          </a:prstGeom>
+          <a:noFill/>
+        </p:spPr>
+        <p:txBody>
+          <a:bodyPr wrap="square" lIns="45720" rIns="45720" tIns="27432" bIns="27432" anchor="t">
+            <a:spAutoFit/>
+          </a:bodyPr>
+          <a:lstStyle/>
+          <a:p>
+            <a:pPr algn="ctr"/>
+            <a:r>
+              <a:rPr sz="1500" b="1">
+                <a:solidFill>
+                  <a:srgbClr val="0B315B"/>
+                </a:solidFill>
+                <a:latin typeface="Noto Sans JP"/>
+              </a:rPr>
+              <a:t>受け手はアプリ不要。リンクで見られ、受け手が次の作り手になる</a:t>
             </a:r>
           </a:p>
         </p:txBody>
@@ -5748,7 +6123,7 @@
                 </a:solidFill>
                 <a:latin typeface="Noto Sans JP"/>
               </a:rPr>
-              <a:t>デモの流れ</a:t>
+              <a:t>物エージェントの構成</a:t>
             </a:r>
           </a:p>
         </p:txBody>
@@ -5783,7 +6158,7 @@
                 </a:solidFill>
                 <a:latin typeface="Noto Sans JP"/>
               </a:rPr>
-              <a:t>共有画面と電話の声から、資料とメールの下書きまで（Zoom・電話とPCのやり取り）</a:t>
+              <a:t>元に戻せる判断はAI、元に戻せない操作と安全の境界はコード、確定は人</a:t>
             </a:r>
           </a:p>
         </p:txBody>
@@ -5818,7 +6193,7 @@
                 </a:solidFill>
                 <a:latin typeface="Noto Sans JP"/>
               </a:rPr>
-              <a:t>4</a:t>
+              <a:t>3</a:t>
             </a:r>
           </a:p>
         </p:txBody>
@@ -5831,8 +6206,8 @@
         </p:nvSpPr>
         <p:spPr>
           <a:xfrm>
-            <a:off x="457200" y="1691640"/>
-            <a:ext cx="3566160" cy="1874519"/>
+            <a:off x="548640" y="2468880"/>
+            <a:ext cx="2103120" cy="1737360"/>
           </a:xfrm>
           <a:prstGeom prst="roundRect">
             <a:avLst>
@@ -5879,29 +6254,29 @@
         </p:nvSpPr>
         <p:spPr>
           <a:xfrm>
-            <a:off x="594360" y="1783080"/>
-            <a:ext cx="3291840" cy="384048"/>
-          </a:xfrm>
-          <a:prstGeom prst="rect">
-            <a:avLst/>
-          </a:prstGeom>
-          <a:noFill/>
-        </p:spPr>
-        <p:txBody>
-          <a:bodyPr wrap="square" lIns="45720" rIns="45720" tIns="27432" bIns="27432" anchor="t">
-            <a:spAutoFit/>
-          </a:bodyPr>
-          <a:lstStyle/>
-          <a:p>
-            <a:pPr algn="ctr"/>
-            <a:r>
-              <a:rPr sz="1600" b="1">
+            <a:off x="640080" y="2606040"/>
+            <a:ext cx="1920240" cy="365760"/>
+          </a:xfrm>
+          <a:prstGeom prst="rect">
+            <a:avLst/>
+          </a:prstGeom>
+          <a:noFill/>
+        </p:spPr>
+        <p:txBody>
+          <a:bodyPr wrap="square" lIns="45720" rIns="45720" tIns="27432" bIns="27432" anchor="t">
+            <a:spAutoFit/>
+          </a:bodyPr>
+          <a:lstStyle/>
+          <a:p>
+            <a:pPr algn="ctr"/>
+            <a:r>
+              <a:rPr sz="1650" b="1">
                 <a:solidFill>
                   <a:srgbClr val="0B315B"/>
                 </a:solidFill>
                 <a:latin typeface="Noto Sans JP"/>
               </a:rPr>
-              <a:t>1 共有画面</a:t>
+              <a:t>入力</a:t>
             </a:r>
           </a:p>
         </p:txBody>
@@ -5914,8 +6289,8 @@
         </p:nvSpPr>
         <p:spPr>
           <a:xfrm>
-            <a:off x="594360" y="2194560"/>
-            <a:ext cx="3291840" cy="1280160"/>
+            <a:off x="640080" y="3017520"/>
+            <a:ext cx="1920240" cy="1097280"/>
           </a:xfrm>
           <a:prstGeom prst="rect">
             <a:avLst/>
@@ -5936,7 +6311,19 @@
                 </a:solidFill>
                 <a:latin typeface="Noto Sans JP"/>
               </a:rPr>
-              <a:t>現場の画像を共有し、全面を隠す</a:t>
+              <a:t>カード・履歴・期限</a:t>
+            </a:r>
+          </a:p>
+          <a:p>
+            <a:pPr algn="ctr"/>
+            <a:r>
+              <a:rPr sz="1350" b="0">
+                <a:solidFill>
+                  <a:srgbClr val="172433"/>
+                </a:solidFill>
+                <a:latin typeface="Noto Sans JP"/>
+              </a:rPr>
+              <a:t>会話の文字・画面</a:t>
             </a:r>
           </a:p>
         </p:txBody>
@@ -5949,8 +6336,162 @@
         </p:nvSpPr>
         <p:spPr>
           <a:xfrm>
-            <a:off x="4297680" y="1691640"/>
-            <a:ext cx="3566160" cy="1874519"/>
+            <a:off x="3429000" y="2011680"/>
+            <a:ext cx="2743200" cy="2743200"/>
+          </a:xfrm>
+          <a:prstGeom prst="roundRect">
+            <a:avLst>
+              <a:gd name="adj" fmla="val 6000"/>
+            </a:avLst>
+          </a:prstGeom>
+          <a:solidFill>
+            <a:srgbClr val="EAF5FC"/>
+          </a:solidFill>
+          <a:ln w="12700">
+            <a:solidFill>
+              <a:srgbClr val="36A9E1"/>
+            </a:solidFill>
+          </a:ln>
+          <a:effectLst/>
+        </p:spPr>
+        <p:style>
+          <a:lnRef idx="1">
+            <a:schemeClr val="accent1"/>
+          </a:lnRef>
+          <a:fillRef idx="3">
+            <a:schemeClr val="accent1"/>
+          </a:fillRef>
+          <a:effectRef idx="2">
+            <a:schemeClr val="accent1"/>
+          </a:effectRef>
+          <a:fontRef idx="minor">
+            <a:schemeClr val="lt1"/>
+          </a:fontRef>
+        </p:style>
+        <p:txBody>
+          <a:bodyPr rtlCol="0" anchor="ctr"/>
+          <a:lstStyle/>
+          <a:p>
+            <a:pPr algn="ctr"/>
+          </a:p>
+        </p:txBody>
+      </p:sp>
+      <p:sp>
+        <p:nvSpPr>
+          <p:cNvPr id="9" name="TextBox 8"/>
+          <p:cNvSpPr txBox="1"/>
+          <p:nvPr/>
+        </p:nvSpPr>
+        <p:spPr>
+          <a:xfrm>
+            <a:off x="3520440" y="2148840"/>
+            <a:ext cx="2560320" cy="365760"/>
+          </a:xfrm>
+          <a:prstGeom prst="rect">
+            <a:avLst/>
+          </a:prstGeom>
+          <a:noFill/>
+        </p:spPr>
+        <p:txBody>
+          <a:bodyPr wrap="square" lIns="45720" rIns="45720" tIns="27432" bIns="27432" anchor="t">
+            <a:spAutoFit/>
+          </a:bodyPr>
+          <a:lstStyle/>
+          <a:p>
+            <a:pPr algn="ctr"/>
+            <a:r>
+              <a:rPr sz="1650" b="1">
+                <a:solidFill>
+                  <a:srgbClr val="0B315B"/>
+                </a:solidFill>
+                <a:latin typeface="Noto Sans JP"/>
+              </a:rPr>
+              <a:t>AIが選ぶ</a:t>
+            </a:r>
+          </a:p>
+        </p:txBody>
+      </p:sp>
+      <p:sp>
+        <p:nvSpPr>
+          <p:cNvPr id="10" name="TextBox 9"/>
+          <p:cNvSpPr txBox="1"/>
+          <p:nvPr/>
+        </p:nvSpPr>
+        <p:spPr>
+          <a:xfrm>
+            <a:off x="3520440" y="2560320"/>
+            <a:ext cx="2560320" cy="2103120"/>
+          </a:xfrm>
+          <a:prstGeom prst="rect">
+            <a:avLst/>
+          </a:prstGeom>
+          <a:noFill/>
+        </p:spPr>
+        <p:txBody>
+          <a:bodyPr wrap="square" lIns="45720" rIns="45720" tIns="27432" bIns="27432" anchor="t">
+            <a:spAutoFit/>
+          </a:bodyPr>
+          <a:lstStyle/>
+          <a:p>
+            <a:pPr algn="ctr"/>
+            <a:r>
+              <a:rPr sz="1350" b="0">
+                <a:solidFill>
+                  <a:srgbClr val="172433"/>
+                </a:solidFill>
+                <a:latin typeface="Noto Sans JP"/>
+              </a:rPr>
+              <a:t>カードの種類・情報不足</a:t>
+            </a:r>
+          </a:p>
+          <a:p>
+            <a:pPr algn="ctr"/>
+            <a:r>
+              <a:rPr sz="1350" b="0">
+                <a:solidFill>
+                  <a:srgbClr val="172433"/>
+                </a:solidFill>
+                <a:latin typeface="Noto Sans JP"/>
+              </a:rPr>
+              <a:t>共有範囲を狭める提案</a:t>
+            </a:r>
+          </a:p>
+          <a:p>
+            <a:pPr algn="ctr"/>
+            <a:r>
+              <a:rPr sz="1350" b="0">
+                <a:solidFill>
+                  <a:srgbClr val="172433"/>
+                </a:solidFill>
+                <a:latin typeface="Noto Sans JP"/>
+              </a:rPr>
+              <a:t>次の業務の提案</a:t>
+            </a:r>
+          </a:p>
+          <a:p>
+            <a:pPr algn="ctr"/>
+            <a:r>
+              <a:rPr sz="1350" b="0">
+                <a:solidFill>
+                  <a:srgbClr val="172433"/>
+                </a:solidFill>
+                <a:latin typeface="Noto Sans JP"/>
+              </a:rPr>
+              <a:t>資料・メールの下書き</a:t>
+            </a:r>
+          </a:p>
+        </p:txBody>
+      </p:sp>
+      <p:sp>
+        <p:nvSpPr>
+          <p:cNvPr id="11" name="Rounded Rectangle 10"/>
+          <p:cNvSpPr/>
+          <p:nvPr/>
+        </p:nvSpPr>
+        <p:spPr>
+          <a:xfrm>
+            <a:off x="6949440" y="1691640"/>
+            <a:ext cx="2377440" cy="1554480"/>
           </a:xfrm>
           <a:prstGeom prst="roundRect">
             <a:avLst>
@@ -5991,49 +6532,49 @@
       </p:sp>
       <p:sp>
         <p:nvSpPr>
-          <p:cNvPr id="9" name="TextBox 8"/>
-          <p:cNvSpPr txBox="1"/>
-          <p:nvPr/>
-        </p:nvSpPr>
-        <p:spPr>
-          <a:xfrm>
-            <a:off x="4434840" y="1783080"/>
-            <a:ext cx="3291840" cy="384048"/>
-          </a:xfrm>
-          <a:prstGeom prst="rect">
-            <a:avLst/>
-          </a:prstGeom>
-          <a:noFill/>
-        </p:spPr>
-        <p:txBody>
-          <a:bodyPr wrap="square" lIns="45720" rIns="45720" tIns="27432" bIns="27432" anchor="t">
-            <a:spAutoFit/>
-          </a:bodyPr>
-          <a:lstStyle/>
-          <a:p>
-            <a:pPr algn="ctr"/>
-            <a:r>
-              <a:rPr sz="1600" b="1">
+          <p:cNvPr id="12" name="TextBox 11"/>
+          <p:cNvSpPr txBox="1"/>
+          <p:nvPr/>
+        </p:nvSpPr>
+        <p:spPr>
+          <a:xfrm>
+            <a:off x="7040880" y="1810512"/>
+            <a:ext cx="2194560" cy="365760"/>
+          </a:xfrm>
+          <a:prstGeom prst="rect">
+            <a:avLst/>
+          </a:prstGeom>
+          <a:noFill/>
+        </p:spPr>
+        <p:txBody>
+          <a:bodyPr wrap="square" lIns="45720" rIns="45720" tIns="27432" bIns="27432" anchor="t">
+            <a:spAutoFit/>
+          </a:bodyPr>
+          <a:lstStyle/>
+          <a:p>
+            <a:pPr algn="ctr"/>
+            <a:r>
+              <a:rPr sz="1500" b="1">
                 <a:solidFill>
                   <a:srgbClr val="0B315B"/>
                 </a:solidFill>
                 <a:latin typeface="Noto Sans JP"/>
               </a:rPr>
-              <a:t>2 開ける</a:t>
-            </a:r>
-          </a:p>
-        </p:txBody>
-      </p:sp>
-      <p:sp>
-        <p:nvSpPr>
-          <p:cNvPr id="10" name="TextBox 9"/>
-          <p:cNvSpPr txBox="1"/>
-          <p:nvPr/>
-        </p:nvSpPr>
-        <p:spPr>
-          <a:xfrm>
-            <a:off x="4434840" y="2194560"/>
-            <a:ext cx="3291840" cy="1280160"/>
+              <a:t>コードが確かめる</a:t>
+            </a:r>
+          </a:p>
+        </p:txBody>
+      </p:sp>
+      <p:sp>
+        <p:nvSpPr>
+          <p:cNvPr id="13" name="TextBox 12"/>
+          <p:cNvSpPr txBox="1"/>
+          <p:nvPr/>
+        </p:nvSpPr>
+        <p:spPr>
+          <a:xfrm>
+            <a:off x="7040880" y="2194560"/>
+            <a:ext cx="2194560" cy="1005840"/>
           </a:xfrm>
           <a:prstGeom prst="rect">
             <a:avLst/>
@@ -6054,21 +6595,33 @@
                 </a:solidFill>
                 <a:latin typeface="Noto Sans JP"/>
               </a:rPr>
-              <a:t>対象の物だけ、なぞって囲んで開ける</a:t>
-            </a:r>
-          </a:p>
-        </p:txBody>
-      </p:sp>
-      <p:sp>
-        <p:nvSpPr>
-          <p:cNvPr id="11" name="Rounded Rectangle 10"/>
+              <a:t>引用の実在</a:t>
+            </a:r>
+          </a:p>
+          <a:p>
+            <a:pPr algn="ctr"/>
+            <a:r>
+              <a:rPr sz="1350" b="0">
+                <a:solidFill>
+                  <a:srgbClr val="172433"/>
+                </a:solidFill>
+                <a:latin typeface="Noto Sans JP"/>
+              </a:rPr>
+              <a:t>個人情報・人名の検査</a:t>
+            </a:r>
+          </a:p>
+        </p:txBody>
+      </p:sp>
+      <p:sp>
+        <p:nvSpPr>
+          <p:cNvPr id="14" name="Rounded Rectangle 13"/>
           <p:cNvSpPr/>
           <p:nvPr/>
         </p:nvSpPr>
         <p:spPr>
           <a:xfrm>
-            <a:off x="8138160" y="1691640"/>
-            <a:ext cx="3566160" cy="1874519"/>
+            <a:off x="6949440" y="3520440"/>
+            <a:ext cx="2377440" cy="1554480"/>
           </a:xfrm>
           <a:prstGeom prst="roundRect">
             <a:avLst>
@@ -6109,49 +6662,49 @@
       </p:sp>
       <p:sp>
         <p:nvSpPr>
-          <p:cNvPr id="12" name="TextBox 11"/>
-          <p:cNvSpPr txBox="1"/>
-          <p:nvPr/>
-        </p:nvSpPr>
-        <p:spPr>
-          <a:xfrm>
-            <a:off x="8275320" y="1783080"/>
-            <a:ext cx="3291840" cy="384048"/>
-          </a:xfrm>
-          <a:prstGeom prst="rect">
-            <a:avLst/>
-          </a:prstGeom>
-          <a:noFill/>
-        </p:spPr>
-        <p:txBody>
-          <a:bodyPr wrap="square" lIns="45720" rIns="45720" tIns="27432" bIns="27432" anchor="t">
-            <a:spAutoFit/>
-          </a:bodyPr>
-          <a:lstStyle/>
-          <a:p>
-            <a:pPr algn="ctr"/>
-            <a:r>
-              <a:rPr sz="1600" b="1">
+          <p:cNvPr id="15" name="TextBox 14"/>
+          <p:cNvSpPr txBox="1"/>
+          <p:nvPr/>
+        </p:nvSpPr>
+        <p:spPr>
+          <a:xfrm>
+            <a:off x="7040880" y="3639312"/>
+            <a:ext cx="2194560" cy="365760"/>
+          </a:xfrm>
+          <a:prstGeom prst="rect">
+            <a:avLst/>
+          </a:prstGeom>
+          <a:noFill/>
+        </p:spPr>
+        <p:txBody>
+          <a:bodyPr wrap="square" lIns="45720" rIns="45720" tIns="27432" bIns="27432" anchor="t">
+            <a:spAutoFit/>
+          </a:bodyPr>
+          <a:lstStyle/>
+          <a:p>
+            <a:pPr algn="ctr"/>
+            <a:r>
+              <a:rPr sz="1650" b="1">
                 <a:solidFill>
                   <a:srgbClr val="0B315B"/>
                 </a:solidFill>
                 <a:latin typeface="Noto Sans JP"/>
               </a:rPr>
-              <a:t>3 音声分析</a:t>
-            </a:r>
-          </a:p>
-        </p:txBody>
-      </p:sp>
-      <p:sp>
-        <p:nvSpPr>
-          <p:cNvPr id="13" name="TextBox 12"/>
-          <p:cNvSpPr txBox="1"/>
-          <p:nvPr/>
-        </p:nvSpPr>
-        <p:spPr>
-          <a:xfrm>
-            <a:off x="8275320" y="2194560"/>
-            <a:ext cx="3291840" cy="1280160"/>
+              <a:t>AIに渡さない</a:t>
+            </a:r>
+          </a:p>
+        </p:txBody>
+      </p:sp>
+      <p:sp>
+        <p:nvSpPr>
+          <p:cNvPr id="16" name="TextBox 15"/>
+          <p:cNvSpPr txBox="1"/>
+          <p:nvPr/>
+        </p:nvSpPr>
+        <p:spPr>
+          <a:xfrm>
+            <a:off x="7040880" y="4023360"/>
+            <a:ext cx="2194560" cy="1005840"/>
           </a:xfrm>
           <a:prstGeom prst="rect">
             <a:avLst/>
@@ -6172,115 +6725,9 @@
                 </a:solidFill>
                 <a:latin typeface="Noto Sans JP"/>
               </a:rPr>
-              <a:t>電話の声を文字にして、確認する</a:t>
-            </a:r>
-          </a:p>
-        </p:txBody>
-      </p:sp>
-      <p:sp>
-        <p:nvSpPr>
-          <p:cNvPr id="14" name="Rounded Rectangle 13"/>
-          <p:cNvSpPr/>
-          <p:nvPr/>
-        </p:nvSpPr>
-        <p:spPr>
-          <a:xfrm>
-            <a:off x="457200" y="3840480"/>
-            <a:ext cx="3566160" cy="1874519"/>
-          </a:xfrm>
-          <a:prstGeom prst="roundRect">
-            <a:avLst>
-              <a:gd name="adj" fmla="val 6000"/>
-            </a:avLst>
-          </a:prstGeom>
-          <a:solidFill>
-            <a:srgbClr val="EAF5FC"/>
-          </a:solidFill>
-          <a:ln w="12700">
-            <a:solidFill>
-              <a:srgbClr val="36A9E1"/>
-            </a:solidFill>
-          </a:ln>
-          <a:effectLst/>
-        </p:spPr>
-        <p:style>
-          <a:lnRef idx="1">
-            <a:schemeClr val="accent1"/>
-          </a:lnRef>
-          <a:fillRef idx="3">
-            <a:schemeClr val="accent1"/>
-          </a:fillRef>
-          <a:effectRef idx="2">
-            <a:schemeClr val="accent1"/>
-          </a:effectRef>
-          <a:fontRef idx="minor">
-            <a:schemeClr val="lt1"/>
-          </a:fontRef>
-        </p:style>
-        <p:txBody>
-          <a:bodyPr rtlCol="0" anchor="ctr"/>
-          <a:lstStyle/>
-          <a:p>
-            <a:pPr algn="ctr"/>
-          </a:p>
-        </p:txBody>
-      </p:sp>
-      <p:sp>
-        <p:nvSpPr>
-          <p:cNvPr id="15" name="TextBox 14"/>
-          <p:cNvSpPr txBox="1"/>
-          <p:nvPr/>
-        </p:nvSpPr>
-        <p:spPr>
-          <a:xfrm>
-            <a:off x="594360" y="3931920"/>
-            <a:ext cx="3291840" cy="384048"/>
-          </a:xfrm>
-          <a:prstGeom prst="rect">
-            <a:avLst/>
-          </a:prstGeom>
-          <a:noFill/>
-        </p:spPr>
-        <p:txBody>
-          <a:bodyPr wrap="square" lIns="45720" rIns="45720" tIns="27432" bIns="27432" anchor="t">
-            <a:spAutoFit/>
-          </a:bodyPr>
-          <a:lstStyle/>
-          <a:p>
-            <a:pPr algn="ctr"/>
-            <a:r>
-              <a:rPr sz="1600" b="1">
-                <a:solidFill>
-                  <a:srgbClr val="0B315B"/>
-                </a:solidFill>
-                <a:latin typeface="Noto Sans JP"/>
-              </a:rPr>
-              <a:t>4 意味統合</a:t>
-            </a:r>
-          </a:p>
-        </p:txBody>
-      </p:sp>
-      <p:sp>
-        <p:nvSpPr>
-          <p:cNvPr id="16" name="TextBox 15"/>
-          <p:cNvSpPr txBox="1"/>
-          <p:nvPr/>
-        </p:nvSpPr>
-        <p:spPr>
-          <a:xfrm>
-            <a:off x="594360" y="4343400"/>
-            <a:ext cx="3291840" cy="1280160"/>
-          </a:xfrm>
-          <a:prstGeom prst="rect">
-            <a:avLst/>
-          </a:prstGeom>
-          <a:noFill/>
-        </p:spPr>
-        <p:txBody>
-          <a:bodyPr wrap="square" lIns="45720" rIns="45720" tIns="27432" bIns="27432" anchor="t">
-            <a:spAutoFit/>
-          </a:bodyPr>
-          <a:lstStyle/>
+              <a:t>リンク発行・共有拡大</a:t>
+            </a:r>
+          </a:p>
           <a:p>
             <a:pPr algn="ctr"/>
             <a:r>
@@ -6290,7 +6737,7 @@
                 </a:solidFill>
                 <a:latin typeface="Noto Sans JP"/>
               </a:rPr>
-              <a:t>会話と画面を結びつけ、対象に赤丸</a:t>
+              <a:t>削除・送信</a:t>
             </a:r>
           </a:p>
         </p:txBody>
@@ -6303,126 +6750,8 @@
         </p:nvSpPr>
         <p:spPr>
           <a:xfrm>
-            <a:off x="4297680" y="3840480"/>
-            <a:ext cx="3566160" cy="1874519"/>
-          </a:xfrm>
-          <a:prstGeom prst="roundRect">
-            <a:avLst>
-              <a:gd name="adj" fmla="val 6000"/>
-            </a:avLst>
-          </a:prstGeom>
-          <a:solidFill>
-            <a:srgbClr val="F4F8FC"/>
-          </a:solidFill>
-          <a:ln w="12700">
-            <a:solidFill>
-              <a:srgbClr val="D8E4EF"/>
-            </a:solidFill>
-          </a:ln>
-          <a:effectLst/>
-        </p:spPr>
-        <p:style>
-          <a:lnRef idx="1">
-            <a:schemeClr val="accent1"/>
-          </a:lnRef>
-          <a:fillRef idx="3">
-            <a:schemeClr val="accent1"/>
-          </a:fillRef>
-          <a:effectRef idx="2">
-            <a:schemeClr val="accent1"/>
-          </a:effectRef>
-          <a:fontRef idx="minor">
-            <a:schemeClr val="lt1"/>
-          </a:fontRef>
-        </p:style>
-        <p:txBody>
-          <a:bodyPr rtlCol="0" anchor="ctr"/>
-          <a:lstStyle/>
-          <a:p>
-            <a:pPr algn="ctr"/>
-          </a:p>
-        </p:txBody>
-      </p:sp>
-      <p:sp>
-        <p:nvSpPr>
-          <p:cNvPr id="18" name="TextBox 17"/>
-          <p:cNvSpPr txBox="1"/>
-          <p:nvPr/>
-        </p:nvSpPr>
-        <p:spPr>
-          <a:xfrm>
-            <a:off x="4434840" y="3931920"/>
-            <a:ext cx="3291840" cy="384048"/>
-          </a:xfrm>
-          <a:prstGeom prst="rect">
-            <a:avLst/>
-          </a:prstGeom>
-          <a:noFill/>
-        </p:spPr>
-        <p:txBody>
-          <a:bodyPr wrap="square" lIns="45720" rIns="45720" tIns="27432" bIns="27432" anchor="t">
-            <a:spAutoFit/>
-          </a:bodyPr>
-          <a:lstStyle/>
-          <a:p>
-            <a:pPr algn="ctr"/>
-            <a:r>
-              <a:rPr sz="1600" b="1">
-                <a:solidFill>
-                  <a:srgbClr val="0B315B"/>
-                </a:solidFill>
-                <a:latin typeface="Noto Sans JP"/>
-              </a:rPr>
-              <a:t>5 自動作成</a:t>
-            </a:r>
-          </a:p>
-        </p:txBody>
-      </p:sp>
-      <p:sp>
-        <p:nvSpPr>
-          <p:cNvPr id="19" name="TextBox 18"/>
-          <p:cNvSpPr txBox="1"/>
-          <p:nvPr/>
-        </p:nvSpPr>
-        <p:spPr>
-          <a:xfrm>
-            <a:off x="4434840" y="4343400"/>
-            <a:ext cx="3291840" cy="1280160"/>
-          </a:xfrm>
-          <a:prstGeom prst="rect">
-            <a:avLst/>
-          </a:prstGeom>
-          <a:noFill/>
-        </p:spPr>
-        <p:txBody>
-          <a:bodyPr wrap="square" lIns="45720" rIns="45720" tIns="27432" bIns="27432" anchor="t">
-            <a:spAutoFit/>
-          </a:bodyPr>
-          <a:lstStyle/>
-          <a:p>
-            <a:pPr algn="ctr"/>
-            <a:r>
-              <a:rPr sz="1350" b="0">
-                <a:solidFill>
-                  <a:srgbClr val="172433"/>
-                </a:solidFill>
-                <a:latin typeface="Noto Sans JP"/>
-              </a:rPr>
-              <a:t>Excel・Word・メールの下書き</a:t>
-            </a:r>
-          </a:p>
-        </p:txBody>
-      </p:sp>
-      <p:sp>
-        <p:nvSpPr>
-          <p:cNvPr id="20" name="Rounded Rectangle 19"/>
-          <p:cNvSpPr/>
-          <p:nvPr/>
-        </p:nvSpPr>
-        <p:spPr>
-          <a:xfrm>
-            <a:off x="8138160" y="3840480"/>
-            <a:ext cx="3566160" cy="1874519"/>
+            <a:off x="9784080" y="2011680"/>
+            <a:ext cx="1920240" cy="2743200"/>
           </a:xfrm>
           <a:prstGeom prst="roundRect">
             <a:avLst>
@@ -6463,49 +6792,49 @@
       </p:sp>
       <p:sp>
         <p:nvSpPr>
-          <p:cNvPr id="21" name="TextBox 20"/>
-          <p:cNvSpPr txBox="1"/>
-          <p:nvPr/>
-        </p:nvSpPr>
-        <p:spPr>
-          <a:xfrm>
-            <a:off x="8275320" y="3931920"/>
-            <a:ext cx="3291840" cy="384048"/>
-          </a:xfrm>
-          <a:prstGeom prst="rect">
-            <a:avLst/>
-          </a:prstGeom>
-          <a:noFill/>
-        </p:spPr>
-        <p:txBody>
-          <a:bodyPr wrap="square" lIns="45720" rIns="45720" tIns="27432" bIns="27432" anchor="t">
-            <a:spAutoFit/>
-          </a:bodyPr>
-          <a:lstStyle/>
-          <a:p>
-            <a:pPr algn="ctr"/>
-            <a:r>
-              <a:rPr sz="1600" b="1">
-                <a:solidFill>
-                  <a:srgbClr val="0B315B"/>
-                </a:solidFill>
-                <a:latin typeface="Noto Sans JP"/>
-              </a:rPr>
-              <a:t>6 選択肢</a:t>
-            </a:r>
-          </a:p>
-        </p:txBody>
-      </p:sp>
-      <p:sp>
-        <p:nvSpPr>
-          <p:cNvPr id="22" name="TextBox 21"/>
-          <p:cNvSpPr txBox="1"/>
-          <p:nvPr/>
-        </p:nvSpPr>
-        <p:spPr>
-          <a:xfrm>
-            <a:off x="8275320" y="4343400"/>
-            <a:ext cx="3291840" cy="1280160"/>
+          <p:cNvPr id="18" name="TextBox 17"/>
+          <p:cNvSpPr txBox="1"/>
+          <p:nvPr/>
+        </p:nvSpPr>
+        <p:spPr>
+          <a:xfrm>
+            <a:off x="9875520" y="2148840"/>
+            <a:ext cx="1737360" cy="365760"/>
+          </a:xfrm>
+          <a:prstGeom prst="rect">
+            <a:avLst/>
+          </a:prstGeom>
+          <a:noFill/>
+        </p:spPr>
+        <p:txBody>
+          <a:bodyPr wrap="square" lIns="45720" rIns="45720" tIns="27432" bIns="27432" anchor="t">
+            <a:spAutoFit/>
+          </a:bodyPr>
+          <a:lstStyle/>
+          <a:p>
+            <a:pPr algn="ctr"/>
+            <a:r>
+              <a:rPr sz="1650" b="1">
+                <a:solidFill>
+                  <a:srgbClr val="16805B"/>
+                </a:solidFill>
+                <a:latin typeface="Noto Sans JP"/>
+              </a:rPr>
+              <a:t>人が確定</a:t>
+            </a:r>
+          </a:p>
+        </p:txBody>
+      </p:sp>
+      <p:sp>
+        <p:nvSpPr>
+          <p:cNvPr id="19" name="TextBox 18"/>
+          <p:cNvSpPr txBox="1"/>
+          <p:nvPr/>
+        </p:nvSpPr>
+        <p:spPr>
+          <a:xfrm>
+            <a:off x="9875520" y="2560320"/>
+            <a:ext cx="1737360" cy="2103120"/>
           </a:xfrm>
           <a:prstGeom prst="rect">
             <a:avLst/>
@@ -6526,7 +6855,253 @@
                 </a:solidFill>
                 <a:latin typeface="Noto Sans JP"/>
               </a:rPr>
-              <a:t>共有／送信の準備（人が押す）</a:t>
+              <a:t>確認する</a:t>
+            </a:r>
+          </a:p>
+          <a:p>
+            <a:pPr algn="ctr"/>
+            <a:r>
+              <a:rPr sz="1350" b="0">
+                <a:solidFill>
+                  <a:srgbClr val="172433"/>
+                </a:solidFill>
+                <a:latin typeface="Noto Sans JP"/>
+              </a:rPr>
+              <a:t>同意する</a:t>
+            </a:r>
+          </a:p>
+          <a:p>
+            <a:pPr algn="ctr"/>
+            <a:r>
+              <a:rPr sz="1350" b="0">
+                <a:solidFill>
+                  <a:srgbClr val="172433"/>
+                </a:solidFill>
+                <a:latin typeface="Noto Sans JP"/>
+              </a:rPr>
+              <a:t>承認する</a:t>
+            </a:r>
+          </a:p>
+          <a:p>
+            <a:pPr algn="ctr"/>
+            <a:r>
+              <a:rPr sz="1350" b="0">
+                <a:solidFill>
+                  <a:srgbClr val="172433"/>
+                </a:solidFill>
+                <a:latin typeface="Noto Sans JP"/>
+              </a:rPr>
+              <a:t>共有・送信は人が押す</a:t>
+            </a:r>
+          </a:p>
+        </p:txBody>
+      </p:sp>
+      <p:cxnSp>
+        <p:nvCxnSpPr>
+          <p:cNvPr id="20" name="Connector 19"/>
+          <p:cNvCxnSpPr/>
+          <p:nvPr/>
+        </p:nvCxnSpPr>
+        <p:spPr>
+          <a:xfrm>
+            <a:off x="2670048" y="3337560"/>
+            <a:ext cx="731520" cy="0"/>
+          </a:xfrm>
+          <a:prstGeom prst="line">
+            <a:avLst/>
+          </a:prstGeom>
+          <a:ln w="28575">
+            <a:solidFill>
+              <a:srgbClr val="2F80C9"/>
+            </a:solidFill>
+          </a:ln>
+        </p:spPr>
+        <p:style>
+          <a:lnRef idx="2">
+            <a:schemeClr val="accent1"/>
+          </a:lnRef>
+          <a:fillRef idx="0">
+            <a:schemeClr val="accent1"/>
+          </a:fillRef>
+          <a:effectRef idx="1">
+            <a:schemeClr val="accent1"/>
+          </a:effectRef>
+          <a:fontRef idx="minor">
+            <a:schemeClr val="tx1"/>
+          </a:fontRef>
+        </p:style>
+      </p:cxnSp>
+      <p:cxnSp>
+        <p:nvCxnSpPr>
+          <p:cNvPr id="21" name="Connector 20"/>
+          <p:cNvCxnSpPr/>
+          <p:nvPr/>
+        </p:nvCxnSpPr>
+        <p:spPr>
+          <a:xfrm>
+            <a:off x="6199632" y="2468880"/>
+            <a:ext cx="722376" cy="0"/>
+          </a:xfrm>
+          <a:prstGeom prst="line">
+            <a:avLst/>
+          </a:prstGeom>
+          <a:ln w="28575">
+            <a:solidFill>
+              <a:srgbClr val="2F80C9"/>
+            </a:solidFill>
+          </a:ln>
+        </p:spPr>
+        <p:style>
+          <a:lnRef idx="2">
+            <a:schemeClr val="accent1"/>
+          </a:lnRef>
+          <a:fillRef idx="0">
+            <a:schemeClr val="accent1"/>
+          </a:fillRef>
+          <a:effectRef idx="1">
+            <a:schemeClr val="accent1"/>
+          </a:effectRef>
+          <a:fontRef idx="minor">
+            <a:schemeClr val="tx1"/>
+          </a:fontRef>
+        </p:style>
+      </p:cxnSp>
+      <p:cxnSp>
+        <p:nvCxnSpPr>
+          <p:cNvPr id="22" name="Connector 21"/>
+          <p:cNvCxnSpPr/>
+          <p:nvPr/>
+        </p:nvCxnSpPr>
+        <p:spPr>
+          <a:xfrm>
+            <a:off x="6199632" y="4297680"/>
+            <a:ext cx="722376" cy="0"/>
+          </a:xfrm>
+          <a:prstGeom prst="line">
+            <a:avLst/>
+          </a:prstGeom>
+          <a:ln w="28575">
+            <a:solidFill>
+              <a:srgbClr val="2F80C9"/>
+            </a:solidFill>
+          </a:ln>
+        </p:spPr>
+        <p:style>
+          <a:lnRef idx="2">
+            <a:schemeClr val="accent1"/>
+          </a:lnRef>
+          <a:fillRef idx="0">
+            <a:schemeClr val="accent1"/>
+          </a:fillRef>
+          <a:effectRef idx="1">
+            <a:schemeClr val="accent1"/>
+          </a:effectRef>
+          <a:fontRef idx="minor">
+            <a:schemeClr val="tx1"/>
+          </a:fontRef>
+        </p:style>
+      </p:cxnSp>
+      <p:cxnSp>
+        <p:nvCxnSpPr>
+          <p:cNvPr id="23" name="Connector 22"/>
+          <p:cNvCxnSpPr/>
+          <p:nvPr/>
+        </p:nvCxnSpPr>
+        <p:spPr>
+          <a:xfrm>
+            <a:off x="9354312" y="2468880"/>
+            <a:ext cx="402336" cy="0"/>
+          </a:xfrm>
+          <a:prstGeom prst="line">
+            <a:avLst/>
+          </a:prstGeom>
+          <a:ln w="28575">
+            <a:solidFill>
+              <a:srgbClr val="2F80C9"/>
+            </a:solidFill>
+          </a:ln>
+        </p:spPr>
+        <p:style>
+          <a:lnRef idx="2">
+            <a:schemeClr val="accent1"/>
+          </a:lnRef>
+          <a:fillRef idx="0">
+            <a:schemeClr val="accent1"/>
+          </a:fillRef>
+          <a:effectRef idx="1">
+            <a:schemeClr val="accent1"/>
+          </a:effectRef>
+          <a:fontRef idx="minor">
+            <a:schemeClr val="tx1"/>
+          </a:fontRef>
+        </p:style>
+      </p:cxnSp>
+      <p:cxnSp>
+        <p:nvCxnSpPr>
+          <p:cNvPr id="24" name="Connector 23"/>
+          <p:cNvCxnSpPr/>
+          <p:nvPr/>
+        </p:nvCxnSpPr>
+        <p:spPr>
+          <a:xfrm>
+            <a:off x="9354312" y="4297680"/>
+            <a:ext cx="402336" cy="0"/>
+          </a:xfrm>
+          <a:prstGeom prst="line">
+            <a:avLst/>
+          </a:prstGeom>
+          <a:ln w="28575">
+            <a:solidFill>
+              <a:srgbClr val="2F80C9"/>
+            </a:solidFill>
+          </a:ln>
+        </p:spPr>
+        <p:style>
+          <a:lnRef idx="2">
+            <a:schemeClr val="accent1"/>
+          </a:lnRef>
+          <a:fillRef idx="0">
+            <a:schemeClr val="accent1"/>
+          </a:fillRef>
+          <a:effectRef idx="1">
+            <a:schemeClr val="accent1"/>
+          </a:effectRef>
+          <a:fontRef idx="minor">
+            <a:schemeClr val="tx1"/>
+          </a:fontRef>
+        </p:style>
+      </p:cxnSp>
+      <p:sp>
+        <p:nvSpPr>
+          <p:cNvPr id="25" name="TextBox 24"/>
+          <p:cNvSpPr txBox="1"/>
+          <p:nvPr/>
+        </p:nvSpPr>
+        <p:spPr>
+          <a:xfrm>
+            <a:off x="1371600" y="5577840"/>
+            <a:ext cx="9418320" cy="548640"/>
+          </a:xfrm>
+          <a:prstGeom prst="rect">
+            <a:avLst/>
+          </a:prstGeom>
+          <a:noFill/>
+        </p:spPr>
+        <p:txBody>
+          <a:bodyPr wrap="square" lIns="45720" rIns="45720" tIns="27432" bIns="27432" anchor="t">
+            <a:spAutoFit/>
+          </a:bodyPr>
+          <a:lstStyle/>
+          <a:p>
+            <a:pPr algn="ctr"/>
+            <a:r>
+              <a:rPr sz="1400" b="0">
+                <a:solidFill>
+                  <a:srgbClr val="5B6B7D"/>
+                </a:solidFill>
+                <a:latin typeface="Noto Sans JP"/>
+              </a:rPr>
+              <a:t>判断のたびに、選択・理由・裏付け・使ったモデル・原価を、判断ログに残す</a:t>
             </a:r>
           </a:p>
         </p:txBody>
@@ -6579,7 +7154,7 @@
                 </a:solidFill>
                 <a:latin typeface="Noto Sans JP"/>
               </a:rPr>
-              <a:t>通話画面：AIが見るのは、開けた所だけ</a:t>
+              <a:t>現場から連絡が来てからの流れ</a:t>
             </a:r>
           </a:p>
         </p:txBody>
@@ -6614,7 +7189,7 @@
                 </a:solidFill>
                 <a:latin typeface="Noto Sans JP"/>
               </a:rPr>
-              <a:t>はじめ全面をブロックで隠し、なぞって囲んだ所だけを開ける。開けた面積は端末が測る（上限 20%）</a:t>
+              <a:t>電話の声と、共有された画面から、資料とメールの下書きまで</a:t>
             </a:r>
           </a:p>
         </p:txBody>
@@ -6654,40 +7229,370 @@
           </a:p>
         </p:txBody>
       </p:sp>
-      <p:pic>
-        <p:nvPicPr>
-          <p:cNvPr id="5" name="Picture 4" descr="07_vision_filter.png"/>
-          <p:cNvPicPr>
-            <a:picLocks noChangeAspect="1"/>
-          </p:cNvPicPr>
-          <p:nvPr/>
-        </p:nvPicPr>
-        <p:blipFill>
-          <a:blip r:embed="rId2"/>
-          <a:stretch>
-            <a:fillRect/>
-          </a:stretch>
-        </p:blipFill>
-        <p:spPr>
-          <a:xfrm>
-            <a:off x="457200" y="1554480"/>
-            <a:ext cx="6583680" cy="3703320"/>
-          </a:xfrm>
-          <a:prstGeom prst="rect">
-            <a:avLst/>
-          </a:prstGeom>
-        </p:spPr>
-      </p:pic>
-      <p:sp>
-        <p:nvSpPr>
-          <p:cNvPr id="6" name="Rounded Rectangle 5"/>
+      <p:sp>
+        <p:nvSpPr>
+          <p:cNvPr id="5" name="Rounded Rectangle 4"/>
           <p:cNvSpPr/>
           <p:nvPr/>
         </p:nvSpPr>
         <p:spPr>
           <a:xfrm>
-            <a:off x="7315200" y="1645920"/>
-            <a:ext cx="4389120" cy="3840480"/>
+            <a:off x="457200" y="1691640"/>
+            <a:ext cx="3566160" cy="1874519"/>
+          </a:xfrm>
+          <a:prstGeom prst="roundRect">
+            <a:avLst>
+              <a:gd name="adj" fmla="val 6000"/>
+            </a:avLst>
+          </a:prstGeom>
+          <a:solidFill>
+            <a:srgbClr val="F4F8FC"/>
+          </a:solidFill>
+          <a:ln w="12700">
+            <a:solidFill>
+              <a:srgbClr val="D8E4EF"/>
+            </a:solidFill>
+          </a:ln>
+          <a:effectLst/>
+        </p:spPr>
+        <p:style>
+          <a:lnRef idx="1">
+            <a:schemeClr val="accent1"/>
+          </a:lnRef>
+          <a:fillRef idx="3">
+            <a:schemeClr val="accent1"/>
+          </a:fillRef>
+          <a:effectRef idx="2">
+            <a:schemeClr val="accent1"/>
+          </a:effectRef>
+          <a:fontRef idx="minor">
+            <a:schemeClr val="lt1"/>
+          </a:fontRef>
+        </p:style>
+        <p:txBody>
+          <a:bodyPr rtlCol="0" anchor="ctr"/>
+          <a:lstStyle/>
+          <a:p>
+            <a:pPr algn="ctr"/>
+          </a:p>
+        </p:txBody>
+      </p:sp>
+      <p:sp>
+        <p:nvSpPr>
+          <p:cNvPr id="6" name="TextBox 5"/>
+          <p:cNvSpPr txBox="1"/>
+          <p:nvPr/>
+        </p:nvSpPr>
+        <p:spPr>
+          <a:xfrm>
+            <a:off x="594360" y="1783080"/>
+            <a:ext cx="3291840" cy="384048"/>
+          </a:xfrm>
+          <a:prstGeom prst="rect">
+            <a:avLst/>
+          </a:prstGeom>
+          <a:noFill/>
+        </p:spPr>
+        <p:txBody>
+          <a:bodyPr wrap="square" lIns="45720" rIns="45720" tIns="27432" bIns="27432" anchor="t">
+            <a:spAutoFit/>
+          </a:bodyPr>
+          <a:lstStyle/>
+          <a:p>
+            <a:pPr algn="ctr"/>
+            <a:r>
+              <a:rPr sz="1600" b="1">
+                <a:solidFill>
+                  <a:srgbClr val="0B315B"/>
+                </a:solidFill>
+                <a:latin typeface="Noto Sans JP"/>
+              </a:rPr>
+              <a:t>1 共有画面</a:t>
+            </a:r>
+          </a:p>
+        </p:txBody>
+      </p:sp>
+      <p:sp>
+        <p:nvSpPr>
+          <p:cNvPr id="7" name="TextBox 6"/>
+          <p:cNvSpPr txBox="1"/>
+          <p:nvPr/>
+        </p:nvSpPr>
+        <p:spPr>
+          <a:xfrm>
+            <a:off x="594360" y="2194560"/>
+            <a:ext cx="3291840" cy="1280160"/>
+          </a:xfrm>
+          <a:prstGeom prst="rect">
+            <a:avLst/>
+          </a:prstGeom>
+          <a:noFill/>
+        </p:spPr>
+        <p:txBody>
+          <a:bodyPr wrap="square" lIns="45720" rIns="45720" tIns="27432" bIns="27432" anchor="t">
+            <a:spAutoFit/>
+          </a:bodyPr>
+          <a:lstStyle/>
+          <a:p>
+            <a:pPr algn="ctr"/>
+            <a:r>
+              <a:rPr sz="1350" b="0">
+                <a:solidFill>
+                  <a:srgbClr val="172433"/>
+                </a:solidFill>
+                <a:latin typeface="Noto Sans JP"/>
+              </a:rPr>
+              <a:t>現場の画像を共有し、全面を隠す</a:t>
+            </a:r>
+          </a:p>
+        </p:txBody>
+      </p:sp>
+      <p:sp>
+        <p:nvSpPr>
+          <p:cNvPr id="8" name="Rounded Rectangle 7"/>
+          <p:cNvSpPr/>
+          <p:nvPr/>
+        </p:nvSpPr>
+        <p:spPr>
+          <a:xfrm>
+            <a:off x="4297680" y="1691640"/>
+            <a:ext cx="3566160" cy="1874519"/>
+          </a:xfrm>
+          <a:prstGeom prst="roundRect">
+            <a:avLst>
+              <a:gd name="adj" fmla="val 6000"/>
+            </a:avLst>
+          </a:prstGeom>
+          <a:solidFill>
+            <a:srgbClr val="F4F8FC"/>
+          </a:solidFill>
+          <a:ln w="12700">
+            <a:solidFill>
+              <a:srgbClr val="D8E4EF"/>
+            </a:solidFill>
+          </a:ln>
+          <a:effectLst/>
+        </p:spPr>
+        <p:style>
+          <a:lnRef idx="1">
+            <a:schemeClr val="accent1"/>
+          </a:lnRef>
+          <a:fillRef idx="3">
+            <a:schemeClr val="accent1"/>
+          </a:fillRef>
+          <a:effectRef idx="2">
+            <a:schemeClr val="accent1"/>
+          </a:effectRef>
+          <a:fontRef idx="minor">
+            <a:schemeClr val="lt1"/>
+          </a:fontRef>
+        </p:style>
+        <p:txBody>
+          <a:bodyPr rtlCol="0" anchor="ctr"/>
+          <a:lstStyle/>
+          <a:p>
+            <a:pPr algn="ctr"/>
+          </a:p>
+        </p:txBody>
+      </p:sp>
+      <p:sp>
+        <p:nvSpPr>
+          <p:cNvPr id="9" name="TextBox 8"/>
+          <p:cNvSpPr txBox="1"/>
+          <p:nvPr/>
+        </p:nvSpPr>
+        <p:spPr>
+          <a:xfrm>
+            <a:off x="4434840" y="1783080"/>
+            <a:ext cx="3291840" cy="384048"/>
+          </a:xfrm>
+          <a:prstGeom prst="rect">
+            <a:avLst/>
+          </a:prstGeom>
+          <a:noFill/>
+        </p:spPr>
+        <p:txBody>
+          <a:bodyPr wrap="square" lIns="45720" rIns="45720" tIns="27432" bIns="27432" anchor="t">
+            <a:spAutoFit/>
+          </a:bodyPr>
+          <a:lstStyle/>
+          <a:p>
+            <a:pPr algn="ctr"/>
+            <a:r>
+              <a:rPr sz="1600" b="1">
+                <a:solidFill>
+                  <a:srgbClr val="0B315B"/>
+                </a:solidFill>
+                <a:latin typeface="Noto Sans JP"/>
+              </a:rPr>
+              <a:t>2 開ける</a:t>
+            </a:r>
+          </a:p>
+        </p:txBody>
+      </p:sp>
+      <p:sp>
+        <p:nvSpPr>
+          <p:cNvPr id="10" name="TextBox 9"/>
+          <p:cNvSpPr txBox="1"/>
+          <p:nvPr/>
+        </p:nvSpPr>
+        <p:spPr>
+          <a:xfrm>
+            <a:off x="4434840" y="2194560"/>
+            <a:ext cx="3291840" cy="1280160"/>
+          </a:xfrm>
+          <a:prstGeom prst="rect">
+            <a:avLst/>
+          </a:prstGeom>
+          <a:noFill/>
+        </p:spPr>
+        <p:txBody>
+          <a:bodyPr wrap="square" lIns="45720" rIns="45720" tIns="27432" bIns="27432" anchor="t">
+            <a:spAutoFit/>
+          </a:bodyPr>
+          <a:lstStyle/>
+          <a:p>
+            <a:pPr algn="ctr"/>
+            <a:r>
+              <a:rPr sz="1350" b="0">
+                <a:solidFill>
+                  <a:srgbClr val="172433"/>
+                </a:solidFill>
+                <a:latin typeface="Noto Sans JP"/>
+              </a:rPr>
+              <a:t>対象の物だけ、なぞって囲んで開ける</a:t>
+            </a:r>
+          </a:p>
+        </p:txBody>
+      </p:sp>
+      <p:sp>
+        <p:nvSpPr>
+          <p:cNvPr id="11" name="Rounded Rectangle 10"/>
+          <p:cNvSpPr/>
+          <p:nvPr/>
+        </p:nvSpPr>
+        <p:spPr>
+          <a:xfrm>
+            <a:off x="8138160" y="1691640"/>
+            <a:ext cx="3566160" cy="1874519"/>
+          </a:xfrm>
+          <a:prstGeom prst="roundRect">
+            <a:avLst>
+              <a:gd name="adj" fmla="val 6000"/>
+            </a:avLst>
+          </a:prstGeom>
+          <a:solidFill>
+            <a:srgbClr val="F4F8FC"/>
+          </a:solidFill>
+          <a:ln w="12700">
+            <a:solidFill>
+              <a:srgbClr val="D8E4EF"/>
+            </a:solidFill>
+          </a:ln>
+          <a:effectLst/>
+        </p:spPr>
+        <p:style>
+          <a:lnRef idx="1">
+            <a:schemeClr val="accent1"/>
+          </a:lnRef>
+          <a:fillRef idx="3">
+            <a:schemeClr val="accent1"/>
+          </a:fillRef>
+          <a:effectRef idx="2">
+            <a:schemeClr val="accent1"/>
+          </a:effectRef>
+          <a:fontRef idx="minor">
+            <a:schemeClr val="lt1"/>
+          </a:fontRef>
+        </p:style>
+        <p:txBody>
+          <a:bodyPr rtlCol="0" anchor="ctr"/>
+          <a:lstStyle/>
+          <a:p>
+            <a:pPr algn="ctr"/>
+          </a:p>
+        </p:txBody>
+      </p:sp>
+      <p:sp>
+        <p:nvSpPr>
+          <p:cNvPr id="12" name="TextBox 11"/>
+          <p:cNvSpPr txBox="1"/>
+          <p:nvPr/>
+        </p:nvSpPr>
+        <p:spPr>
+          <a:xfrm>
+            <a:off x="8275320" y="1783080"/>
+            <a:ext cx="3291840" cy="384048"/>
+          </a:xfrm>
+          <a:prstGeom prst="rect">
+            <a:avLst/>
+          </a:prstGeom>
+          <a:noFill/>
+        </p:spPr>
+        <p:txBody>
+          <a:bodyPr wrap="square" lIns="45720" rIns="45720" tIns="27432" bIns="27432" anchor="t">
+            <a:spAutoFit/>
+          </a:bodyPr>
+          <a:lstStyle/>
+          <a:p>
+            <a:pPr algn="ctr"/>
+            <a:r>
+              <a:rPr sz="1600" b="1">
+                <a:solidFill>
+                  <a:srgbClr val="0B315B"/>
+                </a:solidFill>
+                <a:latin typeface="Noto Sans JP"/>
+              </a:rPr>
+              <a:t>3 音声分析</a:t>
+            </a:r>
+          </a:p>
+        </p:txBody>
+      </p:sp>
+      <p:sp>
+        <p:nvSpPr>
+          <p:cNvPr id="13" name="TextBox 12"/>
+          <p:cNvSpPr txBox="1"/>
+          <p:nvPr/>
+        </p:nvSpPr>
+        <p:spPr>
+          <a:xfrm>
+            <a:off x="8275320" y="2194560"/>
+            <a:ext cx="3291840" cy="1280160"/>
+          </a:xfrm>
+          <a:prstGeom prst="rect">
+            <a:avLst/>
+          </a:prstGeom>
+          <a:noFill/>
+        </p:spPr>
+        <p:txBody>
+          <a:bodyPr wrap="square" lIns="45720" rIns="45720" tIns="27432" bIns="27432" anchor="t">
+            <a:spAutoFit/>
+          </a:bodyPr>
+          <a:lstStyle/>
+          <a:p>
+            <a:pPr algn="ctr"/>
+            <a:r>
+              <a:rPr sz="1350" b="0">
+                <a:solidFill>
+                  <a:srgbClr val="172433"/>
+                </a:solidFill>
+                <a:latin typeface="Noto Sans JP"/>
+              </a:rPr>
+              <a:t>電話の声を文字にして、確認する</a:t>
+            </a:r>
+          </a:p>
+        </p:txBody>
+      </p:sp>
+      <p:sp>
+        <p:nvSpPr>
+          <p:cNvPr id="14" name="Rounded Rectangle 13"/>
+          <p:cNvSpPr/>
+          <p:nvPr/>
+        </p:nvSpPr>
+        <p:spPr>
+          <a:xfrm>
+            <a:off x="457200" y="3840480"/>
+            <a:ext cx="3566160" cy="1874519"/>
           </a:xfrm>
           <a:prstGeom prst="roundRect">
             <a:avLst>
@@ -6728,141 +7633,306 @@
       </p:sp>
       <p:sp>
         <p:nvSpPr>
-          <p:cNvPr id="7" name="TextBox 6"/>
-          <p:cNvSpPr txBox="1"/>
-          <p:nvPr/>
-        </p:nvSpPr>
-        <p:spPr>
-          <a:xfrm>
-            <a:off x="7452360" y="1783080"/>
-            <a:ext cx="4114800" cy="365760"/>
-          </a:xfrm>
-          <a:prstGeom prst="rect">
-            <a:avLst/>
-          </a:prstGeom>
-          <a:noFill/>
-        </p:spPr>
-        <p:txBody>
-          <a:bodyPr wrap="square" lIns="45720" rIns="45720" tIns="27432" bIns="27432" anchor="t">
-            <a:spAutoFit/>
-          </a:bodyPr>
-          <a:lstStyle/>
-          <a:p>
-            <a:pPr algn="l"/>
-            <a:r>
-              <a:rPr sz="1650" b="1">
+          <p:cNvPr id="15" name="TextBox 14"/>
+          <p:cNvSpPr txBox="1"/>
+          <p:nvPr/>
+        </p:nvSpPr>
+        <p:spPr>
+          <a:xfrm>
+            <a:off x="594360" y="3931920"/>
+            <a:ext cx="3291840" cy="384048"/>
+          </a:xfrm>
+          <a:prstGeom prst="rect">
+            <a:avLst/>
+          </a:prstGeom>
+          <a:noFill/>
+        </p:spPr>
+        <p:txBody>
+          <a:bodyPr wrap="square" lIns="45720" rIns="45720" tIns="27432" bIns="27432" anchor="t">
+            <a:spAutoFit/>
+          </a:bodyPr>
+          <a:lstStyle/>
+          <a:p>
+            <a:pPr algn="ctr"/>
+            <a:r>
+              <a:rPr sz="1600" b="1">
                 <a:solidFill>
                   <a:srgbClr val="0B315B"/>
                 </a:solidFill>
                 <a:latin typeface="Noto Sans JP"/>
               </a:rPr>
-              <a:t>拡張モードの開け方</a:t>
-            </a:r>
-          </a:p>
-        </p:txBody>
-      </p:sp>
-      <p:sp>
-        <p:nvSpPr>
-          <p:cNvPr id="8" name="TextBox 7"/>
-          <p:cNvSpPr txBox="1"/>
-          <p:nvPr/>
-        </p:nvSpPr>
-        <p:spPr>
-          <a:xfrm>
-            <a:off x="7452360" y="2286000"/>
-            <a:ext cx="4114800" cy="3108960"/>
-          </a:xfrm>
-          <a:prstGeom prst="rect">
-            <a:avLst/>
-          </a:prstGeom>
-          <a:noFill/>
-        </p:spPr>
-        <p:txBody>
-          <a:bodyPr wrap="square" lIns="45720" rIns="45720" tIns="27432" bIns="27432" anchor="t">
-            <a:spAutoFit/>
-          </a:bodyPr>
-          <a:lstStyle/>
-          <a:p>
-            <a:pPr algn="l"/>
-            <a:r>
-              <a:rPr sz="1450" b="0">
+              <a:t>4 意味統合</a:t>
+            </a:r>
+          </a:p>
+        </p:txBody>
+      </p:sp>
+      <p:sp>
+        <p:nvSpPr>
+          <p:cNvPr id="16" name="TextBox 15"/>
+          <p:cNvSpPr txBox="1"/>
+          <p:nvPr/>
+        </p:nvSpPr>
+        <p:spPr>
+          <a:xfrm>
+            <a:off x="594360" y="4343400"/>
+            <a:ext cx="3291840" cy="1280160"/>
+          </a:xfrm>
+          <a:prstGeom prst="rect">
+            <a:avLst/>
+          </a:prstGeom>
+          <a:noFill/>
+        </p:spPr>
+        <p:txBody>
+          <a:bodyPr wrap="square" lIns="45720" rIns="45720" tIns="27432" bIns="27432" anchor="t">
+            <a:spAutoFit/>
+          </a:bodyPr>
+          <a:lstStyle/>
+          <a:p>
+            <a:pPr algn="ctr"/>
+            <a:r>
+              <a:rPr sz="1350" b="0">
                 <a:solidFill>
                   <a:srgbClr val="172433"/>
                 </a:solidFill>
                 <a:latin typeface="Noto Sans JP"/>
               </a:rPr>
-              <a:t>四角のドラッグに加えて、指・マウスでなぞって囲める</a:t>
-            </a:r>
-          </a:p>
-          <a:p>
-            <a:pPr algn="l"/>
-            <a:r>
-              <a:rPr sz="1450" b="0">
+              <a:t>会話と画面を結びつけ、対象に赤丸</a:t>
+            </a:r>
+          </a:p>
+        </p:txBody>
+      </p:sp>
+      <p:sp>
+        <p:nvSpPr>
+          <p:cNvPr id="17" name="Rounded Rectangle 16"/>
+          <p:cNvSpPr/>
+          <p:nvPr/>
+        </p:nvSpPr>
+        <p:spPr>
+          <a:xfrm>
+            <a:off x="4297680" y="3840480"/>
+            <a:ext cx="3566160" cy="1874519"/>
+          </a:xfrm>
+          <a:prstGeom prst="roundRect">
+            <a:avLst>
+              <a:gd name="adj" fmla="val 6000"/>
+            </a:avLst>
+          </a:prstGeom>
+          <a:solidFill>
+            <a:srgbClr val="F4F8FC"/>
+          </a:solidFill>
+          <a:ln w="12700">
+            <a:solidFill>
+              <a:srgbClr val="D8E4EF"/>
+            </a:solidFill>
+          </a:ln>
+          <a:effectLst/>
+        </p:spPr>
+        <p:style>
+          <a:lnRef idx="1">
+            <a:schemeClr val="accent1"/>
+          </a:lnRef>
+          <a:fillRef idx="3">
+            <a:schemeClr val="accent1"/>
+          </a:fillRef>
+          <a:effectRef idx="2">
+            <a:schemeClr val="accent1"/>
+          </a:effectRef>
+          <a:fontRef idx="minor">
+            <a:schemeClr val="lt1"/>
+          </a:fontRef>
+        </p:style>
+        <p:txBody>
+          <a:bodyPr rtlCol="0" anchor="ctr"/>
+          <a:lstStyle/>
+          <a:p>
+            <a:pPr algn="ctr"/>
+          </a:p>
+        </p:txBody>
+      </p:sp>
+      <p:sp>
+        <p:nvSpPr>
+          <p:cNvPr id="18" name="TextBox 17"/>
+          <p:cNvSpPr txBox="1"/>
+          <p:nvPr/>
+        </p:nvSpPr>
+        <p:spPr>
+          <a:xfrm>
+            <a:off x="4434840" y="3931920"/>
+            <a:ext cx="3291840" cy="384048"/>
+          </a:xfrm>
+          <a:prstGeom prst="rect">
+            <a:avLst/>
+          </a:prstGeom>
+          <a:noFill/>
+        </p:spPr>
+        <p:txBody>
+          <a:bodyPr wrap="square" lIns="45720" rIns="45720" tIns="27432" bIns="27432" anchor="t">
+            <a:spAutoFit/>
+          </a:bodyPr>
+          <a:lstStyle/>
+          <a:p>
+            <a:pPr algn="ctr"/>
+            <a:r>
+              <a:rPr sz="1600" b="1">
+                <a:solidFill>
+                  <a:srgbClr val="0B315B"/>
+                </a:solidFill>
+                <a:latin typeface="Noto Sans JP"/>
+              </a:rPr>
+              <a:t>5 自動作成</a:t>
+            </a:r>
+          </a:p>
+        </p:txBody>
+      </p:sp>
+      <p:sp>
+        <p:nvSpPr>
+          <p:cNvPr id="19" name="TextBox 18"/>
+          <p:cNvSpPr txBox="1"/>
+          <p:nvPr/>
+        </p:nvSpPr>
+        <p:spPr>
+          <a:xfrm>
+            <a:off x="4434840" y="4343400"/>
+            <a:ext cx="3291840" cy="1280160"/>
+          </a:xfrm>
+          <a:prstGeom prst="rect">
+            <a:avLst/>
+          </a:prstGeom>
+          <a:noFill/>
+        </p:spPr>
+        <p:txBody>
+          <a:bodyPr wrap="square" lIns="45720" rIns="45720" tIns="27432" bIns="27432" anchor="t">
+            <a:spAutoFit/>
+          </a:bodyPr>
+          <a:lstStyle/>
+          <a:p>
+            <a:pPr algn="ctr"/>
+            <a:r>
+              <a:rPr sz="1350" b="0">
                 <a:solidFill>
                   <a:srgbClr val="172433"/>
                 </a:solidFill>
                 <a:latin typeface="Noto Sans JP"/>
               </a:rPr>
-              <a:t>面積は形から端末が測って表示</a:t>
-            </a:r>
-          </a:p>
-          <a:p>
-            <a:pPr algn="l"/>
-            <a:r>
-              <a:rPr sz="1450" b="0">
+              <a:t>Excel・Word・メールの下書き</a:t>
+            </a:r>
+          </a:p>
+        </p:txBody>
+      </p:sp>
+      <p:sp>
+        <p:nvSpPr>
+          <p:cNvPr id="20" name="Rounded Rectangle 19"/>
+          <p:cNvSpPr/>
+          <p:nvPr/>
+        </p:nvSpPr>
+        <p:spPr>
+          <a:xfrm>
+            <a:off x="8138160" y="3840480"/>
+            <a:ext cx="3566160" cy="1874519"/>
+          </a:xfrm>
+          <a:prstGeom prst="roundRect">
+            <a:avLst>
+              <a:gd name="adj" fmla="val 6000"/>
+            </a:avLst>
+          </a:prstGeom>
+          <a:solidFill>
+            <a:srgbClr val="EFF8F3"/>
+          </a:solidFill>
+          <a:ln w="12700">
+            <a:solidFill>
+              <a:srgbClr val="A6D6C3"/>
+            </a:solidFill>
+          </a:ln>
+          <a:effectLst/>
+        </p:spPr>
+        <p:style>
+          <a:lnRef idx="1">
+            <a:schemeClr val="accent1"/>
+          </a:lnRef>
+          <a:fillRef idx="3">
+            <a:schemeClr val="accent1"/>
+          </a:fillRef>
+          <a:effectRef idx="2">
+            <a:schemeClr val="accent1"/>
+          </a:effectRef>
+          <a:fontRef idx="minor">
+            <a:schemeClr val="lt1"/>
+          </a:fontRef>
+        </p:style>
+        <p:txBody>
+          <a:bodyPr rtlCol="0" anchor="ctr"/>
+          <a:lstStyle/>
+          <a:p>
+            <a:pPr algn="ctr"/>
+          </a:p>
+        </p:txBody>
+      </p:sp>
+      <p:sp>
+        <p:nvSpPr>
+          <p:cNvPr id="21" name="TextBox 20"/>
+          <p:cNvSpPr txBox="1"/>
+          <p:nvPr/>
+        </p:nvSpPr>
+        <p:spPr>
+          <a:xfrm>
+            <a:off x="8275320" y="3931920"/>
+            <a:ext cx="3291840" cy="384048"/>
+          </a:xfrm>
+          <a:prstGeom prst="rect">
+            <a:avLst/>
+          </a:prstGeom>
+          <a:noFill/>
+        </p:spPr>
+        <p:txBody>
+          <a:bodyPr wrap="square" lIns="45720" rIns="45720" tIns="27432" bIns="27432" anchor="t">
+            <a:spAutoFit/>
+          </a:bodyPr>
+          <a:lstStyle/>
+          <a:p>
+            <a:pPr algn="ctr"/>
+            <a:r>
+              <a:rPr sz="1600" b="1">
+                <a:solidFill>
+                  <a:srgbClr val="0B315B"/>
+                </a:solidFill>
+                <a:latin typeface="Noto Sans JP"/>
+              </a:rPr>
+              <a:t>6 選択肢</a:t>
+            </a:r>
+          </a:p>
+        </p:txBody>
+      </p:sp>
+      <p:sp>
+        <p:nvSpPr>
+          <p:cNvPr id="22" name="TextBox 21"/>
+          <p:cNvSpPr txBox="1"/>
+          <p:nvPr/>
+        </p:nvSpPr>
+        <p:spPr>
+          <a:xfrm>
+            <a:off x="8275320" y="4343400"/>
+            <a:ext cx="3291840" cy="1280160"/>
+          </a:xfrm>
+          <a:prstGeom prst="rect">
+            <a:avLst/>
+          </a:prstGeom>
+          <a:noFill/>
+        </p:spPr>
+        <p:txBody>
+          <a:bodyPr wrap="square" lIns="45720" rIns="45720" tIns="27432" bIns="27432" anchor="t">
+            <a:spAutoFit/>
+          </a:bodyPr>
+          <a:lstStyle/>
+          <a:p>
+            <a:pPr algn="ctr"/>
+            <a:r>
+              <a:rPr sz="1350" b="0">
                 <a:solidFill>
                   <a:srgbClr val="172433"/>
                 </a:solidFill>
                 <a:latin typeface="Noto Sans JP"/>
               </a:rPr>
-              <a:t>サーバーが画素の見積もりで二重に確かめる</a:t>
-            </a:r>
-          </a:p>
-          <a:p>
-            <a:pPr algn="l"/>
-            <a:r>
-              <a:rPr sz="1450" b="0">
-                <a:solidFill>
-                  <a:srgbClr val="172433"/>
-                </a:solidFill>
-                <a:latin typeface="Noto Sans JP"/>
-              </a:rPr>
-              <a:t>旧来の四角だけの開け方とも切り替えられる</a:t>
-            </a:r>
-          </a:p>
-        </p:txBody>
-      </p:sp>
-      <p:sp>
-        <p:nvSpPr>
-          <p:cNvPr id="9" name="TextBox 8"/>
-          <p:cNvSpPr txBox="1"/>
-          <p:nvPr/>
-        </p:nvSpPr>
-        <p:spPr>
-          <a:xfrm>
-            <a:off x="457200" y="4937760"/>
-            <a:ext cx="6583680" cy="365760"/>
-          </a:xfrm>
-          <a:prstGeom prst="rect">
-            <a:avLst/>
-          </a:prstGeom>
-          <a:noFill/>
-        </p:spPr>
-        <p:txBody>
-          <a:bodyPr wrap="square" lIns="45720" rIns="45720" tIns="27432" bIns="27432" anchor="t">
-            <a:spAutoFit/>
-          </a:bodyPr>
-          <a:lstStyle/>
-          <a:p>
-            <a:pPr algn="ctr"/>
-            <a:r>
-              <a:rPr sz="1250" b="0">
-                <a:solidFill>
-                  <a:srgbClr val="5B6B7D"/>
-                </a:solidFill>
-                <a:latin typeface="Noto Sans JP"/>
-              </a:rPr>
-              <a:t>図は合成のブロック（実際の画面ではありません）</a:t>
+              <a:t>共有／送信の準備（人が押す）</a:t>
             </a:r>
           </a:p>
         </p:txBody>
@@ -6915,7 +7985,7 @@
                 </a:solidFill>
                 <a:latin typeface="Noto Sans JP"/>
               </a:rPr>
-              <a:t>資料とメールを自動作成</a:t>
+              <a:t>通話画面：AIが見るのは、開けた所だけ</a:t>
             </a:r>
           </a:p>
         </p:txBody>
@@ -6950,7 +8020,7 @@
                 </a:solidFill>
                 <a:latin typeface="Noto Sans JP"/>
               </a:rPr>
-              <a:t>表はExcel、説明はWord、メールはGmailの作成画面へ。共有・送信は人が押したときだけ</a:t>
+              <a:t>はじめ全面をブロックで隠し、なぞって囲んだ所だけを開ける。開けた面積は端末が測る（上限 20%）</a:t>
             </a:r>
           </a:p>
         </p:txBody>
@@ -6992,7 +8062,7 @@
       </p:sp>
       <p:pic>
         <p:nvPicPr>
-          <p:cNvPr id="5" name="Picture 4" descr="05_結果_3.png"/>
+          <p:cNvPr id="5" name="Picture 4" descr="07_vision_filter.png"/>
           <p:cNvPicPr>
             <a:picLocks noChangeAspect="1"/>
           </p:cNvPicPr>
@@ -7006,8 +8076,8 @@
         </p:blipFill>
         <p:spPr>
           <a:xfrm>
-            <a:off x="457200" y="1463040"/>
-            <a:ext cx="6035040" cy="6960119"/>
+            <a:off x="457200" y="1554480"/>
+            <a:ext cx="6583680" cy="3703320"/>
           </a:xfrm>
           <a:prstGeom prst="rect">
             <a:avLst/>
@@ -7022,8 +8092,8 @@
         </p:nvSpPr>
         <p:spPr>
           <a:xfrm>
-            <a:off x="6766560" y="1554480"/>
-            <a:ext cx="4937760" cy="4206240"/>
+            <a:off x="7315200" y="1645920"/>
+            <a:ext cx="4389120" cy="3840480"/>
           </a:xfrm>
           <a:prstGeom prst="roundRect">
             <a:avLst>
@@ -7070,8 +8140,8 @@
         </p:nvSpPr>
         <p:spPr>
           <a:xfrm>
-            <a:off x="6903720" y="1691640"/>
-            <a:ext cx="4663440" cy="365760"/>
+            <a:off x="7452360" y="1783080"/>
+            <a:ext cx="4114800" cy="365760"/>
           </a:xfrm>
           <a:prstGeom prst="rect">
             <a:avLst/>
@@ -7092,7 +8162,7 @@
                 </a:solidFill>
                 <a:latin typeface="Noto Sans JP"/>
               </a:rPr>
-              <a:t>次の選択肢</a:t>
+              <a:t>拡張モードの開け方</a:t>
             </a:r>
           </a:p>
         </p:txBody>
@@ -7105,8 +8175,8 @@
         </p:nvSpPr>
         <p:spPr>
           <a:xfrm>
-            <a:off x="6903720" y="2194560"/>
-            <a:ext cx="4663440" cy="3474720"/>
+            <a:off x="7452360" y="2286000"/>
+            <a:ext cx="4114800" cy="3108960"/>
           </a:xfrm>
           <a:prstGeom prst="rect">
             <a:avLst/>
@@ -7121,61 +8191,84 @@
           <a:p>
             <a:pPr algn="l"/>
             <a:r>
-              <a:rPr sz="1400" b="0">
+              <a:rPr sz="1450" b="0">
                 <a:solidFill>
                   <a:srgbClr val="172433"/>
                 </a:solidFill>
                 <a:latin typeface="Noto Sans JP"/>
               </a:rPr>
-              <a:t>共有：オーナーが決めたフォルダへ、表・文書をコピー</a:t>
+              <a:t>四角のドラッグに加えて、指・マウスでなぞって囲める</a:t>
             </a:r>
           </a:p>
           <a:p>
             <a:pPr algn="l"/>
             <a:r>
-              <a:rPr sz="1400" b="0">
+              <a:rPr sz="1450" b="0">
                 <a:solidFill>
                   <a:srgbClr val="172433"/>
                 </a:solidFill>
                 <a:latin typeface="Noto Sans JP"/>
               </a:rPr>
-              <a:t>送信の準備：Gmailの作成画面を開く（自分のGmailを設定すれば宛先に。送るのは人）</a:t>
+              <a:t>面積は形から端末が測って表示</a:t>
             </a:r>
           </a:p>
           <a:p>
             <a:pPr algn="l"/>
             <a:r>
-              <a:rPr sz="1400" b="0">
+              <a:rPr sz="1450" b="0">
                 <a:solidFill>
                   <a:srgbClr val="172433"/>
                 </a:solidFill>
                 <a:latin typeface="Noto Sans JP"/>
               </a:rPr>
-              <a:t>編集：作成した下書きは、開いて直せる</a:t>
+              <a:t>サーバーが画素の見積もりで二重に確かめる</a:t>
             </a:r>
           </a:p>
           <a:p>
             <a:pPr algn="l"/>
             <a:r>
-              <a:rPr sz="1400" b="0">
+              <a:rPr sz="1450" b="0">
                 <a:solidFill>
                   <a:srgbClr val="172433"/>
                 </a:solidFill>
                 <a:latin typeface="Noto Sans JP"/>
               </a:rPr>
-              <a:t>表の形が壊れたら、AIに2〜3通り作り直させ、Excelの複数シートに分ける</a:t>
-            </a:r>
-          </a:p>
-          <a:p>
-            <a:pPr algn="l"/>
-            <a:r>
-              <a:rPr sz="1400" b="0">
-                <a:solidFill>
-                  <a:srgbClr val="172433"/>
-                </a:solidFill>
-                <a:latin typeface="Noto Sans JP"/>
-              </a:rPr>
-              <a:t>AIは、共有も送信もしない</a:t>
+              <a:t>旧来の四角だけの開け方とも切り替えられる</a:t>
+            </a:r>
+          </a:p>
+        </p:txBody>
+      </p:sp>
+      <p:sp>
+        <p:nvSpPr>
+          <p:cNvPr id="9" name="TextBox 8"/>
+          <p:cNvSpPr txBox="1"/>
+          <p:nvPr/>
+        </p:nvSpPr>
+        <p:spPr>
+          <a:xfrm>
+            <a:off x="457200" y="4937760"/>
+            <a:ext cx="6583680" cy="365760"/>
+          </a:xfrm>
+          <a:prstGeom prst="rect">
+            <a:avLst/>
+          </a:prstGeom>
+          <a:noFill/>
+        </p:spPr>
+        <p:txBody>
+          <a:bodyPr wrap="square" lIns="45720" rIns="45720" tIns="27432" bIns="27432" anchor="t">
+            <a:spAutoFit/>
+          </a:bodyPr>
+          <a:lstStyle/>
+          <a:p>
+            <a:pPr algn="ctr"/>
+            <a:r>
+              <a:rPr sz="1250" b="0">
+                <a:solidFill>
+                  <a:srgbClr val="5B6B7D"/>
+                </a:solidFill>
+                <a:latin typeface="Noto Sans JP"/>
+              </a:rPr>
+              <a:t>図は合成のブロック（実際の画面ではありません）</a:t>
             </a:r>
           </a:p>
         </p:txBody>
@@ -7228,7 +8321,7 @@
                 </a:solidFill>
                 <a:latin typeface="Noto Sans JP"/>
               </a:rPr>
-              <a:t>守り方</a:t>
+              <a:t>資料とメールを自動作成</a:t>
             </a:r>
           </a:p>
         </p:txBody>
@@ -7263,7 +8356,7 @@
                 </a:solidFill>
                 <a:latin typeface="Noto Sans JP"/>
               </a:rPr>
-              <a:t>守りはコードで書き、変異テストで外れないことを確認</a:t>
+              <a:t>表はExcel、説明はWord、メールはGmailの作成画面へ。共有・送信は人が押したときだけ</a:t>
             </a:r>
           </a:p>
         </p:txBody>
@@ -7303,16 +8396,88 @@
           </a:p>
         </p:txBody>
       </p:sp>
-      <p:sp>
-        <p:nvSpPr>
-          <p:cNvPr id="5" name="TextBox 4"/>
-          <p:cNvSpPr txBox="1"/>
-          <p:nvPr/>
-        </p:nvSpPr>
-        <p:spPr>
-          <a:xfrm>
-            <a:off x="621792" y="1600200"/>
-            <a:ext cx="5394960" cy="283464"/>
+      <p:pic>
+        <p:nvPicPr>
+          <p:cNvPr id="5" name="Picture 4" descr="13_flow.png"/>
+          <p:cNvPicPr>
+            <a:picLocks noChangeAspect="1"/>
+          </p:cNvPicPr>
+          <p:nvPr/>
+        </p:nvPicPr>
+        <p:blipFill>
+          <a:blip r:embed="rId2"/>
+          <a:stretch>
+            <a:fillRect/>
+          </a:stretch>
+        </p:blipFill>
+        <p:spPr>
+          <a:xfrm>
+            <a:off x="457200" y="1600200"/>
+            <a:ext cx="6126480" cy="3446145"/>
+          </a:xfrm>
+          <a:prstGeom prst="rect">
+            <a:avLst/>
+          </a:prstGeom>
+        </p:spPr>
+      </p:pic>
+      <p:sp>
+        <p:nvSpPr>
+          <p:cNvPr id="6" name="Rounded Rectangle 5"/>
+          <p:cNvSpPr/>
+          <p:nvPr/>
+        </p:nvSpPr>
+        <p:spPr>
+          <a:xfrm>
+            <a:off x="6766560" y="1554480"/>
+            <a:ext cx="4937760" cy="4206240"/>
+          </a:xfrm>
+          <a:prstGeom prst="roundRect">
+            <a:avLst>
+              <a:gd name="adj" fmla="val 6000"/>
+            </a:avLst>
+          </a:prstGeom>
+          <a:solidFill>
+            <a:srgbClr val="EAF5FC"/>
+          </a:solidFill>
+          <a:ln w="12700">
+            <a:solidFill>
+              <a:srgbClr val="36A9E1"/>
+            </a:solidFill>
+          </a:ln>
+          <a:effectLst/>
+        </p:spPr>
+        <p:style>
+          <a:lnRef idx="1">
+            <a:schemeClr val="accent1"/>
+          </a:lnRef>
+          <a:fillRef idx="3">
+            <a:schemeClr val="accent1"/>
+          </a:fillRef>
+          <a:effectRef idx="2">
+            <a:schemeClr val="accent1"/>
+          </a:effectRef>
+          <a:fontRef idx="minor">
+            <a:schemeClr val="lt1"/>
+          </a:fontRef>
+        </p:style>
+        <p:txBody>
+          <a:bodyPr rtlCol="0" anchor="ctr"/>
+          <a:lstStyle/>
+          <a:p>
+            <a:pPr algn="ctr"/>
+          </a:p>
+        </p:txBody>
+      </p:sp>
+      <p:sp>
+        <p:nvSpPr>
+          <p:cNvPr id="7" name="TextBox 6"/>
+          <p:cNvSpPr txBox="1"/>
+          <p:nvPr/>
+        </p:nvSpPr>
+        <p:spPr>
+          <a:xfrm>
+            <a:off x="6903720" y="1691640"/>
+            <a:ext cx="4663440" cy="365760"/>
           </a:xfrm>
           <a:prstGeom prst="rect">
             <a:avLst/>
@@ -7327,27 +8492,27 @@
           <a:p>
             <a:pPr algn="l"/>
             <a:r>
-              <a:rPr sz="1350" b="1">
-                <a:solidFill>
-                  <a:srgbClr val="16805B"/>
-                </a:solidFill>
-                <a:latin typeface="Noto Sans JP"/>
-              </a:rPr>
-              <a:t>画像と音声</a:t>
-            </a:r>
-          </a:p>
-        </p:txBody>
-      </p:sp>
-      <p:sp>
-        <p:nvSpPr>
-          <p:cNvPr id="6" name="TextBox 5"/>
-          <p:cNvSpPr txBox="1"/>
-          <p:nvPr/>
-        </p:nvSpPr>
-        <p:spPr>
-          <a:xfrm>
-            <a:off x="621792" y="2011680"/>
-            <a:ext cx="5394960" cy="3474720"/>
+              <a:rPr sz="1650" b="1">
+                <a:solidFill>
+                  <a:srgbClr val="0B315B"/>
+                </a:solidFill>
+                <a:latin typeface="Noto Sans JP"/>
+              </a:rPr>
+              <a:t>次の選択肢</a:t>
+            </a:r>
+          </a:p>
+        </p:txBody>
+      </p:sp>
+      <p:sp>
+        <p:nvSpPr>
+          <p:cNvPr id="8" name="TextBox 7"/>
+          <p:cNvSpPr txBox="1"/>
+          <p:nvPr/>
+        </p:nvSpPr>
+        <p:spPr>
+          <a:xfrm>
+            <a:off x="6903720" y="2194560"/>
+            <a:ext cx="4663440" cy="3474720"/>
           </a:xfrm>
           <a:prstGeom prst="rect">
             <a:avLst/>
@@ -7362,202 +8527,61 @@
           <a:p>
             <a:pPr algn="l"/>
             <a:r>
-              <a:rPr sz="1450" b="0">
+              <a:rPr sz="1400" b="0">
                 <a:solidFill>
                   <a:srgbClr val="172433"/>
                 </a:solidFill>
                 <a:latin typeface="Noto Sans JP"/>
               </a:rPr>
-              <a:t>写真は端末で隠してから送る。元の画像は、サーバーにもAIにも届かない</a:t>
+              <a:t>共有：オーナーが決めたフォルダへ、表・文書をコピー</a:t>
             </a:r>
           </a:p>
           <a:p>
             <a:pPr algn="l"/>
             <a:r>
-              <a:rPr sz="1450" b="0">
+              <a:rPr sz="1400" b="0">
                 <a:solidFill>
                   <a:srgbClr val="172433"/>
                 </a:solidFill>
                 <a:latin typeface="Noto Sans JP"/>
               </a:rPr>
-              <a:t>通話の画面は、全面を隠し、開けた所だけをAIへ</a:t>
+              <a:t>送信の準備：Gmailの作成画面を開く（自分のGmailを設定すれば宛先に。送るのは人）</a:t>
             </a:r>
           </a:p>
           <a:p>
             <a:pPr algn="l"/>
             <a:r>
-              <a:rPr sz="1450" b="0">
+              <a:rPr sz="1400" b="0">
                 <a:solidFill>
                   <a:srgbClr val="172433"/>
                 </a:solidFill>
                 <a:latin typeface="Noto Sans JP"/>
               </a:rPr>
-              <a:t>開けた面積は端末が測り、サーバーが画素で二重に確かめる</a:t>
+              <a:t>編集：作成した下書きは、開いて直せる</a:t>
             </a:r>
           </a:p>
           <a:p>
             <a:pPr algn="l"/>
             <a:r>
-              <a:rPr sz="1450" b="0">
+              <a:rPr sz="1400" b="0">
                 <a:solidFill>
                   <a:srgbClr val="172433"/>
                 </a:solidFill>
                 <a:latin typeface="Noto Sans JP"/>
               </a:rPr>
-              <a:t>音声は保存しない。文字を確認するまで、画像はAIに渡さない</a:t>
+              <a:t>表の形が壊れたら、AIに2〜3通り作り直させ、Excelの複数シートに分ける</a:t>
             </a:r>
           </a:p>
           <a:p>
             <a:pPr algn="l"/>
             <a:r>
-              <a:rPr sz="1450" b="0">
+              <a:rPr sz="1400" b="0">
                 <a:solidFill>
                   <a:srgbClr val="172433"/>
                 </a:solidFill>
                 <a:latin typeface="Noto Sans JP"/>
               </a:rPr>
-              <a:t>統合分析は、3つの設定とセッションごとの確認が揃ったときだけ</a:t>
-            </a:r>
-          </a:p>
-        </p:txBody>
-      </p:sp>
-      <p:sp>
-        <p:nvSpPr>
-          <p:cNvPr id="7" name="TextBox 6"/>
-          <p:cNvSpPr txBox="1"/>
-          <p:nvPr/>
-        </p:nvSpPr>
-        <p:spPr>
-          <a:xfrm>
-            <a:off x="6400800" y="1600200"/>
-            <a:ext cx="5029200" cy="283464"/>
-          </a:xfrm>
-          <a:prstGeom prst="rect">
-            <a:avLst/>
-          </a:prstGeom>
-          <a:noFill/>
-        </p:spPr>
-        <p:txBody>
-          <a:bodyPr wrap="square" lIns="45720" rIns="45720" tIns="27432" bIns="27432" anchor="t">
-            <a:spAutoFit/>
-          </a:bodyPr>
-          <a:lstStyle/>
-          <a:p>
-            <a:pPr algn="l"/>
-            <a:r>
-              <a:rPr sz="1350" b="1">
-                <a:solidFill>
-                  <a:srgbClr val="16805B"/>
-                </a:solidFill>
-                <a:latin typeface="Noto Sans JP"/>
-              </a:rPr>
-              <a:t>AIの出力</a:t>
-            </a:r>
-          </a:p>
-        </p:txBody>
-      </p:sp>
-      <p:sp>
-        <p:nvSpPr>
-          <p:cNvPr id="8" name="TextBox 7"/>
-          <p:cNvSpPr txBox="1"/>
-          <p:nvPr/>
-        </p:nvSpPr>
-        <p:spPr>
-          <a:xfrm>
-            <a:off x="6400800" y="2011680"/>
-            <a:ext cx="5303520" cy="3474720"/>
-          </a:xfrm>
-          <a:prstGeom prst="rect">
-            <a:avLst/>
-          </a:prstGeom>
-          <a:noFill/>
-        </p:spPr>
-        <p:txBody>
-          <a:bodyPr wrap="square" lIns="45720" rIns="45720" tIns="27432" bIns="27432" anchor="t">
-            <a:spAutoFit/>
-          </a:bodyPr>
-          <a:lstStyle/>
-          <a:p>
-            <a:pPr algn="l"/>
-            <a:r>
-              <a:rPr sz="1450" b="0">
-                <a:solidFill>
-                  <a:srgbClr val="172433"/>
-                </a:solidFill>
-                <a:latin typeface="Noto Sans JP"/>
-              </a:rPr>
-              <a:t>根拠の引用が会話に実在しなければ捨てる</a:t>
-            </a:r>
-          </a:p>
-          <a:p>
-            <a:pPr algn="l"/>
-            <a:r>
-              <a:rPr sz="1450" b="0">
-                <a:solidFill>
-                  <a:srgbClr val="172433"/>
-                </a:solidFill>
-                <a:latin typeface="Noto Sans JP"/>
-              </a:rPr>
-              <a:t>個人情報の語・人名・長い数字列・指示への追従は、コードが捨てる</a:t>
-            </a:r>
-          </a:p>
-          <a:p>
-            <a:pPr algn="l"/>
-            <a:r>
-              <a:rPr sz="1450" b="0">
-                <a:solidFill>
-                  <a:srgbClr val="172433"/>
-                </a:solidFill>
-                <a:latin typeface="Noto Sans JP"/>
-              </a:rPr>
-              <a:t>送信・共有範囲の拡大・削除は、ツールとして渡さない</a:t>
-            </a:r>
-          </a:p>
-          <a:p>
-            <a:pPr algn="l"/>
-            <a:r>
-              <a:rPr sz="1450" b="0">
-                <a:solidFill>
-                  <a:srgbClr val="172433"/>
-                </a:solidFill>
-                <a:latin typeface="Noto Sans JP"/>
-              </a:rPr>
-              <a:t>共有先は、オーナーが決めた1か所のフォルダだけ</a:t>
-            </a:r>
-          </a:p>
-        </p:txBody>
-      </p:sp>
-      <p:sp>
-        <p:nvSpPr>
-          <p:cNvPr id="9" name="TextBox 8"/>
-          <p:cNvSpPr txBox="1"/>
-          <p:nvPr/>
-        </p:nvSpPr>
-        <p:spPr>
-          <a:xfrm>
-            <a:off x="914400" y="5760720"/>
-            <a:ext cx="10332720" cy="457200"/>
-          </a:xfrm>
-          <a:prstGeom prst="rect">
-            <a:avLst/>
-          </a:prstGeom>
-          <a:noFill/>
-        </p:spPr>
-        <p:txBody>
-          <a:bodyPr wrap="square" lIns="45720" rIns="45720" tIns="27432" bIns="27432" anchor="t">
-            <a:spAutoFit/>
-          </a:bodyPr>
-          <a:lstStyle/>
-          <a:p>
-            <a:pPr algn="ctr"/>
-            <a:r>
-              <a:rPr sz="1700" b="1">
-                <a:solidFill>
-                  <a:srgbClr val="0B315B"/>
-                </a:solidFill>
-                <a:latin typeface="Noto Sans JP"/>
-              </a:rPr>
-              <a:t>自動テスト 885 件 ／ 門を外すと失敗する変異 49 か所</a:t>
+              <a:t>AIは、共有も送信もしない</a:t>
             </a:r>
           </a:p>
         </p:txBody>
@@ -7610,7 +8634,7 @@
                 </a:solidFill>
                 <a:latin typeface="Noto Sans JP"/>
               </a:rPr>
-              <a:t>同意の設計：AIの判断を、思いに合わせる</a:t>
+              <a:t>守り方</a:t>
             </a:r>
           </a:p>
         </p:txBody>
@@ -7645,7 +8669,7 @@
                 </a:solidFill>
                 <a:latin typeface="Noto Sans JP"/>
               </a:rPr>
-              <a:t>文字→確認→理解を見せる→同意→承認→下書き（送信はしない）</a:t>
+              <a:t>守りはコードで書き、外れていないかをテストで固定する</a:t>
             </a:r>
           </a:p>
         </p:txBody>
@@ -7687,49 +8711,36 @@
       </p:sp>
       <p:sp>
         <p:nvSpPr>
-          <p:cNvPr id="5" name="Rounded Rectangle 4"/>
-          <p:cNvSpPr/>
-          <p:nvPr/>
-        </p:nvSpPr>
-        <p:spPr>
-          <a:xfrm>
-            <a:off x="502920" y="2011680"/>
-            <a:ext cx="2057400" cy="2011680"/>
-          </a:xfrm>
-          <a:prstGeom prst="roundRect">
-            <a:avLst>
-              <a:gd name="adj" fmla="val 6000"/>
-            </a:avLst>
-          </a:prstGeom>
-          <a:solidFill>
-            <a:srgbClr val="F4F8FC"/>
-          </a:solidFill>
-          <a:ln w="12700">
-            <a:solidFill>
-              <a:srgbClr val="D8E4EF"/>
-            </a:solidFill>
-          </a:ln>
-          <a:effectLst/>
-        </p:spPr>
-        <p:style>
-          <a:lnRef idx="1">
-            <a:schemeClr val="accent1"/>
-          </a:lnRef>
-          <a:fillRef idx="3">
-            <a:schemeClr val="accent1"/>
-          </a:fillRef>
-          <a:effectRef idx="2">
-            <a:schemeClr val="accent1"/>
-          </a:effectRef>
-          <a:fontRef idx="minor">
-            <a:schemeClr val="lt1"/>
-          </a:fontRef>
-        </p:style>
-        <p:txBody>
-          <a:bodyPr rtlCol="0" anchor="ctr"/>
-          <a:lstStyle/>
-          <a:p>
-            <a:pPr algn="ctr"/>
+          <p:cNvPr id="5" name="TextBox 4"/>
+          <p:cNvSpPr txBox="1"/>
+          <p:nvPr/>
+        </p:nvSpPr>
+        <p:spPr>
+          <a:xfrm>
+            <a:off x="621792" y="1600200"/>
+            <a:ext cx="5394960" cy="283464"/>
+          </a:xfrm>
+          <a:prstGeom prst="rect">
+            <a:avLst/>
+          </a:prstGeom>
+          <a:noFill/>
+        </p:spPr>
+        <p:txBody>
+          <a:bodyPr wrap="square" lIns="45720" rIns="45720" tIns="27432" bIns="27432" anchor="t">
+            <a:spAutoFit/>
+          </a:bodyPr>
+          <a:lstStyle/>
+          <a:p>
+            <a:pPr algn="l"/>
+            <a:r>
+              <a:rPr sz="1350" b="1">
+                <a:solidFill>
+                  <a:srgbClr val="16805B"/>
+                </a:solidFill>
+                <a:latin typeface="Noto Sans JP"/>
+              </a:rPr>
+              <a:t>画像と音声</a:t>
+            </a:r>
           </a:p>
         </p:txBody>
       </p:sp>
@@ -7741,711 +8752,218 @@
         </p:nvSpPr>
         <p:spPr>
           <a:xfrm>
-            <a:off x="640080" y="2103120"/>
-            <a:ext cx="1783080" cy="384048"/>
-          </a:xfrm>
-          <a:prstGeom prst="rect">
-            <a:avLst/>
-          </a:prstGeom>
-          <a:noFill/>
-        </p:spPr>
-        <p:txBody>
-          <a:bodyPr wrap="square" lIns="45720" rIns="45720" tIns="27432" bIns="27432" anchor="t">
-            <a:spAutoFit/>
-          </a:bodyPr>
-          <a:lstStyle/>
-          <a:p>
-            <a:pPr algn="ctr"/>
-            <a:r>
-              <a:rPr sz="1600" b="1">
+            <a:off x="621792" y="2011680"/>
+            <a:ext cx="5394960" cy="3474720"/>
+          </a:xfrm>
+          <a:prstGeom prst="rect">
+            <a:avLst/>
+          </a:prstGeom>
+          <a:noFill/>
+        </p:spPr>
+        <p:txBody>
+          <a:bodyPr wrap="square" lIns="45720" rIns="45720" tIns="27432" bIns="27432" anchor="t">
+            <a:spAutoFit/>
+          </a:bodyPr>
+          <a:lstStyle/>
+          <a:p>
+            <a:pPr algn="l"/>
+            <a:r>
+              <a:rPr sz="1450" b="0">
+                <a:solidFill>
+                  <a:srgbClr val="172433"/>
+                </a:solidFill>
+                <a:latin typeface="Noto Sans JP"/>
+              </a:rPr>
+              <a:t>写真は端末で隠してから送る。元の画像は、サーバーにもAIにも届かない</a:t>
+            </a:r>
+          </a:p>
+          <a:p>
+            <a:pPr algn="l"/>
+            <a:r>
+              <a:rPr sz="1450" b="0">
+                <a:solidFill>
+                  <a:srgbClr val="172433"/>
+                </a:solidFill>
+                <a:latin typeface="Noto Sans JP"/>
+              </a:rPr>
+              <a:t>通話の画面は、全面を隠し、開けた所だけをAIへ</a:t>
+            </a:r>
+          </a:p>
+          <a:p>
+            <a:pPr algn="l"/>
+            <a:r>
+              <a:rPr sz="1450" b="0">
+                <a:solidFill>
+                  <a:srgbClr val="172433"/>
+                </a:solidFill>
+                <a:latin typeface="Noto Sans JP"/>
+              </a:rPr>
+              <a:t>開けた面積は端末が測り、サーバーが画素で二重に確かめる</a:t>
+            </a:r>
+          </a:p>
+          <a:p>
+            <a:pPr algn="l"/>
+            <a:r>
+              <a:rPr sz="1450" b="0">
+                <a:solidFill>
+                  <a:srgbClr val="172433"/>
+                </a:solidFill>
+                <a:latin typeface="Noto Sans JP"/>
+              </a:rPr>
+              <a:t>音声は保存しない。文字を確認するまで、画像はAIに渡さない</a:t>
+            </a:r>
+          </a:p>
+          <a:p>
+            <a:pPr algn="l"/>
+            <a:r>
+              <a:rPr sz="1450" b="0">
+                <a:solidFill>
+                  <a:srgbClr val="172433"/>
+                </a:solidFill>
+                <a:latin typeface="Noto Sans JP"/>
+              </a:rPr>
+              <a:t>統合分析は、3つの設定とセッションごとの確認が揃ったときだけ</a:t>
+            </a:r>
+          </a:p>
+        </p:txBody>
+      </p:sp>
+      <p:sp>
+        <p:nvSpPr>
+          <p:cNvPr id="7" name="TextBox 6"/>
+          <p:cNvSpPr txBox="1"/>
+          <p:nvPr/>
+        </p:nvSpPr>
+        <p:spPr>
+          <a:xfrm>
+            <a:off x="6400800" y="1600200"/>
+            <a:ext cx="5029200" cy="283464"/>
+          </a:xfrm>
+          <a:prstGeom prst="rect">
+            <a:avLst/>
+          </a:prstGeom>
+          <a:noFill/>
+        </p:spPr>
+        <p:txBody>
+          <a:bodyPr wrap="square" lIns="45720" rIns="45720" tIns="27432" bIns="27432" anchor="t">
+            <a:spAutoFit/>
+          </a:bodyPr>
+          <a:lstStyle/>
+          <a:p>
+            <a:pPr algn="l"/>
+            <a:r>
+              <a:rPr sz="1350" b="1">
+                <a:solidFill>
+                  <a:srgbClr val="16805B"/>
+                </a:solidFill>
+                <a:latin typeface="Noto Sans JP"/>
+              </a:rPr>
+              <a:t>AIの出力</a:t>
+            </a:r>
+          </a:p>
+        </p:txBody>
+      </p:sp>
+      <p:sp>
+        <p:nvSpPr>
+          <p:cNvPr id="8" name="TextBox 7"/>
+          <p:cNvSpPr txBox="1"/>
+          <p:nvPr/>
+        </p:nvSpPr>
+        <p:spPr>
+          <a:xfrm>
+            <a:off x="6400800" y="2011680"/>
+            <a:ext cx="5303520" cy="3474720"/>
+          </a:xfrm>
+          <a:prstGeom prst="rect">
+            <a:avLst/>
+          </a:prstGeom>
+          <a:noFill/>
+        </p:spPr>
+        <p:txBody>
+          <a:bodyPr wrap="square" lIns="45720" rIns="45720" tIns="27432" bIns="27432" anchor="t">
+            <a:spAutoFit/>
+          </a:bodyPr>
+          <a:lstStyle/>
+          <a:p>
+            <a:pPr algn="l"/>
+            <a:r>
+              <a:rPr sz="1450" b="0">
+                <a:solidFill>
+                  <a:srgbClr val="172433"/>
+                </a:solidFill>
+                <a:latin typeface="Noto Sans JP"/>
+              </a:rPr>
+              <a:t>根拠の引用が会話に実在しなければ捨てる</a:t>
+            </a:r>
+          </a:p>
+          <a:p>
+            <a:pPr algn="l"/>
+            <a:r>
+              <a:rPr sz="1450" b="0">
+                <a:solidFill>
+                  <a:srgbClr val="172433"/>
+                </a:solidFill>
+                <a:latin typeface="Noto Sans JP"/>
+              </a:rPr>
+              <a:t>個人情報の語・人名・長い数字列・指示への追従は、コードが捨てる</a:t>
+            </a:r>
+          </a:p>
+          <a:p>
+            <a:pPr algn="l"/>
+            <a:r>
+              <a:rPr sz="1450" b="0">
+                <a:solidFill>
+                  <a:srgbClr val="172433"/>
+                </a:solidFill>
+                <a:latin typeface="Noto Sans JP"/>
+              </a:rPr>
+              <a:t>送信・共有範囲の拡大・削除は、ツールとして渡さない</a:t>
+            </a:r>
+          </a:p>
+          <a:p>
+            <a:pPr algn="l"/>
+            <a:r>
+              <a:rPr sz="1450" b="0">
+                <a:solidFill>
+                  <a:srgbClr val="172433"/>
+                </a:solidFill>
+                <a:latin typeface="Noto Sans JP"/>
+              </a:rPr>
+              <a:t>共有先は、オーナーが決めた1か所のフォルダだけ</a:t>
+            </a:r>
+          </a:p>
+        </p:txBody>
+      </p:sp>
+      <p:sp>
+        <p:nvSpPr>
+          <p:cNvPr id="9" name="TextBox 8"/>
+          <p:cNvSpPr txBox="1"/>
+          <p:nvPr/>
+        </p:nvSpPr>
+        <p:spPr>
+          <a:xfrm>
+            <a:off x="914400" y="5760720"/>
+            <a:ext cx="10332720" cy="457200"/>
+          </a:xfrm>
+          <a:prstGeom prst="rect">
+            <a:avLst/>
+          </a:prstGeom>
+          <a:noFill/>
+        </p:spPr>
+        <p:txBody>
+          <a:bodyPr wrap="square" lIns="45720" rIns="45720" tIns="27432" bIns="27432" anchor="t">
+            <a:spAutoFit/>
+          </a:bodyPr>
+          <a:lstStyle/>
+          <a:p>
+            <a:pPr algn="ctr"/>
+            <a:r>
+              <a:rPr sz="1700" b="1">
                 <a:solidFill>
                   <a:srgbClr val="0B315B"/>
                 </a:solidFill>
                 <a:latin typeface="Noto Sans JP"/>
               </a:rPr>
-              <a:t>文字を確認</a:t>
-            </a:r>
-          </a:p>
-        </p:txBody>
-      </p:sp>
-      <p:sp>
-        <p:nvSpPr>
-          <p:cNvPr id="7" name="TextBox 6"/>
-          <p:cNvSpPr txBox="1"/>
-          <p:nvPr/>
-        </p:nvSpPr>
-        <p:spPr>
-          <a:xfrm>
-            <a:off x="640080" y="2514600"/>
-            <a:ext cx="1783080" cy="1417320"/>
-          </a:xfrm>
-          <a:prstGeom prst="rect">
-            <a:avLst/>
-          </a:prstGeom>
-          <a:noFill/>
-        </p:spPr>
-        <p:txBody>
-          <a:bodyPr wrap="square" lIns="45720" rIns="45720" tIns="27432" bIns="27432" anchor="t">
-            <a:spAutoFit/>
-          </a:bodyPr>
-          <a:lstStyle/>
-          <a:p>
-            <a:pPr algn="ctr"/>
-            <a:r>
-              <a:rPr sz="1350" b="0">
-                <a:solidFill>
-                  <a:srgbClr val="172433"/>
-                </a:solidFill>
-                <a:latin typeface="Noto Sans JP"/>
-              </a:rPr>
-              <a:t>直す・消す。確認するまでAIに渡さない</a:t>
-            </a:r>
-          </a:p>
-        </p:txBody>
-      </p:sp>
-      <p:cxnSp>
-        <p:nvCxnSpPr>
-          <p:cNvPr id="8" name="Connector 7"/>
-          <p:cNvCxnSpPr/>
-          <p:nvPr/>
-        </p:nvCxnSpPr>
-        <p:spPr>
-          <a:xfrm>
-            <a:off x="2578608" y="3017520"/>
-            <a:ext cx="210312" cy="0"/>
-          </a:xfrm>
-          <a:prstGeom prst="line">
-            <a:avLst/>
-          </a:prstGeom>
-          <a:ln w="28575">
-            <a:solidFill>
-              <a:srgbClr val="2F80C9"/>
-            </a:solidFill>
-          </a:ln>
-        </p:spPr>
-        <p:style>
-          <a:lnRef idx="2">
-            <a:schemeClr val="accent1"/>
-          </a:lnRef>
-          <a:fillRef idx="0">
-            <a:schemeClr val="accent1"/>
-          </a:fillRef>
-          <a:effectRef idx="1">
-            <a:schemeClr val="accent1"/>
-          </a:effectRef>
-          <a:fontRef idx="minor">
-            <a:schemeClr val="tx1"/>
-          </a:fontRef>
-        </p:style>
-      </p:cxnSp>
-      <p:sp>
-        <p:nvSpPr>
-          <p:cNvPr id="9" name="Rounded Rectangle 8"/>
-          <p:cNvSpPr/>
-          <p:nvPr/>
-        </p:nvSpPr>
-        <p:spPr>
-          <a:xfrm>
-            <a:off x="2788920" y="2011680"/>
-            <a:ext cx="2057400" cy="2011680"/>
-          </a:xfrm>
-          <a:prstGeom prst="roundRect">
-            <a:avLst>
-              <a:gd name="adj" fmla="val 6000"/>
-            </a:avLst>
-          </a:prstGeom>
-          <a:solidFill>
-            <a:srgbClr val="EAF5FC"/>
-          </a:solidFill>
-          <a:ln w="12700">
-            <a:solidFill>
-              <a:srgbClr val="36A9E1"/>
-            </a:solidFill>
-          </a:ln>
-          <a:effectLst/>
-        </p:spPr>
-        <p:style>
-          <a:lnRef idx="1">
-            <a:schemeClr val="accent1"/>
-          </a:lnRef>
-          <a:fillRef idx="3">
-            <a:schemeClr val="accent1"/>
-          </a:fillRef>
-          <a:effectRef idx="2">
-            <a:schemeClr val="accent1"/>
-          </a:effectRef>
-          <a:fontRef idx="minor">
-            <a:schemeClr val="lt1"/>
-          </a:fontRef>
-        </p:style>
-        <p:txBody>
-          <a:bodyPr rtlCol="0" anchor="ctr"/>
-          <a:lstStyle/>
-          <a:p>
-            <a:pPr algn="ctr"/>
-          </a:p>
-        </p:txBody>
-      </p:sp>
-      <p:sp>
-        <p:nvSpPr>
-          <p:cNvPr id="10" name="TextBox 9"/>
-          <p:cNvSpPr txBox="1"/>
-          <p:nvPr/>
-        </p:nvSpPr>
-        <p:spPr>
-          <a:xfrm>
-            <a:off x="2926079" y="2103120"/>
-            <a:ext cx="1783080" cy="384048"/>
-          </a:xfrm>
-          <a:prstGeom prst="rect">
-            <a:avLst/>
-          </a:prstGeom>
-          <a:noFill/>
-        </p:spPr>
-        <p:txBody>
-          <a:bodyPr wrap="square" lIns="45720" rIns="45720" tIns="27432" bIns="27432" anchor="t">
-            <a:spAutoFit/>
-          </a:bodyPr>
-          <a:lstStyle/>
-          <a:p>
-            <a:pPr algn="ctr"/>
-            <a:r>
-              <a:rPr sz="1600" b="1">
-                <a:solidFill>
-                  <a:srgbClr val="0B315B"/>
-                </a:solidFill>
-                <a:latin typeface="Noto Sans JP"/>
-              </a:rPr>
-              <a:t>AIが提案</a:t>
-            </a:r>
-          </a:p>
-        </p:txBody>
-      </p:sp>
-      <p:sp>
-        <p:nvSpPr>
-          <p:cNvPr id="11" name="TextBox 10"/>
-          <p:cNvSpPr txBox="1"/>
-          <p:nvPr/>
-        </p:nvSpPr>
-        <p:spPr>
-          <a:xfrm>
-            <a:off x="2926079" y="2514600"/>
-            <a:ext cx="1783080" cy="1417320"/>
-          </a:xfrm>
-          <a:prstGeom prst="rect">
-            <a:avLst/>
-          </a:prstGeom>
-          <a:noFill/>
-        </p:spPr>
-        <p:txBody>
-          <a:bodyPr wrap="square" lIns="45720" rIns="45720" tIns="27432" bIns="27432" anchor="t">
-            <a:spAutoFit/>
-          </a:bodyPr>
-          <a:lstStyle/>
-          <a:p>
-            <a:pPr algn="ctr"/>
-            <a:r>
-              <a:rPr sz="1350" b="0">
-                <a:solidFill>
-                  <a:srgbClr val="172433"/>
-                </a:solidFill>
-                <a:latin typeface="Noto Sans JP"/>
-              </a:rPr>
-              <a:t>「私はこう理解しました」＋会話の引用</a:t>
-            </a:r>
-          </a:p>
-        </p:txBody>
-      </p:sp>
-      <p:cxnSp>
-        <p:nvCxnSpPr>
-          <p:cNvPr id="12" name="Connector 11"/>
-          <p:cNvCxnSpPr/>
-          <p:nvPr/>
-        </p:nvCxnSpPr>
-        <p:spPr>
-          <a:xfrm>
-            <a:off x="4864608" y="3017520"/>
-            <a:ext cx="210312" cy="0"/>
-          </a:xfrm>
-          <a:prstGeom prst="line">
-            <a:avLst/>
-          </a:prstGeom>
-          <a:ln w="28575">
-            <a:solidFill>
-              <a:srgbClr val="2F80C9"/>
-            </a:solidFill>
-          </a:ln>
-        </p:spPr>
-        <p:style>
-          <a:lnRef idx="2">
-            <a:schemeClr val="accent1"/>
-          </a:lnRef>
-          <a:fillRef idx="0">
-            <a:schemeClr val="accent1"/>
-          </a:fillRef>
-          <a:effectRef idx="1">
-            <a:schemeClr val="accent1"/>
-          </a:effectRef>
-          <a:fontRef idx="minor">
-            <a:schemeClr val="tx1"/>
-          </a:fontRef>
-        </p:style>
-      </p:cxnSp>
-      <p:sp>
-        <p:nvSpPr>
-          <p:cNvPr id="13" name="Rounded Rectangle 12"/>
-          <p:cNvSpPr/>
-          <p:nvPr/>
-        </p:nvSpPr>
-        <p:spPr>
-          <a:xfrm>
-            <a:off x="5074920" y="2011680"/>
-            <a:ext cx="2057400" cy="2011680"/>
-          </a:xfrm>
-          <a:prstGeom prst="roundRect">
-            <a:avLst>
-              <a:gd name="adj" fmla="val 6000"/>
-            </a:avLst>
-          </a:prstGeom>
-          <a:solidFill>
-            <a:srgbClr val="F4F8FC"/>
-          </a:solidFill>
-          <a:ln w="12700">
-            <a:solidFill>
-              <a:srgbClr val="D8E4EF"/>
-            </a:solidFill>
-          </a:ln>
-          <a:effectLst/>
-        </p:spPr>
-        <p:style>
-          <a:lnRef idx="1">
-            <a:schemeClr val="accent1"/>
-          </a:lnRef>
-          <a:fillRef idx="3">
-            <a:schemeClr val="accent1"/>
-          </a:fillRef>
-          <a:effectRef idx="2">
-            <a:schemeClr val="accent1"/>
-          </a:effectRef>
-          <a:fontRef idx="minor">
-            <a:schemeClr val="lt1"/>
-          </a:fontRef>
-        </p:style>
-        <p:txBody>
-          <a:bodyPr rtlCol="0" anchor="ctr"/>
-          <a:lstStyle/>
-          <a:p>
-            <a:pPr algn="ctr"/>
-          </a:p>
-        </p:txBody>
-      </p:sp>
-      <p:sp>
-        <p:nvSpPr>
-          <p:cNvPr id="14" name="TextBox 13"/>
-          <p:cNvSpPr txBox="1"/>
-          <p:nvPr/>
-        </p:nvSpPr>
-        <p:spPr>
-          <a:xfrm>
-            <a:off x="5212080" y="2103120"/>
-            <a:ext cx="1783080" cy="384048"/>
-          </a:xfrm>
-          <a:prstGeom prst="rect">
-            <a:avLst/>
-          </a:prstGeom>
-          <a:noFill/>
-        </p:spPr>
-        <p:txBody>
-          <a:bodyPr wrap="square" lIns="45720" rIns="45720" tIns="27432" bIns="27432" anchor="t">
-            <a:spAutoFit/>
-          </a:bodyPr>
-          <a:lstStyle/>
-          <a:p>
-            <a:pPr algn="ctr"/>
-            <a:r>
-              <a:rPr sz="1600" b="1">
-                <a:solidFill>
-                  <a:srgbClr val="0B315B"/>
-                </a:solidFill>
-                <a:latin typeface="Noto Sans JP"/>
-              </a:rPr>
-              <a:t>作り手が応答</a:t>
-            </a:r>
-          </a:p>
-        </p:txBody>
-      </p:sp>
-      <p:sp>
-        <p:nvSpPr>
-          <p:cNvPr id="15" name="TextBox 14"/>
-          <p:cNvSpPr txBox="1"/>
-          <p:nvPr/>
-        </p:nvSpPr>
-        <p:spPr>
-          <a:xfrm>
-            <a:off x="5212080" y="2514600"/>
-            <a:ext cx="1783080" cy="1417320"/>
-          </a:xfrm>
-          <a:prstGeom prst="rect">
-            <a:avLst/>
-          </a:prstGeom>
-          <a:noFill/>
-        </p:spPr>
-        <p:txBody>
-          <a:bodyPr wrap="square" lIns="45720" rIns="45720" tIns="27432" bIns="27432" anchor="t">
-            <a:spAutoFit/>
-          </a:bodyPr>
-          <a:lstStyle/>
-          <a:p>
-            <a:pPr algn="ctr"/>
-            <a:r>
-              <a:rPr sz="1350" b="0">
-                <a:solidFill>
-                  <a:srgbClr val="172433"/>
-                </a:solidFill>
-                <a:latin typeface="Noto Sans JP"/>
-              </a:rPr>
-              <a:t>合っている／一部違う／違う</a:t>
-            </a:r>
-          </a:p>
-        </p:txBody>
-      </p:sp>
-      <p:cxnSp>
-        <p:nvCxnSpPr>
-          <p:cNvPr id="16" name="Connector 15"/>
-          <p:cNvCxnSpPr/>
-          <p:nvPr/>
-        </p:nvCxnSpPr>
-        <p:spPr>
-          <a:xfrm>
-            <a:off x="7150608" y="3017520"/>
-            <a:ext cx="210312" cy="0"/>
-          </a:xfrm>
-          <a:prstGeom prst="line">
-            <a:avLst/>
-          </a:prstGeom>
-          <a:ln w="28575">
-            <a:solidFill>
-              <a:srgbClr val="2F80C9"/>
-            </a:solidFill>
-          </a:ln>
-        </p:spPr>
-        <p:style>
-          <a:lnRef idx="2">
-            <a:schemeClr val="accent1"/>
-          </a:lnRef>
-          <a:fillRef idx="0">
-            <a:schemeClr val="accent1"/>
-          </a:fillRef>
-          <a:effectRef idx="1">
-            <a:schemeClr val="accent1"/>
-          </a:effectRef>
-          <a:fontRef idx="minor">
-            <a:schemeClr val="tx1"/>
-          </a:fontRef>
-        </p:style>
-      </p:cxnSp>
-      <p:sp>
-        <p:nvSpPr>
-          <p:cNvPr id="17" name="Rounded Rectangle 16"/>
-          <p:cNvSpPr/>
-          <p:nvPr/>
-        </p:nvSpPr>
-        <p:spPr>
-          <a:xfrm>
-            <a:off x="7360920" y="2011680"/>
-            <a:ext cx="2057400" cy="2011680"/>
-          </a:xfrm>
-          <a:prstGeom prst="roundRect">
-            <a:avLst>
-              <a:gd name="adj" fmla="val 6000"/>
-            </a:avLst>
-          </a:prstGeom>
-          <a:solidFill>
-            <a:srgbClr val="F4F8FC"/>
-          </a:solidFill>
-          <a:ln w="12700">
-            <a:solidFill>
-              <a:srgbClr val="D8E4EF"/>
-            </a:solidFill>
-          </a:ln>
-          <a:effectLst/>
-        </p:spPr>
-        <p:style>
-          <a:lnRef idx="1">
-            <a:schemeClr val="accent1"/>
-          </a:lnRef>
-          <a:fillRef idx="3">
-            <a:schemeClr val="accent1"/>
-          </a:fillRef>
-          <a:effectRef idx="2">
-            <a:schemeClr val="accent1"/>
-          </a:effectRef>
-          <a:fontRef idx="minor">
-            <a:schemeClr val="lt1"/>
-          </a:fontRef>
-        </p:style>
-        <p:txBody>
-          <a:bodyPr rtlCol="0" anchor="ctr"/>
-          <a:lstStyle/>
-          <a:p>
-            <a:pPr algn="ctr"/>
-          </a:p>
-        </p:txBody>
-      </p:sp>
-      <p:sp>
-        <p:nvSpPr>
-          <p:cNvPr id="18" name="TextBox 17"/>
-          <p:cNvSpPr txBox="1"/>
-          <p:nvPr/>
-        </p:nvSpPr>
-        <p:spPr>
-          <a:xfrm>
-            <a:off x="7498080" y="2103120"/>
-            <a:ext cx="1783080" cy="384048"/>
-          </a:xfrm>
-          <a:prstGeom prst="rect">
-            <a:avLst/>
-          </a:prstGeom>
-          <a:noFill/>
-        </p:spPr>
-        <p:txBody>
-          <a:bodyPr wrap="square" lIns="45720" rIns="45720" tIns="27432" bIns="27432" anchor="t">
-            <a:spAutoFit/>
-          </a:bodyPr>
-          <a:lstStyle/>
-          <a:p>
-            <a:pPr algn="ctr"/>
-            <a:r>
-              <a:rPr sz="1600" b="1">
-                <a:solidFill>
-                  <a:srgbClr val="0B315B"/>
-                </a:solidFill>
-                <a:latin typeface="Noto Sans JP"/>
-              </a:rPr>
-              <a:t>直して再提案</a:t>
-            </a:r>
-          </a:p>
-        </p:txBody>
-      </p:sp>
-      <p:sp>
-        <p:nvSpPr>
-          <p:cNvPr id="19" name="TextBox 18"/>
-          <p:cNvSpPr txBox="1"/>
-          <p:nvPr/>
-        </p:nvSpPr>
-        <p:spPr>
-          <a:xfrm>
-            <a:off x="7498080" y="2514600"/>
-            <a:ext cx="1783080" cy="1417320"/>
-          </a:xfrm>
-          <a:prstGeom prst="rect">
-            <a:avLst/>
-          </a:prstGeom>
-          <a:noFill/>
-        </p:spPr>
-        <p:txBody>
-          <a:bodyPr wrap="square" lIns="45720" rIns="45720" tIns="27432" bIns="27432" anchor="t">
-            <a:spAutoFit/>
-          </a:bodyPr>
-          <a:lstStyle/>
-          <a:p>
-            <a:pPr algn="ctr"/>
-            <a:r>
-              <a:rPr sz="1350" b="0">
-                <a:solidFill>
-                  <a:srgbClr val="172433"/>
-                </a:solidFill>
-                <a:latin typeface="Noto Sans JP"/>
-              </a:rPr>
-              <a:t>2回続けて違えば、AIは止まる</a:t>
-            </a:r>
-          </a:p>
-        </p:txBody>
-      </p:sp>
-      <p:cxnSp>
-        <p:nvCxnSpPr>
-          <p:cNvPr id="20" name="Connector 19"/>
-          <p:cNvCxnSpPr/>
-          <p:nvPr/>
-        </p:nvCxnSpPr>
-        <p:spPr>
-          <a:xfrm>
-            <a:off x="9436608" y="3017520"/>
-            <a:ext cx="210312" cy="0"/>
-          </a:xfrm>
-          <a:prstGeom prst="line">
-            <a:avLst/>
-          </a:prstGeom>
-          <a:ln w="28575">
-            <a:solidFill>
-              <a:srgbClr val="2F80C9"/>
-            </a:solidFill>
-          </a:ln>
-        </p:spPr>
-        <p:style>
-          <a:lnRef idx="2">
-            <a:schemeClr val="accent1"/>
-          </a:lnRef>
-          <a:fillRef idx="0">
-            <a:schemeClr val="accent1"/>
-          </a:fillRef>
-          <a:effectRef idx="1">
-            <a:schemeClr val="accent1"/>
-          </a:effectRef>
-          <a:fontRef idx="minor">
-            <a:schemeClr val="tx1"/>
-          </a:fontRef>
-        </p:style>
-      </p:cxnSp>
-      <p:sp>
-        <p:nvSpPr>
-          <p:cNvPr id="21" name="Rounded Rectangle 20"/>
-          <p:cNvSpPr/>
-          <p:nvPr/>
-        </p:nvSpPr>
-        <p:spPr>
-          <a:xfrm>
-            <a:off x="9646920" y="2011680"/>
-            <a:ext cx="2057400" cy="2011680"/>
-          </a:xfrm>
-          <a:prstGeom prst="roundRect">
-            <a:avLst>
-              <a:gd name="adj" fmla="val 6000"/>
-            </a:avLst>
-          </a:prstGeom>
-          <a:solidFill>
-            <a:srgbClr val="EFF8F3"/>
-          </a:solidFill>
-          <a:ln w="12700">
-            <a:solidFill>
-              <a:srgbClr val="A6D6C3"/>
-            </a:solidFill>
-          </a:ln>
-          <a:effectLst/>
-        </p:spPr>
-        <p:style>
-          <a:lnRef idx="1">
-            <a:schemeClr val="accent1"/>
-          </a:lnRef>
-          <a:fillRef idx="3">
-            <a:schemeClr val="accent1"/>
-          </a:fillRef>
-          <a:effectRef idx="2">
-            <a:schemeClr val="accent1"/>
-          </a:effectRef>
-          <a:fontRef idx="minor">
-            <a:schemeClr val="lt1"/>
-          </a:fontRef>
-        </p:style>
-        <p:txBody>
-          <a:bodyPr rtlCol="0" anchor="ctr"/>
-          <a:lstStyle/>
-          <a:p>
-            <a:pPr algn="ctr"/>
-          </a:p>
-        </p:txBody>
-      </p:sp>
-      <p:sp>
-        <p:nvSpPr>
-          <p:cNvPr id="22" name="TextBox 21"/>
-          <p:cNvSpPr txBox="1"/>
-          <p:nvPr/>
-        </p:nvSpPr>
-        <p:spPr>
-          <a:xfrm>
-            <a:off x="9784080" y="2103120"/>
-            <a:ext cx="1783080" cy="384048"/>
-          </a:xfrm>
-          <a:prstGeom prst="rect">
-            <a:avLst/>
-          </a:prstGeom>
-          <a:noFill/>
-        </p:spPr>
-        <p:txBody>
-          <a:bodyPr wrap="square" lIns="45720" rIns="45720" tIns="27432" bIns="27432" anchor="t">
-            <a:spAutoFit/>
-          </a:bodyPr>
-          <a:lstStyle/>
-          <a:p>
-            <a:pPr algn="ctr"/>
-            <a:r>
-              <a:rPr sz="1600" b="1">
-                <a:solidFill>
-                  <a:srgbClr val="0B315B"/>
-                </a:solidFill>
-                <a:latin typeface="Noto Sans JP"/>
-              </a:rPr>
-              <a:t>承認して下書き</a:t>
-            </a:r>
-          </a:p>
-        </p:txBody>
-      </p:sp>
-      <p:sp>
-        <p:nvSpPr>
-          <p:cNvPr id="23" name="TextBox 22"/>
-          <p:cNvSpPr txBox="1"/>
-          <p:nvPr/>
-        </p:nvSpPr>
-        <p:spPr>
-          <a:xfrm>
-            <a:off x="9784080" y="2514600"/>
-            <a:ext cx="1783080" cy="1417320"/>
-          </a:xfrm>
-          <a:prstGeom prst="rect">
-            <a:avLst/>
-          </a:prstGeom>
-          <a:noFill/>
-        </p:spPr>
-        <p:txBody>
-          <a:bodyPr wrap="square" lIns="45720" rIns="45720" tIns="27432" bIns="27432" anchor="t">
-            <a:spAutoFit/>
-          </a:bodyPr>
-          <a:lstStyle/>
-          <a:p>
-            <a:pPr algn="ctr"/>
-            <a:r>
-              <a:rPr sz="1350" b="0">
-                <a:solidFill>
-                  <a:srgbClr val="172433"/>
-                </a:solidFill>
-                <a:latin typeface="Noto Sans JP"/>
-              </a:rPr>
-              <a:t>通知案・点検日・入力欄・資料</a:t>
-            </a:r>
-          </a:p>
-        </p:txBody>
-      </p:sp>
-      <p:sp>
-        <p:nvSpPr>
-          <p:cNvPr id="24" name="TextBox 23"/>
-          <p:cNvSpPr txBox="1"/>
-          <p:nvPr/>
-        </p:nvSpPr>
-        <p:spPr>
-          <a:xfrm>
-            <a:off x="731520" y="4572000"/>
-            <a:ext cx="10698480" cy="822960"/>
-          </a:xfrm>
-          <a:prstGeom prst="rect">
-            <a:avLst/>
-          </a:prstGeom>
-          <a:noFill/>
-        </p:spPr>
-        <p:txBody>
-          <a:bodyPr wrap="square" lIns="45720" rIns="45720" tIns="27432" bIns="27432" anchor="t">
-            <a:spAutoFit/>
-          </a:bodyPr>
-          <a:lstStyle/>
-          <a:p>
-            <a:pPr algn="ctr"/>
-            <a:r>
-              <a:rPr sz="1600" b="1">
-                <a:solidFill>
-                  <a:srgbClr val="0B315B"/>
-                </a:solidFill>
-                <a:latin typeface="Noto Sans JP"/>
-              </a:rPr>
-              <a:t>「違う」は記録して、同意率として測る。判断が思いと合っているかの物差しにする</a:t>
+              <a:t>自動テスト 885 件 ／ 門を外すと失敗する変異 49 か所</a:t>
             </a:r>
           </a:p>
         </p:txBody>
@@ -8498,7 +9016,7 @@
                 </a:solidFill>
                 <a:latin typeface="Noto Sans JP"/>
               </a:rPr>
-              <a:t>測ってから決めた</a:t>
+              <a:t>同意の設計：AIの判断を、思いに合わせる</a:t>
             </a:r>
           </a:p>
         </p:txBody>
@@ -8533,7 +9051,7 @@
                 </a:solidFill>
                 <a:latin typeface="Noto Sans JP"/>
               </a:rPr>
-              <a:t>モデルも、経路も、しきい値も、実測で選ぶ</a:t>
+              <a:t>文字→確認→理解を見せる→同意→承認→下書き（送信はしない）</a:t>
             </a:r>
           </a:p>
         </p:txBody>
@@ -8575,36 +9093,49 @@
       </p:sp>
       <p:sp>
         <p:nvSpPr>
-          <p:cNvPr id="5" name="TextBox 4"/>
-          <p:cNvSpPr txBox="1"/>
-          <p:nvPr/>
-        </p:nvSpPr>
-        <p:spPr>
-          <a:xfrm>
-            <a:off x="566928" y="1691640"/>
-            <a:ext cx="2478024" cy="685800"/>
-          </a:xfrm>
-          <a:prstGeom prst="rect">
-            <a:avLst/>
-          </a:prstGeom>
-          <a:noFill/>
-        </p:spPr>
-        <p:txBody>
-          <a:bodyPr wrap="square" lIns="45720" rIns="45720" tIns="27432" bIns="27432" anchor="t">
-            <a:spAutoFit/>
-          </a:bodyPr>
-          <a:lstStyle/>
-          <a:p>
-            <a:pPr algn="ctr"/>
-            <a:r>
-              <a:rPr sz="3400" b="1">
-                <a:solidFill>
-                  <a:srgbClr val="16805B"/>
-                </a:solidFill>
-                <a:latin typeface="Noto Sans JP"/>
-              </a:rPr>
-              <a:t>6/6</a:t>
-            </a:r>
+          <p:cNvPr id="5" name="Rounded Rectangle 4"/>
+          <p:cNvSpPr/>
+          <p:nvPr/>
+        </p:nvSpPr>
+        <p:spPr>
+          <a:xfrm>
+            <a:off x="502920" y="2011680"/>
+            <a:ext cx="2057400" cy="2011680"/>
+          </a:xfrm>
+          <a:prstGeom prst="roundRect">
+            <a:avLst>
+              <a:gd name="adj" fmla="val 6000"/>
+            </a:avLst>
+          </a:prstGeom>
+          <a:solidFill>
+            <a:srgbClr val="F4F8FC"/>
+          </a:solidFill>
+          <a:ln w="12700">
+            <a:solidFill>
+              <a:srgbClr val="D8E4EF"/>
+            </a:solidFill>
+          </a:ln>
+          <a:effectLst/>
+        </p:spPr>
+        <p:style>
+          <a:lnRef idx="1">
+            <a:schemeClr val="accent1"/>
+          </a:lnRef>
+          <a:fillRef idx="3">
+            <a:schemeClr val="accent1"/>
+          </a:fillRef>
+          <a:effectRef idx="2">
+            <a:schemeClr val="accent1"/>
+          </a:effectRef>
+          <a:fontRef idx="minor">
+            <a:schemeClr val="lt1"/>
+          </a:fontRef>
+        </p:style>
+        <p:txBody>
+          <a:bodyPr rtlCol="0" anchor="ctr"/>
+          <a:lstStyle/>
+          <a:p>
+            <a:pPr algn="ctr"/>
           </a:p>
         </p:txBody>
       </p:sp>
@@ -8616,8 +9147,43 @@
         </p:nvSpPr>
         <p:spPr>
           <a:xfrm>
-            <a:off x="566928" y="2423160"/>
-            <a:ext cx="2478024" cy="457200"/>
+            <a:off x="640080" y="2103120"/>
+            <a:ext cx="1783080" cy="384048"/>
+          </a:xfrm>
+          <a:prstGeom prst="rect">
+            <a:avLst/>
+          </a:prstGeom>
+          <a:noFill/>
+        </p:spPr>
+        <p:txBody>
+          <a:bodyPr wrap="square" lIns="45720" rIns="45720" tIns="27432" bIns="27432" anchor="t">
+            <a:spAutoFit/>
+          </a:bodyPr>
+          <a:lstStyle/>
+          <a:p>
+            <a:pPr algn="ctr"/>
+            <a:r>
+              <a:rPr sz="1600" b="1">
+                <a:solidFill>
+                  <a:srgbClr val="0B315B"/>
+                </a:solidFill>
+                <a:latin typeface="Noto Sans JP"/>
+              </a:rPr>
+              <a:t>文字を確認</a:t>
+            </a:r>
+          </a:p>
+        </p:txBody>
+      </p:sp>
+      <p:sp>
+        <p:nvSpPr>
+          <p:cNvPr id="7" name="TextBox 6"/>
+          <p:cNvSpPr txBox="1"/>
+          <p:nvPr/>
+        </p:nvSpPr>
+        <p:spPr>
+          <a:xfrm>
+            <a:off x="640080" y="2514600"/>
+            <a:ext cx="1783080" cy="1417320"/>
           </a:xfrm>
           <a:prstGeom prst="rect">
             <a:avLst/>
@@ -8634,60 +9200,143 @@
             <a:r>
               <a:rPr sz="1350" b="0">
                 <a:solidFill>
-                  <a:srgbClr val="5B6B7D"/>
-                </a:solidFill>
-                <a:latin typeface="Noto Sans JP"/>
-              </a:rPr>
-              <a:t>統合分析の完了（直し後）</a:t>
-            </a:r>
-          </a:p>
-        </p:txBody>
-      </p:sp>
-      <p:sp>
-        <p:nvSpPr>
-          <p:cNvPr id="7" name="TextBox 6"/>
-          <p:cNvSpPr txBox="1"/>
-          <p:nvPr/>
-        </p:nvSpPr>
-        <p:spPr>
-          <a:xfrm>
-            <a:off x="3374136" y="1691640"/>
-            <a:ext cx="2478024" cy="685800"/>
-          </a:xfrm>
-          <a:prstGeom prst="rect">
-            <a:avLst/>
-          </a:prstGeom>
-          <a:noFill/>
-        </p:spPr>
-        <p:txBody>
-          <a:bodyPr wrap="square" lIns="45720" rIns="45720" tIns="27432" bIns="27432" anchor="t">
-            <a:spAutoFit/>
-          </a:bodyPr>
-          <a:lstStyle/>
-          <a:p>
-            <a:pPr algn="ctr"/>
-            <a:r>
-              <a:rPr sz="3400" b="1">
-                <a:solidFill>
-                  <a:srgbClr val="16805B"/>
-                </a:solidFill>
-                <a:latin typeface="Noto Sans JP"/>
-              </a:rPr>
-              <a:t>$0.055</a:t>
-            </a:r>
-          </a:p>
-        </p:txBody>
-      </p:sp>
-      <p:sp>
-        <p:nvSpPr>
-          <p:cNvPr id="8" name="TextBox 7"/>
-          <p:cNvSpPr txBox="1"/>
-          <p:nvPr/>
-        </p:nvSpPr>
-        <p:spPr>
-          <a:xfrm>
-            <a:off x="3374136" y="2423160"/>
-            <a:ext cx="2478024" cy="457200"/>
+                  <a:srgbClr val="172433"/>
+                </a:solidFill>
+                <a:latin typeface="Noto Sans JP"/>
+              </a:rPr>
+              <a:t>直す・消す。確認するまでAIに渡さない</a:t>
+            </a:r>
+          </a:p>
+        </p:txBody>
+      </p:sp>
+      <p:cxnSp>
+        <p:nvCxnSpPr>
+          <p:cNvPr id="8" name="Connector 7"/>
+          <p:cNvCxnSpPr/>
+          <p:nvPr/>
+        </p:nvCxnSpPr>
+        <p:spPr>
+          <a:xfrm>
+            <a:off x="2578608" y="3017520"/>
+            <a:ext cx="210312" cy="0"/>
+          </a:xfrm>
+          <a:prstGeom prst="line">
+            <a:avLst/>
+          </a:prstGeom>
+          <a:ln w="28575">
+            <a:solidFill>
+              <a:srgbClr val="2F80C9"/>
+            </a:solidFill>
+          </a:ln>
+        </p:spPr>
+        <p:style>
+          <a:lnRef idx="2">
+            <a:schemeClr val="accent1"/>
+          </a:lnRef>
+          <a:fillRef idx="0">
+            <a:schemeClr val="accent1"/>
+          </a:fillRef>
+          <a:effectRef idx="1">
+            <a:schemeClr val="accent1"/>
+          </a:effectRef>
+          <a:fontRef idx="minor">
+            <a:schemeClr val="tx1"/>
+          </a:fontRef>
+        </p:style>
+      </p:cxnSp>
+      <p:sp>
+        <p:nvSpPr>
+          <p:cNvPr id="9" name="Rounded Rectangle 8"/>
+          <p:cNvSpPr/>
+          <p:nvPr/>
+        </p:nvSpPr>
+        <p:spPr>
+          <a:xfrm>
+            <a:off x="2788920" y="2011680"/>
+            <a:ext cx="2057400" cy="2011680"/>
+          </a:xfrm>
+          <a:prstGeom prst="roundRect">
+            <a:avLst>
+              <a:gd name="adj" fmla="val 6000"/>
+            </a:avLst>
+          </a:prstGeom>
+          <a:solidFill>
+            <a:srgbClr val="EAF5FC"/>
+          </a:solidFill>
+          <a:ln w="12700">
+            <a:solidFill>
+              <a:srgbClr val="36A9E1"/>
+            </a:solidFill>
+          </a:ln>
+          <a:effectLst/>
+        </p:spPr>
+        <p:style>
+          <a:lnRef idx="1">
+            <a:schemeClr val="accent1"/>
+          </a:lnRef>
+          <a:fillRef idx="3">
+            <a:schemeClr val="accent1"/>
+          </a:fillRef>
+          <a:effectRef idx="2">
+            <a:schemeClr val="accent1"/>
+          </a:effectRef>
+          <a:fontRef idx="minor">
+            <a:schemeClr val="lt1"/>
+          </a:fontRef>
+        </p:style>
+        <p:txBody>
+          <a:bodyPr rtlCol="0" anchor="ctr"/>
+          <a:lstStyle/>
+          <a:p>
+            <a:pPr algn="ctr"/>
+          </a:p>
+        </p:txBody>
+      </p:sp>
+      <p:sp>
+        <p:nvSpPr>
+          <p:cNvPr id="10" name="TextBox 9"/>
+          <p:cNvSpPr txBox="1"/>
+          <p:nvPr/>
+        </p:nvSpPr>
+        <p:spPr>
+          <a:xfrm>
+            <a:off x="2926079" y="2103120"/>
+            <a:ext cx="1783080" cy="384048"/>
+          </a:xfrm>
+          <a:prstGeom prst="rect">
+            <a:avLst/>
+          </a:prstGeom>
+          <a:noFill/>
+        </p:spPr>
+        <p:txBody>
+          <a:bodyPr wrap="square" lIns="45720" rIns="45720" tIns="27432" bIns="27432" anchor="t">
+            <a:spAutoFit/>
+          </a:bodyPr>
+          <a:lstStyle/>
+          <a:p>
+            <a:pPr algn="ctr"/>
+            <a:r>
+              <a:rPr sz="1600" b="1">
+                <a:solidFill>
+                  <a:srgbClr val="0B315B"/>
+                </a:solidFill>
+                <a:latin typeface="Noto Sans JP"/>
+              </a:rPr>
+              <a:t>AIが提案</a:t>
+            </a:r>
+          </a:p>
+        </p:txBody>
+      </p:sp>
+      <p:sp>
+        <p:nvSpPr>
+          <p:cNvPr id="11" name="TextBox 10"/>
+          <p:cNvSpPr txBox="1"/>
+          <p:nvPr/>
+        </p:nvSpPr>
+        <p:spPr>
+          <a:xfrm>
+            <a:off x="2926079" y="2514600"/>
+            <a:ext cx="1783080" cy="1417320"/>
           </a:xfrm>
           <a:prstGeom prst="rect">
             <a:avLst/>
@@ -8704,60 +9353,143 @@
             <a:r>
               <a:rPr sz="1350" b="0">
                 <a:solidFill>
-                  <a:srgbClr val="5B6B7D"/>
-                </a:solidFill>
-                <a:latin typeface="Noto Sans JP"/>
-              </a:rPr>
-              <a:t>統合分析 1 回</a:t>
-            </a:r>
-          </a:p>
-        </p:txBody>
-      </p:sp>
-      <p:sp>
-        <p:nvSpPr>
-          <p:cNvPr id="9" name="TextBox 8"/>
-          <p:cNvSpPr txBox="1"/>
-          <p:nvPr/>
-        </p:nvSpPr>
-        <p:spPr>
-          <a:xfrm>
-            <a:off x="6181344" y="1691640"/>
-            <a:ext cx="2478024" cy="685800"/>
-          </a:xfrm>
-          <a:prstGeom prst="rect">
-            <a:avLst/>
-          </a:prstGeom>
-          <a:noFill/>
-        </p:spPr>
-        <p:txBody>
-          <a:bodyPr wrap="square" lIns="45720" rIns="45720" tIns="27432" bIns="27432" anchor="t">
-            <a:spAutoFit/>
-          </a:bodyPr>
-          <a:lstStyle/>
-          <a:p>
-            <a:pPr algn="ctr"/>
-            <a:r>
-              <a:rPr sz="3400" b="1">
-                <a:solidFill>
-                  <a:srgbClr val="16805B"/>
-                </a:solidFill>
-                <a:latin typeface="Noto Sans JP"/>
-              </a:rPr>
-              <a:t>$0.0007</a:t>
-            </a:r>
-          </a:p>
-        </p:txBody>
-      </p:sp>
-      <p:sp>
-        <p:nvSpPr>
-          <p:cNvPr id="10" name="TextBox 9"/>
-          <p:cNvSpPr txBox="1"/>
-          <p:nvPr/>
-        </p:nvSpPr>
-        <p:spPr>
-          <a:xfrm>
-            <a:off x="6181344" y="2423160"/>
-            <a:ext cx="2478024" cy="457200"/>
+                  <a:srgbClr val="172433"/>
+                </a:solidFill>
+                <a:latin typeface="Noto Sans JP"/>
+              </a:rPr>
+              <a:t>「私はこう理解しました」＋会話の引用</a:t>
+            </a:r>
+          </a:p>
+        </p:txBody>
+      </p:sp>
+      <p:cxnSp>
+        <p:nvCxnSpPr>
+          <p:cNvPr id="12" name="Connector 11"/>
+          <p:cNvCxnSpPr/>
+          <p:nvPr/>
+        </p:nvCxnSpPr>
+        <p:spPr>
+          <a:xfrm>
+            <a:off x="4864608" y="3017520"/>
+            <a:ext cx="210312" cy="0"/>
+          </a:xfrm>
+          <a:prstGeom prst="line">
+            <a:avLst/>
+          </a:prstGeom>
+          <a:ln w="28575">
+            <a:solidFill>
+              <a:srgbClr val="2F80C9"/>
+            </a:solidFill>
+          </a:ln>
+        </p:spPr>
+        <p:style>
+          <a:lnRef idx="2">
+            <a:schemeClr val="accent1"/>
+          </a:lnRef>
+          <a:fillRef idx="0">
+            <a:schemeClr val="accent1"/>
+          </a:fillRef>
+          <a:effectRef idx="1">
+            <a:schemeClr val="accent1"/>
+          </a:effectRef>
+          <a:fontRef idx="minor">
+            <a:schemeClr val="tx1"/>
+          </a:fontRef>
+        </p:style>
+      </p:cxnSp>
+      <p:sp>
+        <p:nvSpPr>
+          <p:cNvPr id="13" name="Rounded Rectangle 12"/>
+          <p:cNvSpPr/>
+          <p:nvPr/>
+        </p:nvSpPr>
+        <p:spPr>
+          <a:xfrm>
+            <a:off x="5074920" y="2011680"/>
+            <a:ext cx="2057400" cy="2011680"/>
+          </a:xfrm>
+          <a:prstGeom prst="roundRect">
+            <a:avLst>
+              <a:gd name="adj" fmla="val 6000"/>
+            </a:avLst>
+          </a:prstGeom>
+          <a:solidFill>
+            <a:srgbClr val="F4F8FC"/>
+          </a:solidFill>
+          <a:ln w="12700">
+            <a:solidFill>
+              <a:srgbClr val="D8E4EF"/>
+            </a:solidFill>
+          </a:ln>
+          <a:effectLst/>
+        </p:spPr>
+        <p:style>
+          <a:lnRef idx="1">
+            <a:schemeClr val="accent1"/>
+          </a:lnRef>
+          <a:fillRef idx="3">
+            <a:schemeClr val="accent1"/>
+          </a:fillRef>
+          <a:effectRef idx="2">
+            <a:schemeClr val="accent1"/>
+          </a:effectRef>
+          <a:fontRef idx="minor">
+            <a:schemeClr val="lt1"/>
+          </a:fontRef>
+        </p:style>
+        <p:txBody>
+          <a:bodyPr rtlCol="0" anchor="ctr"/>
+          <a:lstStyle/>
+          <a:p>
+            <a:pPr algn="ctr"/>
+          </a:p>
+        </p:txBody>
+      </p:sp>
+      <p:sp>
+        <p:nvSpPr>
+          <p:cNvPr id="14" name="TextBox 13"/>
+          <p:cNvSpPr txBox="1"/>
+          <p:nvPr/>
+        </p:nvSpPr>
+        <p:spPr>
+          <a:xfrm>
+            <a:off x="5212080" y="2103120"/>
+            <a:ext cx="1783080" cy="384048"/>
+          </a:xfrm>
+          <a:prstGeom prst="rect">
+            <a:avLst/>
+          </a:prstGeom>
+          <a:noFill/>
+        </p:spPr>
+        <p:txBody>
+          <a:bodyPr wrap="square" lIns="45720" rIns="45720" tIns="27432" bIns="27432" anchor="t">
+            <a:spAutoFit/>
+          </a:bodyPr>
+          <a:lstStyle/>
+          <a:p>
+            <a:pPr algn="ctr"/>
+            <a:r>
+              <a:rPr sz="1600" b="1">
+                <a:solidFill>
+                  <a:srgbClr val="0B315B"/>
+                </a:solidFill>
+                <a:latin typeface="Noto Sans JP"/>
+              </a:rPr>
+              <a:t>作り手が応答</a:t>
+            </a:r>
+          </a:p>
+        </p:txBody>
+      </p:sp>
+      <p:sp>
+        <p:nvSpPr>
+          <p:cNvPr id="15" name="TextBox 14"/>
+          <p:cNvSpPr txBox="1"/>
+          <p:nvPr/>
+        </p:nvSpPr>
+        <p:spPr>
+          <a:xfrm>
+            <a:off x="5212080" y="2514600"/>
+            <a:ext cx="1783080" cy="1417320"/>
           </a:xfrm>
           <a:prstGeom prst="rect">
             <a:avLst/>
@@ -8774,60 +9506,143 @@
             <a:r>
               <a:rPr sz="1350" b="0">
                 <a:solidFill>
-                  <a:srgbClr val="5B6B7D"/>
-                </a:solidFill>
-                <a:latin typeface="Noto Sans JP"/>
-              </a:rPr>
-              <a:t>音声の文字化 1 回</a:t>
-            </a:r>
-          </a:p>
-        </p:txBody>
-      </p:sp>
-      <p:sp>
-        <p:nvSpPr>
-          <p:cNvPr id="11" name="TextBox 10"/>
-          <p:cNvSpPr txBox="1"/>
-          <p:nvPr/>
-        </p:nvSpPr>
-        <p:spPr>
-          <a:xfrm>
-            <a:off x="8988551" y="1691640"/>
-            <a:ext cx="2478024" cy="685800"/>
-          </a:xfrm>
-          <a:prstGeom prst="rect">
-            <a:avLst/>
-          </a:prstGeom>
-          <a:noFill/>
-        </p:spPr>
-        <p:txBody>
-          <a:bodyPr wrap="square" lIns="45720" rIns="45720" tIns="27432" bIns="27432" anchor="t">
-            <a:spAutoFit/>
-          </a:bodyPr>
-          <a:lstStyle/>
-          <a:p>
-            <a:pPr algn="ctr"/>
-            <a:r>
-              <a:rPr sz="3400" b="1">
-                <a:solidFill>
-                  <a:srgbClr val="16805B"/>
-                </a:solidFill>
-                <a:latin typeface="Noto Sans JP"/>
-              </a:rPr>
-              <a:t>885</a:t>
-            </a:r>
-          </a:p>
-        </p:txBody>
-      </p:sp>
-      <p:sp>
-        <p:nvSpPr>
-          <p:cNvPr id="12" name="TextBox 11"/>
-          <p:cNvSpPr txBox="1"/>
-          <p:nvPr/>
-        </p:nvSpPr>
-        <p:spPr>
-          <a:xfrm>
-            <a:off x="8988551" y="2423160"/>
-            <a:ext cx="2478024" cy="457200"/>
+                  <a:srgbClr val="172433"/>
+                </a:solidFill>
+                <a:latin typeface="Noto Sans JP"/>
+              </a:rPr>
+              <a:t>合っている／一部違う／違う</a:t>
+            </a:r>
+          </a:p>
+        </p:txBody>
+      </p:sp>
+      <p:cxnSp>
+        <p:nvCxnSpPr>
+          <p:cNvPr id="16" name="Connector 15"/>
+          <p:cNvCxnSpPr/>
+          <p:nvPr/>
+        </p:nvCxnSpPr>
+        <p:spPr>
+          <a:xfrm>
+            <a:off x="7150608" y="3017520"/>
+            <a:ext cx="210312" cy="0"/>
+          </a:xfrm>
+          <a:prstGeom prst="line">
+            <a:avLst/>
+          </a:prstGeom>
+          <a:ln w="28575">
+            <a:solidFill>
+              <a:srgbClr val="2F80C9"/>
+            </a:solidFill>
+          </a:ln>
+        </p:spPr>
+        <p:style>
+          <a:lnRef idx="2">
+            <a:schemeClr val="accent1"/>
+          </a:lnRef>
+          <a:fillRef idx="0">
+            <a:schemeClr val="accent1"/>
+          </a:fillRef>
+          <a:effectRef idx="1">
+            <a:schemeClr val="accent1"/>
+          </a:effectRef>
+          <a:fontRef idx="minor">
+            <a:schemeClr val="tx1"/>
+          </a:fontRef>
+        </p:style>
+      </p:cxnSp>
+      <p:sp>
+        <p:nvSpPr>
+          <p:cNvPr id="17" name="Rounded Rectangle 16"/>
+          <p:cNvSpPr/>
+          <p:nvPr/>
+        </p:nvSpPr>
+        <p:spPr>
+          <a:xfrm>
+            <a:off x="7360920" y="2011680"/>
+            <a:ext cx="2057400" cy="2011680"/>
+          </a:xfrm>
+          <a:prstGeom prst="roundRect">
+            <a:avLst>
+              <a:gd name="adj" fmla="val 6000"/>
+            </a:avLst>
+          </a:prstGeom>
+          <a:solidFill>
+            <a:srgbClr val="F4F8FC"/>
+          </a:solidFill>
+          <a:ln w="12700">
+            <a:solidFill>
+              <a:srgbClr val="D8E4EF"/>
+            </a:solidFill>
+          </a:ln>
+          <a:effectLst/>
+        </p:spPr>
+        <p:style>
+          <a:lnRef idx="1">
+            <a:schemeClr val="accent1"/>
+          </a:lnRef>
+          <a:fillRef idx="3">
+            <a:schemeClr val="accent1"/>
+          </a:fillRef>
+          <a:effectRef idx="2">
+            <a:schemeClr val="accent1"/>
+          </a:effectRef>
+          <a:fontRef idx="minor">
+            <a:schemeClr val="lt1"/>
+          </a:fontRef>
+        </p:style>
+        <p:txBody>
+          <a:bodyPr rtlCol="0" anchor="ctr"/>
+          <a:lstStyle/>
+          <a:p>
+            <a:pPr algn="ctr"/>
+          </a:p>
+        </p:txBody>
+      </p:sp>
+      <p:sp>
+        <p:nvSpPr>
+          <p:cNvPr id="18" name="TextBox 17"/>
+          <p:cNvSpPr txBox="1"/>
+          <p:nvPr/>
+        </p:nvSpPr>
+        <p:spPr>
+          <a:xfrm>
+            <a:off x="7498080" y="2103120"/>
+            <a:ext cx="1783080" cy="384048"/>
+          </a:xfrm>
+          <a:prstGeom prst="rect">
+            <a:avLst/>
+          </a:prstGeom>
+          <a:noFill/>
+        </p:spPr>
+        <p:txBody>
+          <a:bodyPr wrap="square" lIns="45720" rIns="45720" tIns="27432" bIns="27432" anchor="t">
+            <a:spAutoFit/>
+          </a:bodyPr>
+          <a:lstStyle/>
+          <a:p>
+            <a:pPr algn="ctr"/>
+            <a:r>
+              <a:rPr sz="1600" b="1">
+                <a:solidFill>
+                  <a:srgbClr val="0B315B"/>
+                </a:solidFill>
+                <a:latin typeface="Noto Sans JP"/>
+              </a:rPr>
+              <a:t>直して再提案</a:t>
+            </a:r>
+          </a:p>
+        </p:txBody>
+      </p:sp>
+      <p:sp>
+        <p:nvSpPr>
+          <p:cNvPr id="19" name="TextBox 18"/>
+          <p:cNvSpPr txBox="1"/>
+          <p:nvPr/>
+        </p:nvSpPr>
+        <p:spPr>
+          <a:xfrm>
+            <a:off x="7498080" y="2514600"/>
+            <a:ext cx="1783080" cy="1417320"/>
           </a:xfrm>
           <a:prstGeom prst="rect">
             <a:avLst/>
@@ -8844,317 +9659,203 @@
             <a:r>
               <a:rPr sz="1350" b="0">
                 <a:solidFill>
-                  <a:srgbClr val="5B6B7D"/>
-                </a:solidFill>
-                <a:latin typeface="Noto Sans JP"/>
-              </a:rPr>
-              <a:t>自動テスト（全通過）</a:t>
-            </a:r>
-          </a:p>
-        </p:txBody>
-      </p:sp>
-      <p:graphicFrame>
-        <p:nvGraphicFramePr>
-          <p:cNvPr id="13" name="Table 12"/>
-          <p:cNvGraphicFramePr>
-            <a:graphicFrameLocks noGrp="1"/>
-          </p:cNvGraphicFramePr>
-          <p:nvPr/>
-        </p:nvGraphicFramePr>
-        <p:xfrm>
-          <a:off x="548640" y="3291840"/>
-          <a:ext cx="11064240" cy="2852928"/>
-        </p:xfrm>
-        <a:graphic>
-          <a:graphicData uri="http://schemas.openxmlformats.org/drawingml/2006/table">
-            <a:tbl>
-              <a:tblPr firstRow="1" bandRow="1">
-                <a:tableStyleId>{5C22544A-7EE6-4342-B048-85BDC9FD1C3A}</a:tableStyleId>
-              </a:tblPr>
-              <a:tblGrid>
-                <a:gridCol w="2926080"/>
-                <a:gridCol w="8138160"/>
-              </a:tblGrid>
-              <a:tr h="475488">
-                <a:tc>
-                  <a:txBody>
-                    <a:bodyPr wrap="square"/>
-                    <a:lstStyle/>
-                    <a:p>
-                      <a:r>
-                        <a:rPr sz="1300" b="1">
-                          <a:solidFill>
-                            <a:srgbClr val="FFFFFF"/>
-                          </a:solidFill>
-                          <a:latin typeface="Noto Sans JP"/>
-                        </a:rPr>
-                        <a:t>測ったもの</a:t>
-                      </a:r>
-                    </a:p>
-                  </a:txBody>
-                  <a:tcPr marL="73152" marR="73152" marT="36576" marB="36576" anchor="ctr">
-                    <a:solidFill>
-                      <a:srgbClr val="0B315B"/>
-                    </a:solidFill>
-                  </a:tcPr>
-                </a:tc>
-                <a:tc>
-                  <a:txBody>
-                    <a:bodyPr wrap="square"/>
-                    <a:lstStyle/>
-                    <a:p>
-                      <a:r>
-                        <a:rPr sz="1300" b="1">
-                          <a:solidFill>
-                            <a:srgbClr val="FFFFFF"/>
-                          </a:solidFill>
-                          <a:latin typeface="Noto Sans JP"/>
-                        </a:rPr>
-                        <a:t>結果</a:t>
-                      </a:r>
-                    </a:p>
-                  </a:txBody>
-                  <a:tcPr marL="73152" marR="73152" marT="36576" marB="36576" anchor="ctr">
-                    <a:solidFill>
-                      <a:srgbClr val="0B315B"/>
-                    </a:solidFill>
-                  </a:tcPr>
-                </a:tc>
-              </a:tr>
-              <a:tr h="475488">
-                <a:tc>
-                  <a:txBody>
-                    <a:bodyPr wrap="square"/>
-                    <a:lstStyle/>
-                    <a:p>
-                      <a:r>
-                        <a:rPr sz="1300" b="1">
-                          <a:solidFill>
-                            <a:srgbClr val="172433"/>
-                          </a:solidFill>
-                          <a:latin typeface="Noto Sans JP"/>
-                        </a:rPr>
-                        <a:t>会話の判断（6モデル）</a:t>
-                      </a:r>
-                    </a:p>
-                  </a:txBody>
-                  <a:tcPr marL="73152" marR="73152" marT="36576" marB="36576" anchor="ctr">
-                    <a:solidFill>
-                      <a:srgbClr val="F4F8FC"/>
-                    </a:solidFill>
-                  </a:tcPr>
-                </a:tc>
-                <a:tc>
-                  <a:txBody>
-                    <a:bodyPr wrap="square"/>
-                    <a:lstStyle/>
-                    <a:p>
-                      <a:r>
-                        <a:rPr sz="1300" b="0">
-                          <a:solidFill>
-                            <a:srgbClr val="172433"/>
-                          </a:solidFill>
-                          <a:latin typeface="Noto Sans JP"/>
-                        </a:rPr>
-                        <a:t>1件 $0.0005〜$0.0123。gemini-3.5-flash-lite は 1.6 秒・同意率 85%</a:t>
-                      </a:r>
-                    </a:p>
-                  </a:txBody>
-                  <a:tcPr marL="73152" marR="73152" marT="36576" marB="36576" anchor="ctr">
-                    <a:solidFill>
-                      <a:srgbClr val="F4F8FC"/>
-                    </a:solidFill>
-                  </a:tcPr>
-                </a:tc>
-              </a:tr>
-              <a:tr h="475488">
-                <a:tc>
-                  <a:txBody>
-                    <a:bodyPr wrap="square"/>
-                    <a:lstStyle/>
-                    <a:p>
-                      <a:r>
-                        <a:rPr sz="1300" b="1">
-                          <a:solidFill>
-                            <a:srgbClr val="172433"/>
-                          </a:solidFill>
-                          <a:latin typeface="Noto Sans JP"/>
-                        </a:rPr>
-                        <a:t>面積の門</a:t>
-                      </a:r>
-                    </a:p>
-                  </a:txBody>
-                  <a:tcPr marL="73152" marR="73152" marT="36576" marB="36576" anchor="ctr">
-                    <a:solidFill>
-                      <a:srgbClr val="FFFFFF"/>
-                    </a:solidFill>
-                  </a:tcPr>
-                </a:tc>
-                <a:tc>
-                  <a:txBody>
-                    <a:bodyPr wrap="square"/>
-                    <a:lstStyle/>
-                    <a:p>
-                      <a:r>
-                        <a:rPr sz="1300" b="0">
-                          <a:solidFill>
-                            <a:srgbClr val="172433"/>
-                          </a:solidFill>
-                          <a:latin typeface="Noto Sans JP"/>
-                        </a:rPr>
-                        <a:t>広く開けた画像の通過 0/20。端末が測る拡張モードは、圧縮の影響を受けない</a:t>
-                      </a:r>
-                    </a:p>
-                  </a:txBody>
-                  <a:tcPr marL="73152" marR="73152" marT="36576" marB="36576" anchor="ctr">
-                    <a:solidFill>
-                      <a:srgbClr val="FFFFFF"/>
-                    </a:solidFill>
-                  </a:tcPr>
-                </a:tc>
-              </a:tr>
-              <a:tr h="475488">
-                <a:tc>
-                  <a:txBody>
-                    <a:bodyPr wrap="square"/>
-                    <a:lstStyle/>
-                    <a:p>
-                      <a:r>
-                        <a:rPr sz="1300" b="1">
-                          <a:solidFill>
-                            <a:srgbClr val="172433"/>
-                          </a:solidFill>
-                          <a:latin typeface="Noto Sans JP"/>
-                        </a:rPr>
-                        <a:t>承認だけで下書きになる行動</a:t>
-                      </a:r>
-                    </a:p>
-                  </a:txBody>
-                  <a:tcPr marL="73152" marR="73152" marT="36576" marB="36576" anchor="ctr">
-                    <a:solidFill>
-                      <a:srgbClr val="F4F8FC"/>
-                    </a:solidFill>
-                  </a:tcPr>
-                </a:tc>
-                <a:tc>
-                  <a:txBody>
-                    <a:bodyPr wrap="square"/>
-                    <a:lstStyle/>
-                    <a:p>
-                      <a:r>
-                        <a:rPr sz="1300" b="0">
-                          <a:solidFill>
-                            <a:srgbClr val="172433"/>
-                          </a:solidFill>
-                          <a:latin typeface="Noto Sans JP"/>
-                        </a:rPr>
-                        <a:t>27% → 33%（日付の候補をコードが作る）</a:t>
-                      </a:r>
-                    </a:p>
-                  </a:txBody>
-                  <a:tcPr marL="73152" marR="73152" marT="36576" marB="36576" anchor="ctr">
-                    <a:solidFill>
-                      <a:srgbClr val="F4F8FC"/>
-                    </a:solidFill>
-                  </a:tcPr>
-                </a:tc>
-              </a:tr>
-              <a:tr h="475488">
-                <a:tc>
-                  <a:txBody>
-                    <a:bodyPr wrap="square"/>
-                    <a:lstStyle/>
-                    <a:p>
-                      <a:r>
-                        <a:rPr sz="1300" b="1">
-                          <a:solidFill>
-                            <a:srgbClr val="172433"/>
-                          </a:solidFill>
-                          <a:latin typeface="Noto Sans JP"/>
-                        </a:rPr>
-                        <a:t>Orca を主にした構成</a:t>
-                      </a:r>
-                    </a:p>
-                  </a:txBody>
-                  <a:tcPr marL="73152" marR="73152" marT="36576" marB="36576" anchor="ctr">
-                    <a:solidFill>
-                      <a:srgbClr val="FFFFFF"/>
-                    </a:solidFill>
-                  </a:tcPr>
-                </a:tc>
-                <a:tc>
-                  <a:txBody>
-                    <a:bodyPr wrap="square"/>
-                    <a:lstStyle/>
-                    <a:p>
-                      <a:r>
-                        <a:rPr sz="1300" b="0">
-                          <a:solidFill>
-                            <a:srgbClr val="172433"/>
-                          </a:solidFill>
-                          <a:latin typeface="Noto Sans JP"/>
-                        </a:rPr>
-                        <a:t>判断1件の費用 −32%。Claude 直は予備</a:t>
-                      </a:r>
-                    </a:p>
-                  </a:txBody>
-                  <a:tcPr marL="73152" marR="73152" marT="36576" marB="36576" anchor="ctr">
-                    <a:solidFill>
-                      <a:srgbClr val="FFFFFF"/>
-                    </a:solidFill>
-                  </a:tcPr>
-                </a:tc>
-              </a:tr>
-              <a:tr h="475488">
-                <a:tc>
-                  <a:txBody>
-                    <a:bodyPr wrap="square"/>
-                    <a:lstStyle/>
-                    <a:p>
-                      <a:r>
-                        <a:rPr sz="1300" b="1">
-                          <a:solidFill>
-                            <a:srgbClr val="172433"/>
-                          </a:solidFill>
-                          <a:latin typeface="Noto Sans JP"/>
-                        </a:rPr>
-                        <a:t>表の形が壊れたとき</a:t>
-                      </a:r>
-                    </a:p>
-                  </a:txBody>
-                  <a:tcPr marL="73152" marR="73152" marT="36576" marB="36576" anchor="ctr">
-                    <a:solidFill>
-                      <a:srgbClr val="F4F8FC"/>
-                    </a:solidFill>
-                  </a:tcPr>
-                </a:tc>
-                <a:tc>
-                  <a:txBody>
-                    <a:bodyPr wrap="square"/>
-                    <a:lstStyle/>
-                    <a:p>
-                      <a:r>
-                        <a:rPr sz="1300" b="0">
-                          <a:solidFill>
-                            <a:srgbClr val="172433"/>
-                          </a:solidFill>
-                          <a:latin typeface="Noto Sans JP"/>
-                        </a:rPr>
-                        <a:t>AI に 2〜3 通り作り直させ、Excel の複数シートに。作り直しは 13〜15 秒・約 $0.02</a:t>
-                      </a:r>
-                    </a:p>
-                  </a:txBody>
-                  <a:tcPr marL="73152" marR="73152" marT="36576" marB="36576" anchor="ctr">
-                    <a:solidFill>
-                      <a:srgbClr val="F4F8FC"/>
-                    </a:solidFill>
-                  </a:tcPr>
-                </a:tc>
-              </a:tr>
-            </a:tbl>
-          </a:graphicData>
-        </a:graphic>
-      </p:graphicFrame>
+                  <a:srgbClr val="172433"/>
+                </a:solidFill>
+                <a:latin typeface="Noto Sans JP"/>
+              </a:rPr>
+              <a:t>2回続けて違えば、AIは止まる</a:t>
+            </a:r>
+          </a:p>
+        </p:txBody>
+      </p:sp>
+      <p:cxnSp>
+        <p:nvCxnSpPr>
+          <p:cNvPr id="20" name="Connector 19"/>
+          <p:cNvCxnSpPr/>
+          <p:nvPr/>
+        </p:nvCxnSpPr>
+        <p:spPr>
+          <a:xfrm>
+            <a:off x="9436608" y="3017520"/>
+            <a:ext cx="210312" cy="0"/>
+          </a:xfrm>
+          <a:prstGeom prst="line">
+            <a:avLst/>
+          </a:prstGeom>
+          <a:ln w="28575">
+            <a:solidFill>
+              <a:srgbClr val="2F80C9"/>
+            </a:solidFill>
+          </a:ln>
+        </p:spPr>
+        <p:style>
+          <a:lnRef idx="2">
+            <a:schemeClr val="accent1"/>
+          </a:lnRef>
+          <a:fillRef idx="0">
+            <a:schemeClr val="accent1"/>
+          </a:fillRef>
+          <a:effectRef idx="1">
+            <a:schemeClr val="accent1"/>
+          </a:effectRef>
+          <a:fontRef idx="minor">
+            <a:schemeClr val="tx1"/>
+          </a:fontRef>
+        </p:style>
+      </p:cxnSp>
+      <p:sp>
+        <p:nvSpPr>
+          <p:cNvPr id="21" name="Rounded Rectangle 20"/>
+          <p:cNvSpPr/>
+          <p:nvPr/>
+        </p:nvSpPr>
+        <p:spPr>
+          <a:xfrm>
+            <a:off x="9646920" y="2011680"/>
+            <a:ext cx="2057400" cy="2011680"/>
+          </a:xfrm>
+          <a:prstGeom prst="roundRect">
+            <a:avLst>
+              <a:gd name="adj" fmla="val 6000"/>
+            </a:avLst>
+          </a:prstGeom>
+          <a:solidFill>
+            <a:srgbClr val="EFF8F3"/>
+          </a:solidFill>
+          <a:ln w="12700">
+            <a:solidFill>
+              <a:srgbClr val="A6D6C3"/>
+            </a:solidFill>
+          </a:ln>
+          <a:effectLst/>
+        </p:spPr>
+        <p:style>
+          <a:lnRef idx="1">
+            <a:schemeClr val="accent1"/>
+          </a:lnRef>
+          <a:fillRef idx="3">
+            <a:schemeClr val="accent1"/>
+          </a:fillRef>
+          <a:effectRef idx="2">
+            <a:schemeClr val="accent1"/>
+          </a:effectRef>
+          <a:fontRef idx="minor">
+            <a:schemeClr val="lt1"/>
+          </a:fontRef>
+        </p:style>
+        <p:txBody>
+          <a:bodyPr rtlCol="0" anchor="ctr"/>
+          <a:lstStyle/>
+          <a:p>
+            <a:pPr algn="ctr"/>
+          </a:p>
+        </p:txBody>
+      </p:sp>
+      <p:sp>
+        <p:nvSpPr>
+          <p:cNvPr id="22" name="TextBox 21"/>
+          <p:cNvSpPr txBox="1"/>
+          <p:nvPr/>
+        </p:nvSpPr>
+        <p:spPr>
+          <a:xfrm>
+            <a:off x="9784080" y="2103120"/>
+            <a:ext cx="1783080" cy="384048"/>
+          </a:xfrm>
+          <a:prstGeom prst="rect">
+            <a:avLst/>
+          </a:prstGeom>
+          <a:noFill/>
+        </p:spPr>
+        <p:txBody>
+          <a:bodyPr wrap="square" lIns="45720" rIns="45720" tIns="27432" bIns="27432" anchor="t">
+            <a:spAutoFit/>
+          </a:bodyPr>
+          <a:lstStyle/>
+          <a:p>
+            <a:pPr algn="ctr"/>
+            <a:r>
+              <a:rPr sz="1600" b="1">
+                <a:solidFill>
+                  <a:srgbClr val="0B315B"/>
+                </a:solidFill>
+                <a:latin typeface="Noto Sans JP"/>
+              </a:rPr>
+              <a:t>承認して下書き</a:t>
+            </a:r>
+          </a:p>
+        </p:txBody>
+      </p:sp>
+      <p:sp>
+        <p:nvSpPr>
+          <p:cNvPr id="23" name="TextBox 22"/>
+          <p:cNvSpPr txBox="1"/>
+          <p:nvPr/>
+        </p:nvSpPr>
+        <p:spPr>
+          <a:xfrm>
+            <a:off x="9784080" y="2514600"/>
+            <a:ext cx="1783080" cy="1417320"/>
+          </a:xfrm>
+          <a:prstGeom prst="rect">
+            <a:avLst/>
+          </a:prstGeom>
+          <a:noFill/>
+        </p:spPr>
+        <p:txBody>
+          <a:bodyPr wrap="square" lIns="45720" rIns="45720" tIns="27432" bIns="27432" anchor="t">
+            <a:spAutoFit/>
+          </a:bodyPr>
+          <a:lstStyle/>
+          <a:p>
+            <a:pPr algn="ctr"/>
+            <a:r>
+              <a:rPr sz="1350" b="0">
+                <a:solidFill>
+                  <a:srgbClr val="172433"/>
+                </a:solidFill>
+                <a:latin typeface="Noto Sans JP"/>
+              </a:rPr>
+              <a:t>通知案・点検日・入力欄・資料</a:t>
+            </a:r>
+          </a:p>
+        </p:txBody>
+      </p:sp>
+      <p:sp>
+        <p:nvSpPr>
+          <p:cNvPr id="24" name="TextBox 23"/>
+          <p:cNvSpPr txBox="1"/>
+          <p:nvPr/>
+        </p:nvSpPr>
+        <p:spPr>
+          <a:xfrm>
+            <a:off x="731520" y="4572000"/>
+            <a:ext cx="10698480" cy="822960"/>
+          </a:xfrm>
+          <a:prstGeom prst="rect">
+            <a:avLst/>
+          </a:prstGeom>
+          <a:noFill/>
+        </p:spPr>
+        <p:txBody>
+          <a:bodyPr wrap="square" lIns="45720" rIns="45720" tIns="27432" bIns="27432" anchor="t">
+            <a:spAutoFit/>
+          </a:bodyPr>
+          <a:lstStyle/>
+          <a:p>
+            <a:pPr algn="ctr"/>
+            <a:r>
+              <a:rPr sz="1600" b="1">
+                <a:solidFill>
+                  <a:srgbClr val="0B315B"/>
+                </a:solidFill>
+                <a:latin typeface="Noto Sans JP"/>
+              </a:rPr>
+              <a:t>「違う」は記録して、同意率として測る。判断が思いと合っているかの物差しにする</a:t>
+            </a:r>
+          </a:p>
+        </p:txBody>
+      </p:sp>
     </p:spTree>
   </p:cSld>
   <p:clrMapOvr>
